--- a/ВКР/Презентация ВКР.pptx
+++ b/ВКР/Презентация ВКР.pptx
@@ -5,7 +5,7 @@
     <p:sldMasterId id="2147483672" r:id="rId1"/>
   </p:sldMasterIdLst>
   <p:notesMasterIdLst>
-    <p:notesMasterId r:id="rId16"/>
+    <p:notesMasterId r:id="rId15"/>
   </p:notesMasterIdLst>
   <p:sldIdLst>
     <p:sldId id="256" r:id="rId2"/>
@@ -14,14 +14,13 @@
     <p:sldId id="259" r:id="rId5"/>
     <p:sldId id="274" r:id="rId6"/>
     <p:sldId id="271" r:id="rId7"/>
-    <p:sldId id="273" r:id="rId8"/>
-    <p:sldId id="264" r:id="rId9"/>
-    <p:sldId id="265" r:id="rId10"/>
-    <p:sldId id="266" r:id="rId11"/>
-    <p:sldId id="267" r:id="rId12"/>
-    <p:sldId id="268" r:id="rId13"/>
-    <p:sldId id="269" r:id="rId14"/>
-    <p:sldId id="270" r:id="rId15"/>
+    <p:sldId id="265" r:id="rId8"/>
+    <p:sldId id="277" r:id="rId9"/>
+    <p:sldId id="276" r:id="rId10"/>
+    <p:sldId id="273" r:id="rId11"/>
+    <p:sldId id="266" r:id="rId12"/>
+    <p:sldId id="269" r:id="rId13"/>
+    <p:sldId id="270" r:id="rId14"/>
   </p:sldIdLst>
   <p:sldSz cx="12192000" cy="6858000"/>
   <p:notesSz cx="6858000" cy="9144000"/>
@@ -210,7 +209,7 @@
           <a:p>
             <a:fld id="{09B7CBF2-44B9-4FD7-ADE0-AEF665969899}" type="datetimeFigureOut">
               <a:rPr lang="ru-RU" smtClean="0"/>
-              <a:t>20.05.2025</a:t>
+              <a:t>23.05.2025</a:t>
             </a:fld>
             <a:endParaRPr lang="ru-RU"/>
           </a:p>
@@ -611,36 +610,9 @@
                 <a:latin typeface="Times New Roman" panose="02020603050405020304" pitchFamily="18" charset="0"/>
                 <a:ea typeface="Times New Roman" panose="02020603050405020304" pitchFamily="18" charset="0"/>
               </a:rPr>
-              <a:t>Стриминг применяется в разных сферах, позволяя проводить некоторые мероприятия в удаленном формате. </a:t>
-            </a:r>
-            <a:r>
-              <a:rPr lang="en-US" sz="1800" dirty="0">
-                <a:effectLst/>
-                <a:latin typeface="Times New Roman" panose="02020603050405020304" pitchFamily="18" charset="0"/>
-                <a:ea typeface="Times New Roman" panose="02020603050405020304" pitchFamily="18" charset="0"/>
-              </a:rPr>
-              <a:t> </a:t>
-            </a:r>
-            <a:r>
-              <a:rPr lang="ru-RU" sz="1800" dirty="0">
-                <a:effectLst/>
-                <a:latin typeface="Times New Roman" panose="02020603050405020304" pitchFamily="18" charset="0"/>
-                <a:ea typeface="Times New Roman" panose="02020603050405020304" pitchFamily="18" charset="0"/>
-              </a:rPr>
-              <a:t>Я выбрал развлекательную сферу.</a:t>
-            </a:r>
-          </a:p>
-          <a:p>
-            <a:r>
-              <a:rPr lang="ru-RU" dirty="0"/>
-              <a:t>Площадка направлена стриминг видеоигр, но не ограничена этим. Можно проводить трансляции на различные темы. Здесь любой человек может поделиться личными знаниям. Так что любой человек найдёт контент по своему вкусу.</a:t>
-            </a:r>
-          </a:p>
-          <a:p>
-            <a:r>
-              <a:rPr lang="ru-RU" dirty="0"/>
-              <a:t>Создатели могут монетизировать любой свой контент. За счёт широкого охвата аудитории можно предоставлять услуги рекламы большому спектру компаний.</a:t>
-            </a:r>
+              <a:t>Искусственный интеллект (ИИ) и нейросети популярных быстроразвивающихся направлений. Они широко применяются во многих отраслях. Детекция объектов </a:t>
+            </a:r>
+            <a:endParaRPr lang="ru-RU" dirty="0"/>
           </a:p>
         </p:txBody>
       </p:sp>
@@ -856,6 +828,228 @@
   <p:cSld>
     <p:spTree>
       <p:nvGrpSpPr>
+        <p:cNvPr id="1" name="">
+          <a:extLst>
+            <a:ext uri="{FF2B5EF4-FFF2-40B4-BE49-F238E27FC236}">
+              <a16:creationId xmlns:a16="http://schemas.microsoft.com/office/drawing/2014/main" id="{0CBA559D-E8FF-4BF9-B767-8330CF66D6C8}"/>
+            </a:ext>
+          </a:extLst>
+        </p:cNvPr>
+        <p:cNvGrpSpPr/>
+        <p:nvPr/>
+      </p:nvGrpSpPr>
+      <p:grpSpPr>
+        <a:xfrm>
+          <a:off x="0" y="0"/>
+          <a:ext cx="0" cy="0"/>
+          <a:chOff x="0" y="0"/>
+          <a:chExt cx="0" cy="0"/>
+        </a:xfrm>
+      </p:grpSpPr>
+      <p:sp>
+        <p:nvSpPr>
+          <p:cNvPr id="2" name="Образ слайда 1">
+            <a:extLst>
+              <a:ext uri="{FF2B5EF4-FFF2-40B4-BE49-F238E27FC236}">
+                <a16:creationId xmlns:a16="http://schemas.microsoft.com/office/drawing/2014/main" id="{F62696F0-D7AD-8B80-D150-2ECBE6A2D61D}"/>
+              </a:ext>
+            </a:extLst>
+          </p:cNvPr>
+          <p:cNvSpPr>
+            <a:spLocks noGrp="1" noRot="1" noChangeAspect="1"/>
+          </p:cNvSpPr>
+          <p:nvPr>
+            <p:ph type="sldImg"/>
+          </p:nvPr>
+        </p:nvSpPr>
+        <p:spPr/>
+      </p:sp>
+      <p:sp>
+        <p:nvSpPr>
+          <p:cNvPr id="3" name="Заметки 2">
+            <a:extLst>
+              <a:ext uri="{FF2B5EF4-FFF2-40B4-BE49-F238E27FC236}">
+                <a16:creationId xmlns:a16="http://schemas.microsoft.com/office/drawing/2014/main" id="{CECCCE4A-EE36-F623-30A3-A9FBBEED0C2F}"/>
+              </a:ext>
+            </a:extLst>
+          </p:cNvPr>
+          <p:cNvSpPr>
+            <a:spLocks noGrp="1"/>
+          </p:cNvSpPr>
+          <p:nvPr>
+            <p:ph type="body" idx="1"/>
+          </p:nvPr>
+        </p:nvSpPr>
+        <p:spPr/>
+        <p:txBody>
+          <a:bodyPr/>
+          <a:lstStyle/>
+          <a:p>
+            <a:r>
+              <a:rPr lang="ru-RU" dirty="0"/>
+              <a:t>Мною выделены основные функции веб-приложения.</a:t>
+            </a:r>
+          </a:p>
+        </p:txBody>
+      </p:sp>
+      <p:sp>
+        <p:nvSpPr>
+          <p:cNvPr id="4" name="Номер слайда 3">
+            <a:extLst>
+              <a:ext uri="{FF2B5EF4-FFF2-40B4-BE49-F238E27FC236}">
+                <a16:creationId xmlns:a16="http://schemas.microsoft.com/office/drawing/2014/main" id="{2796E794-3F06-52B0-EBAC-2B779910D860}"/>
+              </a:ext>
+            </a:extLst>
+          </p:cNvPr>
+          <p:cNvSpPr>
+            <a:spLocks noGrp="1"/>
+          </p:cNvSpPr>
+          <p:nvPr>
+            <p:ph type="sldNum" sz="quarter" idx="5"/>
+          </p:nvPr>
+        </p:nvSpPr>
+        <p:spPr/>
+        <p:txBody>
+          <a:bodyPr/>
+          <a:lstStyle/>
+          <a:p>
+            <a:fld id="{70C95F39-9986-42CA-BA2A-89BEF2EFFE33}" type="slidenum">
+              <a:rPr lang="ru-RU" smtClean="0"/>
+              <a:t>8</a:t>
+            </a:fld>
+            <a:endParaRPr lang="ru-RU"/>
+          </a:p>
+        </p:txBody>
+      </p:sp>
+    </p:spTree>
+    <p:extLst>
+      <p:ext uri="{BB962C8B-B14F-4D97-AF65-F5344CB8AC3E}">
+        <p14:creationId xmlns:p14="http://schemas.microsoft.com/office/powerpoint/2010/main" val="3241441780"/>
+      </p:ext>
+    </p:extLst>
+  </p:cSld>
+  <p:clrMapOvr>
+    <a:masterClrMapping/>
+  </p:clrMapOvr>
+</p:notes>
+</file>
+
+<file path=ppt/notesSlides/notesSlide6.xml><?xml version="1.0" encoding="utf-8"?>
+<p:notes xmlns:a="http://schemas.openxmlformats.org/drawingml/2006/main" xmlns:r="http://schemas.openxmlformats.org/officeDocument/2006/relationships" xmlns:p="http://schemas.openxmlformats.org/presentationml/2006/main">
+  <p:cSld>
+    <p:spTree>
+      <p:nvGrpSpPr>
+        <p:cNvPr id="1" name="">
+          <a:extLst>
+            <a:ext uri="{FF2B5EF4-FFF2-40B4-BE49-F238E27FC236}">
+              <a16:creationId xmlns:a16="http://schemas.microsoft.com/office/drawing/2014/main" id="{99D5B2C6-1FE0-FBEA-2AB0-F680D00C5A24}"/>
+            </a:ext>
+          </a:extLst>
+        </p:cNvPr>
+        <p:cNvGrpSpPr/>
+        <p:nvPr/>
+      </p:nvGrpSpPr>
+      <p:grpSpPr>
+        <a:xfrm>
+          <a:off x="0" y="0"/>
+          <a:ext cx="0" cy="0"/>
+          <a:chOff x="0" y="0"/>
+          <a:chExt cx="0" cy="0"/>
+        </a:xfrm>
+      </p:grpSpPr>
+      <p:sp>
+        <p:nvSpPr>
+          <p:cNvPr id="2" name="Образ слайда 1">
+            <a:extLst>
+              <a:ext uri="{FF2B5EF4-FFF2-40B4-BE49-F238E27FC236}">
+                <a16:creationId xmlns:a16="http://schemas.microsoft.com/office/drawing/2014/main" id="{182BA091-156A-5FB4-D2E3-984DD5E62C0C}"/>
+              </a:ext>
+            </a:extLst>
+          </p:cNvPr>
+          <p:cNvSpPr>
+            <a:spLocks noGrp="1" noRot="1" noChangeAspect="1"/>
+          </p:cNvSpPr>
+          <p:nvPr>
+            <p:ph type="sldImg"/>
+          </p:nvPr>
+        </p:nvSpPr>
+        <p:spPr/>
+      </p:sp>
+      <p:sp>
+        <p:nvSpPr>
+          <p:cNvPr id="3" name="Заметки 2">
+            <a:extLst>
+              <a:ext uri="{FF2B5EF4-FFF2-40B4-BE49-F238E27FC236}">
+                <a16:creationId xmlns:a16="http://schemas.microsoft.com/office/drawing/2014/main" id="{8BEC5B86-F21E-7D2D-594D-6FDC49DB7E99}"/>
+              </a:ext>
+            </a:extLst>
+          </p:cNvPr>
+          <p:cNvSpPr>
+            <a:spLocks noGrp="1"/>
+          </p:cNvSpPr>
+          <p:nvPr>
+            <p:ph type="body" idx="1"/>
+          </p:nvPr>
+        </p:nvSpPr>
+        <p:spPr/>
+        <p:txBody>
+          <a:bodyPr/>
+          <a:lstStyle/>
+          <a:p>
+            <a:r>
+              <a:rPr lang="ru-RU" dirty="0"/>
+              <a:t>Мною выделены основные функции веб-приложения.</a:t>
+            </a:r>
+          </a:p>
+        </p:txBody>
+      </p:sp>
+      <p:sp>
+        <p:nvSpPr>
+          <p:cNvPr id="4" name="Номер слайда 3">
+            <a:extLst>
+              <a:ext uri="{FF2B5EF4-FFF2-40B4-BE49-F238E27FC236}">
+                <a16:creationId xmlns:a16="http://schemas.microsoft.com/office/drawing/2014/main" id="{FD2CE8EC-04A7-D0A3-B4F7-536827882138}"/>
+              </a:ext>
+            </a:extLst>
+          </p:cNvPr>
+          <p:cNvSpPr>
+            <a:spLocks noGrp="1"/>
+          </p:cNvSpPr>
+          <p:nvPr>
+            <p:ph type="sldNum" sz="quarter" idx="5"/>
+          </p:nvPr>
+        </p:nvSpPr>
+        <p:spPr/>
+        <p:txBody>
+          <a:bodyPr/>
+          <a:lstStyle/>
+          <a:p>
+            <a:fld id="{70C95F39-9986-42CA-BA2A-89BEF2EFFE33}" type="slidenum">
+              <a:rPr lang="ru-RU" smtClean="0"/>
+              <a:t>9</a:t>
+            </a:fld>
+            <a:endParaRPr lang="ru-RU"/>
+          </a:p>
+        </p:txBody>
+      </p:sp>
+    </p:spTree>
+    <p:extLst>
+      <p:ext uri="{BB962C8B-B14F-4D97-AF65-F5344CB8AC3E}">
+        <p14:creationId xmlns:p14="http://schemas.microsoft.com/office/powerpoint/2010/main" val="965414574"/>
+      </p:ext>
+    </p:extLst>
+  </p:cSld>
+  <p:clrMapOvr>
+    <a:masterClrMapping/>
+  </p:clrMapOvr>
+</p:notes>
+</file>
+
+<file path=ppt/notesSlides/notesSlide7.xml><?xml version="1.0" encoding="utf-8"?>
+<p:notes xmlns:a="http://schemas.openxmlformats.org/drawingml/2006/main" xmlns:r="http://schemas.openxmlformats.org/officeDocument/2006/relationships" xmlns:p="http://schemas.openxmlformats.org/presentationml/2006/main">
+  <p:cSld>
+    <p:spTree>
+      <p:nvGrpSpPr>
         <p:cNvPr id="1" name=""/>
         <p:cNvGrpSpPr/>
         <p:nvPr/>
@@ -933,7 +1127,7 @@
           <a:p>
             <a:fld id="{70C95F39-9986-42CA-BA2A-89BEF2EFFE33}" type="slidenum">
               <a:rPr lang="ru-RU" smtClean="0"/>
-              <a:t>13</a:t>
+              <a:t>12</a:t>
             </a:fld>
             <a:endParaRPr lang="ru-RU"/>
           </a:p>
@@ -1083,7 +1277,7 @@
           <a:p>
             <a:fld id="{F5CF9F3A-188F-4C16-A2DE-2587DE574B1E}" type="datetime1">
               <a:rPr lang="ru-RU" smtClean="0"/>
-              <a:t>20.05.2025</a:t>
+              <a:t>23.05.2025</a:t>
             </a:fld>
             <a:endParaRPr lang="ru-RU"/>
           </a:p>
@@ -1253,7 +1447,7 @@
           <a:p>
             <a:fld id="{3A11F0EA-DC1B-403A-BF71-142FC9FB47EA}" type="datetime1">
               <a:rPr lang="ru-RU" smtClean="0"/>
-              <a:t>20.05.2025</a:t>
+              <a:t>23.05.2025</a:t>
             </a:fld>
             <a:endParaRPr lang="ru-RU"/>
           </a:p>
@@ -1433,7 +1627,7 @@
           <a:p>
             <a:fld id="{CCC85F8A-18D6-4BA8-A576-50974D5C4A22}" type="datetime1">
               <a:rPr lang="ru-RU" smtClean="0"/>
-              <a:t>20.05.2025</a:t>
+              <a:t>23.05.2025</a:t>
             </a:fld>
             <a:endParaRPr lang="ru-RU"/>
           </a:p>
@@ -1603,7 +1797,7 @@
           <a:p>
             <a:fld id="{545A4267-40AA-4092-A36F-C26D6811F45A}" type="datetime1">
               <a:rPr lang="ru-RU" smtClean="0"/>
-              <a:t>20.05.2025</a:t>
+              <a:t>23.05.2025</a:t>
             </a:fld>
             <a:endParaRPr lang="ru-RU"/>
           </a:p>
@@ -1857,7 +2051,7 @@
           <a:p>
             <a:fld id="{E7A0052E-2485-4FD0-B116-14C5D93EDDE8}" type="datetime1">
               <a:rPr lang="ru-RU" smtClean="0"/>
-              <a:t>20.05.2025</a:t>
+              <a:t>23.05.2025</a:t>
             </a:fld>
             <a:endParaRPr lang="ru-RU"/>
           </a:p>
@@ -2089,7 +2283,7 @@
           <a:p>
             <a:fld id="{B8CB62B4-F45C-4AC4-ABBE-0574B703B479}" type="datetime1">
               <a:rPr lang="ru-RU" smtClean="0"/>
-              <a:t>20.05.2025</a:t>
+              <a:t>23.05.2025</a:t>
             </a:fld>
             <a:endParaRPr lang="ru-RU"/>
           </a:p>
@@ -2456,7 +2650,7 @@
           <a:p>
             <a:fld id="{B4B7E3C1-EF5D-4588-B524-A705B5B0D133}" type="datetime1">
               <a:rPr lang="ru-RU" smtClean="0"/>
-              <a:t>20.05.2025</a:t>
+              <a:t>23.05.2025</a:t>
             </a:fld>
             <a:endParaRPr lang="ru-RU"/>
           </a:p>
@@ -2574,7 +2768,7 @@
           <a:p>
             <a:fld id="{E7435BB4-24F7-4230-8D01-C405E5E94E64}" type="datetime1">
               <a:rPr lang="ru-RU" smtClean="0"/>
-              <a:t>20.05.2025</a:t>
+              <a:t>23.05.2025</a:t>
             </a:fld>
             <a:endParaRPr lang="ru-RU"/>
           </a:p>
@@ -2669,7 +2863,7 @@
           <a:p>
             <a:fld id="{65A904D9-2361-4337-8CBD-AF145C2276BB}" type="datetime1">
               <a:rPr lang="ru-RU" smtClean="0"/>
-              <a:t>20.05.2025</a:t>
+              <a:t>23.05.2025</a:t>
             </a:fld>
             <a:endParaRPr lang="ru-RU"/>
           </a:p>
@@ -2946,7 +3140,7 @@
           <a:p>
             <a:fld id="{7245CB82-17B0-42A9-AB4B-7BA95240445A}" type="datetime1">
               <a:rPr lang="ru-RU" smtClean="0"/>
-              <a:t>20.05.2025</a:t>
+              <a:t>23.05.2025</a:t>
             </a:fld>
             <a:endParaRPr lang="ru-RU"/>
           </a:p>
@@ -3203,7 +3397,7 @@
           <a:p>
             <a:fld id="{1DD37A11-3641-4D89-9551-B66F594B6E05}" type="datetime1">
               <a:rPr lang="ru-RU" smtClean="0"/>
-              <a:t>20.05.2025</a:t>
+              <a:t>23.05.2025</a:t>
             </a:fld>
             <a:endParaRPr lang="ru-RU"/>
           </a:p>
@@ -3416,7 +3610,7 @@
           <a:p>
             <a:fld id="{C7EACBE0-ED2A-454B-897D-9089BF3ED2F7}" type="datetime1">
               <a:rPr lang="ru-RU" smtClean="0"/>
-              <a:t>20.05.2025</a:t>
+              <a:t>23.05.2025</a:t>
             </a:fld>
             <a:endParaRPr lang="ru-RU"/>
           </a:p>
@@ -4139,31 +4333,50 @@
       </p:grpSpPr>
       <p:sp>
         <p:nvSpPr>
-          <p:cNvPr id="4" name="Заголовок 1">
+          <p:cNvPr id="5" name="Заголовок 1">
             <a:extLst>
               <a:ext uri="{FF2B5EF4-FFF2-40B4-BE49-F238E27FC236}">
-                <a16:creationId xmlns:a16="http://schemas.microsoft.com/office/drawing/2014/main" id="{0D7D0BE2-2D2C-4923-8220-23B01E71F7BA}"/>
+                <a16:creationId xmlns:a16="http://schemas.microsoft.com/office/drawing/2014/main" id="{08AFB1E6-1180-47CF-AADB-5C4D9D1C94F6}"/>
               </a:ext>
             </a:extLst>
           </p:cNvPr>
-          <p:cNvSpPr>
-            <a:spLocks noGrp="1"/>
-          </p:cNvSpPr>
-          <p:nvPr>
-            <p:ph type="title"/>
-          </p:nvPr>
+          <p:cNvSpPr txBox="1">
+            <a:spLocks/>
+          </p:cNvSpPr>
+          <p:nvPr/>
         </p:nvSpPr>
         <p:spPr>
           <a:xfrm>
-            <a:off x="1981200" y="108642"/>
+            <a:off x="2077039" y="-103626"/>
             <a:ext cx="8229600" cy="1143000"/>
           </a:xfrm>
+          <a:prstGeom prst="rect">
+            <a:avLst/>
+          </a:prstGeom>
         </p:spPr>
         <p:txBody>
-          <a:bodyPr>
+          <a:bodyPr vert="horz" lIns="91440" tIns="45720" rIns="91440" bIns="45720" rtlCol="0" anchor="ctr">
             <a:normAutofit/>
           </a:bodyPr>
-          <a:lstStyle/>
+          <a:lstStyle>
+            <a:lvl1pPr algn="l" defTabSz="914400" rtl="0" eaLnBrk="1" latinLnBrk="0" hangingPunct="1">
+              <a:lnSpc>
+                <a:spcPct val="90000"/>
+              </a:lnSpc>
+              <a:spcBef>
+                <a:spcPct val="0"/>
+              </a:spcBef>
+              <a:buNone/>
+              <a:defRPr sz="4400" kern="1200">
+                <a:solidFill>
+                  <a:schemeClr val="tx1"/>
+                </a:solidFill>
+                <a:latin typeface="+mj-lt"/>
+                <a:ea typeface="+mj-ea"/>
+                <a:cs typeface="+mj-cs"/>
+              </a:defRPr>
+            </a:lvl1pPr>
+          </a:lstStyle>
           <a:p>
             <a:pPr algn="ctr"/>
             <a:r>
@@ -4171,17 +4384,51 @@
                 <a:latin typeface="Times New Roman" pitchFamily="18" charset="0"/>
                 <a:cs typeface="Times New Roman" pitchFamily="18" charset="0"/>
               </a:rPr>
-              <a:t>Главная страница</a:t>
-            </a:r>
+              <a:t>Диаграмма последовательности</a:t>
+            </a:r>
+          </a:p>
+        </p:txBody>
+      </p:sp>
+      <p:sp>
+        <p:nvSpPr>
+          <p:cNvPr id="11" name="Номер слайда 10">
+            <a:extLst>
+              <a:ext uri="{FF2B5EF4-FFF2-40B4-BE49-F238E27FC236}">
+                <a16:creationId xmlns:a16="http://schemas.microsoft.com/office/drawing/2014/main" id="{FE060230-92E3-4D54-B637-036B28A13098}"/>
+              </a:ext>
+            </a:extLst>
+          </p:cNvPr>
+          <p:cNvSpPr>
+            <a:spLocks noGrp="1"/>
+          </p:cNvSpPr>
+          <p:nvPr>
+            <p:ph type="sldNum" sz="quarter" idx="12"/>
+          </p:nvPr>
+        </p:nvSpPr>
+        <p:spPr/>
+        <p:txBody>
+          <a:bodyPr/>
+          <a:lstStyle/>
+          <a:p>
+            <a:fld id="{1FB77788-E5A7-4255-94F6-739BDA5FC0D4}" type="slidenum">
+              <a:rPr lang="ru-RU" smtClean="0"/>
+              <a:pPr/>
+              <a:t>10</a:t>
+            </a:fld>
+            <a:r>
+              <a:rPr lang="ru-RU"/>
+              <a:t>/17</a:t>
+            </a:r>
+            <a:endParaRPr lang="ru-RU" dirty="0"/>
           </a:p>
         </p:txBody>
       </p:sp>
       <p:pic>
         <p:nvPicPr>
-          <p:cNvPr id="7" name="Рисунок 6">
+          <p:cNvPr id="2" name="Рисунок 1">
             <a:extLst>
               <a:ext uri="{FF2B5EF4-FFF2-40B4-BE49-F238E27FC236}">
-                <a16:creationId xmlns:a16="http://schemas.microsoft.com/office/drawing/2014/main" id="{322EC8D5-4902-426A-9FB4-46B079F11EBC}"/>
+                <a16:creationId xmlns:a16="http://schemas.microsoft.com/office/drawing/2014/main" id="{DF28B1EC-F213-12BE-5B6A-DDBE2B2BCAA7}"/>
               </a:ext>
             </a:extLst>
           </p:cNvPr>
@@ -4191,64 +4438,38 @@
           <p:nvPr/>
         </p:nvPicPr>
         <p:blipFill>
-          <a:blip r:embed="rId2"/>
+          <a:blip r:embed="rId2">
+            <a:extLst>
+              <a:ext uri="{28A0092B-C50C-407E-A947-70E740481C1C}">
+                <a14:useLocalDpi xmlns:a14="http://schemas.microsoft.com/office/drawing/2010/main" val="0"/>
+              </a:ext>
+            </a:extLst>
+          </a:blip>
+          <a:srcRect/>
           <a:stretch>
             <a:fillRect/>
           </a:stretch>
         </p:blipFill>
-        <p:spPr>
+        <p:spPr bwMode="auto">
           <a:xfrm>
-            <a:off x="996251" y="1251642"/>
-            <a:ext cx="10203805" cy="5104708"/>
+            <a:off x="3221672" y="700357"/>
+            <a:ext cx="5748655" cy="6092825"/>
           </a:xfrm>
           <a:prstGeom prst="rect">
             <a:avLst/>
           </a:prstGeom>
-          <a:ln w="15875">
+          <a:noFill/>
+          <a:ln w="9525">
             <a:solidFill>
               <a:schemeClr val="tx1"/>
             </a:solidFill>
           </a:ln>
         </p:spPr>
       </p:pic>
-      <p:sp>
-        <p:nvSpPr>
-          <p:cNvPr id="2" name="Номер слайда 1">
-            <a:extLst>
-              <a:ext uri="{FF2B5EF4-FFF2-40B4-BE49-F238E27FC236}">
-                <a16:creationId xmlns:a16="http://schemas.microsoft.com/office/drawing/2014/main" id="{52418926-B1DE-4141-8419-4A21200C8990}"/>
-              </a:ext>
-            </a:extLst>
-          </p:cNvPr>
-          <p:cNvSpPr>
-            <a:spLocks noGrp="1"/>
-          </p:cNvSpPr>
-          <p:nvPr>
-            <p:ph type="sldNum" sz="quarter" idx="12"/>
-          </p:nvPr>
-        </p:nvSpPr>
-        <p:spPr/>
-        <p:txBody>
-          <a:bodyPr/>
-          <a:lstStyle/>
-          <a:p>
-            <a:fld id="{1FB77788-E5A7-4255-94F6-739BDA5FC0D4}" type="slidenum">
-              <a:rPr lang="ru-RU" smtClean="0"/>
-              <a:pPr/>
-              <a:t>10</a:t>
-            </a:fld>
-            <a:r>
-              <a:rPr lang="ru-RU"/>
-              <a:t>/17</a:t>
-            </a:r>
-            <a:endParaRPr lang="ru-RU" dirty="0"/>
-          </a:p>
-        </p:txBody>
-      </p:sp>
     </p:spTree>
     <p:extLst>
       <p:ext uri="{BB962C8B-B14F-4D97-AF65-F5344CB8AC3E}">
-        <p14:creationId xmlns:p14="http://schemas.microsoft.com/office/powerpoint/2010/main" val="3350237834"/>
+        <p14:creationId xmlns:p14="http://schemas.microsoft.com/office/powerpoint/2010/main" val="92287534"/>
       </p:ext>
     </p:extLst>
   </p:cSld>
@@ -4309,66 +4530,17 @@
                 <a:latin typeface="Times New Roman" pitchFamily="18" charset="0"/>
                 <a:cs typeface="Times New Roman" pitchFamily="18" charset="0"/>
               </a:rPr>
-              <a:t>Страница</a:t>
-            </a:r>
-            <a:r>
-              <a:rPr lang="en-US" dirty="0">
-                <a:latin typeface="Times New Roman" pitchFamily="18" charset="0"/>
-                <a:cs typeface="Times New Roman" pitchFamily="18" charset="0"/>
-              </a:rPr>
-              <a:t> </a:t>
-            </a:r>
-            <a:r>
-              <a:rPr lang="ru-RU" dirty="0">
-                <a:latin typeface="Times New Roman" pitchFamily="18" charset="0"/>
-                <a:cs typeface="Times New Roman" pitchFamily="18" charset="0"/>
-              </a:rPr>
-              <a:t>просмотра стрима</a:t>
-            </a:r>
-          </a:p>
-        </p:txBody>
-      </p:sp>
-      <p:pic>
-        <p:nvPicPr>
-          <p:cNvPr id="3" name="Рисунок 2">
-            <a:extLst>
-              <a:ext uri="{FF2B5EF4-FFF2-40B4-BE49-F238E27FC236}">
-                <a16:creationId xmlns:a16="http://schemas.microsoft.com/office/drawing/2014/main" id="{166F5475-27C4-46D2-941C-431FDC7B9459}"/>
-              </a:ext>
-            </a:extLst>
-          </p:cNvPr>
-          <p:cNvPicPr>
-            <a:picLocks noChangeAspect="1"/>
-          </p:cNvPicPr>
-          <p:nvPr/>
-        </p:nvPicPr>
-        <p:blipFill>
-          <a:blip r:embed="rId2"/>
-          <a:stretch>
-            <a:fillRect/>
-          </a:stretch>
-        </p:blipFill>
-        <p:spPr>
-          <a:xfrm>
-            <a:off x="1112453" y="1251642"/>
-            <a:ext cx="9994771" cy="5082700"/>
-          </a:xfrm>
-          <a:prstGeom prst="rect">
-            <a:avLst/>
-          </a:prstGeom>
-          <a:ln w="15875">
-            <a:solidFill>
-              <a:schemeClr val="tx1"/>
-            </a:solidFill>
-          </a:ln>
-        </p:spPr>
-      </p:pic>
+              <a:t>Главная страница</a:t>
+            </a:r>
+          </a:p>
+        </p:txBody>
+      </p:sp>
       <p:sp>
         <p:nvSpPr>
           <p:cNvPr id="2" name="Номер слайда 1">
             <a:extLst>
               <a:ext uri="{FF2B5EF4-FFF2-40B4-BE49-F238E27FC236}">
-                <a16:creationId xmlns:a16="http://schemas.microsoft.com/office/drawing/2014/main" id="{7B5D0A3A-7589-40C0-86EA-07D3346DF3C6}"/>
+                <a16:creationId xmlns:a16="http://schemas.microsoft.com/office/drawing/2014/main" id="{52418926-B1DE-4141-8419-4A21200C8990}"/>
               </a:ext>
             </a:extLst>
           </p:cNvPr>
@@ -4400,7 +4572,7 @@
     </p:spTree>
     <p:extLst>
       <p:ext uri="{BB962C8B-B14F-4D97-AF65-F5344CB8AC3E}">
-        <p14:creationId xmlns:p14="http://schemas.microsoft.com/office/powerpoint/2010/main" val="1188768933"/>
+        <p14:creationId xmlns:p14="http://schemas.microsoft.com/office/powerpoint/2010/main" val="3350237834"/>
       </p:ext>
     </p:extLst>
   </p:cSld>
@@ -4432,7 +4604,7 @@
           <p:cNvPr id="4" name="Заголовок 1">
             <a:extLst>
               <a:ext uri="{FF2B5EF4-FFF2-40B4-BE49-F238E27FC236}">
-                <a16:creationId xmlns:a16="http://schemas.microsoft.com/office/drawing/2014/main" id="{0D7D0BE2-2D2C-4923-8220-23B01E71F7BA}"/>
+                <a16:creationId xmlns:a16="http://schemas.microsoft.com/office/drawing/2014/main" id="{BAADC3CD-C73B-4F09-9A29-317A6DA0C7E5}"/>
               </a:ext>
             </a:extLst>
           </p:cNvPr>
@@ -4445,8 +4617,8 @@
         </p:nvSpPr>
         <p:spPr>
           <a:xfrm>
-            <a:off x="0" y="108642"/>
-            <a:ext cx="12192000" cy="1143000"/>
+            <a:off x="2102462" y="692782"/>
+            <a:ext cx="8229600" cy="1143000"/>
           </a:xfrm>
         </p:spPr>
         <p:txBody>
@@ -4461,52 +4633,108 @@
                 <a:latin typeface="Times New Roman" pitchFamily="18" charset="0"/>
                 <a:cs typeface="Times New Roman" pitchFamily="18" charset="0"/>
               </a:rPr>
-              <a:t>Страница настроек</a:t>
-            </a:r>
-          </a:p>
-        </p:txBody>
-      </p:sp>
-      <p:pic>
-        <p:nvPicPr>
-          <p:cNvPr id="5" name="Рисунок 4">
+              <a:t>Тестирование</a:t>
+            </a:r>
+          </a:p>
+        </p:txBody>
+      </p:sp>
+      <p:sp>
+        <p:nvSpPr>
+          <p:cNvPr id="5" name="TextBox 4">
             <a:extLst>
               <a:ext uri="{FF2B5EF4-FFF2-40B4-BE49-F238E27FC236}">
-                <a16:creationId xmlns:a16="http://schemas.microsoft.com/office/drawing/2014/main" id="{AEC00BFB-4655-4265-B6D9-768DC93A549A}"/>
+                <a16:creationId xmlns:a16="http://schemas.microsoft.com/office/drawing/2014/main" id="{959DDE73-FC19-4850-A3D6-70FEF85A9B27}"/>
               </a:ext>
             </a:extLst>
           </p:cNvPr>
-          <p:cNvPicPr>
-            <a:picLocks noChangeAspect="1"/>
-          </p:cNvPicPr>
+          <p:cNvSpPr txBox="1"/>
           <p:nvPr/>
-        </p:nvPicPr>
-        <p:blipFill>
-          <a:blip r:embed="rId2"/>
-          <a:stretch>
-            <a:fillRect/>
-          </a:stretch>
-        </p:blipFill>
+        </p:nvSpPr>
         <p:spPr>
           <a:xfrm>
-            <a:off x="1093597" y="1251642"/>
-            <a:ext cx="10013623" cy="5092286"/>
+            <a:off x="1365716" y="2775450"/>
+            <a:ext cx="10096107" cy="2246769"/>
           </a:xfrm>
           <a:prstGeom prst="rect">
             <a:avLst/>
           </a:prstGeom>
-          <a:ln w="15875">
-            <a:solidFill>
-              <a:schemeClr val="tx1"/>
-            </a:solidFill>
-          </a:ln>
+          <a:noFill/>
         </p:spPr>
-      </p:pic>
+        <p:txBody>
+          <a:bodyPr wrap="square" rtlCol="0">
+            <a:spAutoFit/>
+          </a:bodyPr>
+          <a:lstStyle/>
+          <a:p>
+            <a:pPr marL="514350" indent="-514350">
+              <a:buFont typeface="+mj-lt"/>
+              <a:buAutoNum type="arabicPeriod"/>
+            </a:pPr>
+            <a:r>
+              <a:rPr lang="ru-RU" sz="2800" dirty="0">
+                <a:latin typeface="Times New Roman" pitchFamily="18" charset="0"/>
+                <a:cs typeface="Times New Roman" pitchFamily="18" charset="0"/>
+              </a:rPr>
+              <a:t>Проверка загрузки модели</a:t>
+            </a:r>
+          </a:p>
+          <a:p>
+            <a:pPr marL="514350" indent="-514350">
+              <a:buFont typeface="+mj-lt"/>
+              <a:buAutoNum type="arabicPeriod"/>
+            </a:pPr>
+            <a:r>
+              <a:rPr lang="ru-RU" sz="2800" dirty="0">
+                <a:latin typeface="Times New Roman" pitchFamily="18" charset="0"/>
+                <a:cs typeface="Times New Roman" pitchFamily="18" charset="0"/>
+              </a:rPr>
+              <a:t>Проверка выпадающего меню</a:t>
+            </a:r>
+          </a:p>
+          <a:p>
+            <a:pPr marL="514350" indent="-514350">
+              <a:buFont typeface="+mj-lt"/>
+              <a:buAutoNum type="arabicPeriod"/>
+            </a:pPr>
+            <a:r>
+              <a:rPr lang="ru-RU" sz="2800" dirty="0">
+                <a:latin typeface="Times New Roman" pitchFamily="18" charset="0"/>
+                <a:cs typeface="Times New Roman" pitchFamily="18" charset="0"/>
+              </a:rPr>
+              <a:t>Проверка загрузки и обработки изображений</a:t>
+            </a:r>
+          </a:p>
+          <a:p>
+            <a:pPr marL="514350" indent="-514350">
+              <a:buFont typeface="+mj-lt"/>
+              <a:buAutoNum type="arabicPeriod"/>
+            </a:pPr>
+            <a:r>
+              <a:rPr lang="ru-RU" sz="2800" dirty="0">
+                <a:latin typeface="Times New Roman" pitchFamily="18" charset="0"/>
+                <a:cs typeface="Times New Roman" pitchFamily="18" charset="0"/>
+              </a:rPr>
+              <a:t>Проверка загрузки и обработки видео</a:t>
+            </a:r>
+          </a:p>
+          <a:p>
+            <a:pPr marL="457200" indent="-457200">
+              <a:buFont typeface="Arial" panose="020B0604020202020204" pitchFamily="34" charset="0"/>
+              <a:buChar char="•"/>
+            </a:pPr>
+            <a:endParaRPr lang="ru-RU" sz="2800" dirty="0">
+              <a:latin typeface="Times New Roman" pitchFamily="18" charset="0"/>
+              <a:cs typeface="Times New Roman" pitchFamily="18" charset="0"/>
+            </a:endParaRPr>
+          </a:p>
+        </p:txBody>
+      </p:sp>
       <p:sp>
         <p:nvSpPr>
           <p:cNvPr id="2" name="Номер слайда 1">
             <a:extLst>
               <a:ext uri="{FF2B5EF4-FFF2-40B4-BE49-F238E27FC236}">
-                <a16:creationId xmlns:a16="http://schemas.microsoft.com/office/drawing/2014/main" id="{38EC3FE1-89DB-42E6-B18A-342DB93AD20A}"/>
+                <a16:creationId xmlns:a16="http://schemas.microsoft.com/office/drawing/2014/main" id="{533C03AE-3550-4F10-A341-CFEEC4FBB7F5}"/>
               </a:ext>
             </a:extLst>
           </p:cNvPr>
@@ -4538,7 +4766,7 @@
     </p:spTree>
     <p:extLst>
       <p:ext uri="{BB962C8B-B14F-4D97-AF65-F5344CB8AC3E}">
-        <p14:creationId xmlns:p14="http://schemas.microsoft.com/office/powerpoint/2010/main" val="1040547483"/>
+        <p14:creationId xmlns:p14="http://schemas.microsoft.com/office/powerpoint/2010/main" val="4074368438"/>
       </p:ext>
     </p:extLst>
   </p:cSld>
@@ -4567,265 +4795,6 @@
       </p:grpSpPr>
       <p:sp>
         <p:nvSpPr>
-          <p:cNvPr id="4" name="Заголовок 1">
-            <a:extLst>
-              <a:ext uri="{FF2B5EF4-FFF2-40B4-BE49-F238E27FC236}">
-                <a16:creationId xmlns:a16="http://schemas.microsoft.com/office/drawing/2014/main" id="{BAADC3CD-C73B-4F09-9A29-317A6DA0C7E5}"/>
-              </a:ext>
-            </a:extLst>
-          </p:cNvPr>
-          <p:cNvSpPr>
-            <a:spLocks noGrp="1"/>
-          </p:cNvSpPr>
-          <p:nvPr>
-            <p:ph type="title"/>
-          </p:nvPr>
-        </p:nvSpPr>
-        <p:spPr>
-          <a:xfrm>
-            <a:off x="2063552" y="18331"/>
-            <a:ext cx="8229600" cy="1143000"/>
-          </a:xfrm>
-        </p:spPr>
-        <p:txBody>
-          <a:bodyPr>
-            <a:normAutofit/>
-          </a:bodyPr>
-          <a:lstStyle/>
-          <a:p>
-            <a:pPr algn="ctr"/>
-            <a:r>
-              <a:rPr lang="ru-RU" dirty="0">
-                <a:latin typeface="Times New Roman" pitchFamily="18" charset="0"/>
-                <a:cs typeface="Times New Roman" pitchFamily="18" charset="0"/>
-              </a:rPr>
-              <a:t>Тестирование</a:t>
-            </a:r>
-          </a:p>
-        </p:txBody>
-      </p:sp>
-      <p:sp>
-        <p:nvSpPr>
-          <p:cNvPr id="5" name="TextBox 4">
-            <a:extLst>
-              <a:ext uri="{FF2B5EF4-FFF2-40B4-BE49-F238E27FC236}">
-                <a16:creationId xmlns:a16="http://schemas.microsoft.com/office/drawing/2014/main" id="{959DDE73-FC19-4850-A3D6-70FEF85A9B27}"/>
-              </a:ext>
-            </a:extLst>
-          </p:cNvPr>
-          <p:cNvSpPr txBox="1"/>
-          <p:nvPr/>
-        </p:nvSpPr>
-        <p:spPr>
-          <a:xfrm>
-            <a:off x="1047946" y="1717073"/>
-            <a:ext cx="10096107" cy="4401205"/>
-          </a:xfrm>
-          <a:prstGeom prst="rect">
-            <a:avLst/>
-          </a:prstGeom>
-          <a:noFill/>
-        </p:spPr>
-        <p:txBody>
-          <a:bodyPr wrap="square" rtlCol="0">
-            <a:spAutoFit/>
-          </a:bodyPr>
-          <a:lstStyle/>
-          <a:p>
-            <a:pPr marL="514350" indent="-514350">
-              <a:buFont typeface="+mj-lt"/>
-              <a:buAutoNum type="arabicPeriod"/>
-            </a:pPr>
-            <a:r>
-              <a:rPr lang="ru-RU" sz="2800" dirty="0">
-                <a:latin typeface="Times New Roman" pitchFamily="18" charset="0"/>
-                <a:cs typeface="Times New Roman" pitchFamily="18" charset="0"/>
-              </a:rPr>
-              <a:t>Потоковая трансляция видео</a:t>
-            </a:r>
-          </a:p>
-          <a:p>
-            <a:pPr marL="514350" indent="-514350">
-              <a:buFont typeface="+mj-lt"/>
-              <a:buAutoNum type="arabicPeriod"/>
-            </a:pPr>
-            <a:r>
-              <a:rPr lang="ru-RU" sz="2800" dirty="0">
-                <a:latin typeface="Times New Roman" pitchFamily="18" charset="0"/>
-                <a:cs typeface="Times New Roman" pitchFamily="18" charset="0"/>
-              </a:rPr>
-              <a:t>Авторизация</a:t>
-            </a:r>
-          </a:p>
-          <a:p>
-            <a:pPr marL="514350" indent="-514350">
-              <a:buFont typeface="+mj-lt"/>
-              <a:buAutoNum type="arabicPeriod"/>
-            </a:pPr>
-            <a:r>
-              <a:rPr lang="ru-RU" sz="2800" dirty="0">
-                <a:latin typeface="Times New Roman" pitchFamily="18" charset="0"/>
-                <a:cs typeface="Times New Roman" pitchFamily="18" charset="0"/>
-              </a:rPr>
-              <a:t>Регистрация</a:t>
-            </a:r>
-          </a:p>
-          <a:p>
-            <a:pPr marL="514350" indent="-514350">
-              <a:buFont typeface="+mj-lt"/>
-              <a:buAutoNum type="arabicPeriod"/>
-            </a:pPr>
-            <a:r>
-              <a:rPr lang="ru-RU" sz="2800" dirty="0">
-                <a:latin typeface="Times New Roman" pitchFamily="18" charset="0"/>
-                <a:cs typeface="Times New Roman" pitchFamily="18" charset="0"/>
-              </a:rPr>
-              <a:t>Отправление сообщений в чат</a:t>
-            </a:r>
-          </a:p>
-          <a:p>
-            <a:pPr marL="514350" indent="-514350">
-              <a:buFont typeface="+mj-lt"/>
-              <a:buAutoNum type="arabicPeriod"/>
-            </a:pPr>
-            <a:r>
-              <a:rPr lang="ru-RU" sz="2800" dirty="0">
-                <a:latin typeface="Times New Roman" pitchFamily="18" charset="0"/>
-                <a:cs typeface="Times New Roman" pitchFamily="18" charset="0"/>
-              </a:rPr>
-              <a:t>Подписка на пользователей</a:t>
-            </a:r>
-          </a:p>
-          <a:p>
-            <a:pPr marL="514350" indent="-514350">
-              <a:buFont typeface="+mj-lt"/>
-              <a:buAutoNum type="arabicPeriod"/>
-            </a:pPr>
-            <a:r>
-              <a:rPr lang="ru-RU" sz="2800" dirty="0">
-                <a:latin typeface="Times New Roman" pitchFamily="18" charset="0"/>
-                <a:cs typeface="Times New Roman" pitchFamily="18" charset="0"/>
-              </a:rPr>
-              <a:t>Блокировка пользователей</a:t>
-            </a:r>
-          </a:p>
-          <a:p>
-            <a:pPr marL="514350" indent="-514350">
-              <a:buFont typeface="+mj-lt"/>
-              <a:buAutoNum type="arabicPeriod"/>
-            </a:pPr>
-            <a:r>
-              <a:rPr lang="ru-RU" sz="2800" dirty="0">
-                <a:latin typeface="Times New Roman" pitchFamily="18" charset="0"/>
-                <a:cs typeface="Times New Roman" pitchFamily="18" charset="0"/>
-              </a:rPr>
-              <a:t>Поиск трансляций</a:t>
-            </a:r>
-          </a:p>
-          <a:p>
-            <a:pPr marL="514350" indent="-514350">
-              <a:buFont typeface="+mj-lt"/>
-              <a:buAutoNum type="arabicPeriod"/>
-            </a:pPr>
-            <a:r>
-              <a:rPr lang="ru-RU" sz="2800" dirty="0">
-                <a:latin typeface="Times New Roman" pitchFamily="18" charset="0"/>
-                <a:cs typeface="Times New Roman" pitchFamily="18" charset="0"/>
-              </a:rPr>
-              <a:t>Функция отключения чата</a:t>
-            </a:r>
-          </a:p>
-          <a:p>
-            <a:pPr marL="514350" indent="-514350">
-              <a:buFont typeface="+mj-lt"/>
-              <a:buAutoNum type="arabicPeriod"/>
-            </a:pPr>
-            <a:r>
-              <a:rPr lang="ru-RU" sz="2800" dirty="0">
-                <a:latin typeface="Times New Roman" pitchFamily="18" charset="0"/>
-                <a:cs typeface="Times New Roman" pitchFamily="18" charset="0"/>
-              </a:rPr>
-              <a:t>Генерация ключа трансляции</a:t>
-            </a:r>
-          </a:p>
-          <a:p>
-            <a:pPr marL="457200" indent="-457200">
-              <a:buFont typeface="Arial" panose="020B0604020202020204" pitchFamily="34" charset="0"/>
-              <a:buChar char="•"/>
-            </a:pPr>
-            <a:endParaRPr lang="ru-RU" sz="2800" dirty="0">
-              <a:latin typeface="Times New Roman" pitchFamily="18" charset="0"/>
-              <a:cs typeface="Times New Roman" pitchFamily="18" charset="0"/>
-            </a:endParaRPr>
-          </a:p>
-        </p:txBody>
-      </p:sp>
-      <p:sp>
-        <p:nvSpPr>
-          <p:cNvPr id="2" name="Номер слайда 1">
-            <a:extLst>
-              <a:ext uri="{FF2B5EF4-FFF2-40B4-BE49-F238E27FC236}">
-                <a16:creationId xmlns:a16="http://schemas.microsoft.com/office/drawing/2014/main" id="{533C03AE-3550-4F10-A341-CFEEC4FBB7F5}"/>
-              </a:ext>
-            </a:extLst>
-          </p:cNvPr>
-          <p:cNvSpPr>
-            <a:spLocks noGrp="1"/>
-          </p:cNvSpPr>
-          <p:nvPr>
-            <p:ph type="sldNum" sz="quarter" idx="12"/>
-          </p:nvPr>
-        </p:nvSpPr>
-        <p:spPr/>
-        <p:txBody>
-          <a:bodyPr/>
-          <a:lstStyle/>
-          <a:p>
-            <a:fld id="{1FB77788-E5A7-4255-94F6-739BDA5FC0D4}" type="slidenum">
-              <a:rPr lang="ru-RU" smtClean="0"/>
-              <a:pPr/>
-              <a:t>13</a:t>
-            </a:fld>
-            <a:r>
-              <a:rPr lang="ru-RU"/>
-              <a:t>/17</a:t>
-            </a:r>
-            <a:endParaRPr lang="ru-RU" dirty="0"/>
-          </a:p>
-        </p:txBody>
-      </p:sp>
-    </p:spTree>
-    <p:extLst>
-      <p:ext uri="{BB962C8B-B14F-4D97-AF65-F5344CB8AC3E}">
-        <p14:creationId xmlns:p14="http://schemas.microsoft.com/office/powerpoint/2010/main" val="4074368438"/>
-      </p:ext>
-    </p:extLst>
-  </p:cSld>
-  <p:clrMapOvr>
-    <a:masterClrMapping/>
-  </p:clrMapOvr>
-</p:sld>
-</file>
-
-<file path=ppt/slides/slide14.xml><?xml version="1.0" encoding="utf-8"?>
-<p:sld xmlns:a="http://schemas.openxmlformats.org/drawingml/2006/main" xmlns:r="http://schemas.openxmlformats.org/officeDocument/2006/relationships" xmlns:p="http://schemas.openxmlformats.org/presentationml/2006/main">
-  <p:cSld>
-    <p:spTree>
-      <p:nvGrpSpPr>
-        <p:cNvPr id="1" name=""/>
-        <p:cNvGrpSpPr/>
-        <p:nvPr/>
-      </p:nvGrpSpPr>
-      <p:grpSpPr>
-        <a:xfrm>
-          <a:off x="0" y="0"/>
-          <a:ext cx="0" cy="0"/>
-          <a:chOff x="0" y="0"/>
-          <a:chExt cx="0" cy="0"/>
-        </a:xfrm>
-      </p:grpSpPr>
-      <p:sp>
-        <p:nvSpPr>
           <p:cNvPr id="8" name="Заголовок 1">
             <a:extLst>
               <a:ext uri="{FF2B5EF4-FFF2-40B4-BE49-F238E27FC236}">
@@ -4842,7 +4811,7 @@
         </p:nvSpPr>
         <p:spPr>
           <a:xfrm>
-            <a:off x="2063552" y="99808"/>
+            <a:off x="2063552" y="-88257"/>
             <a:ext cx="8229600" cy="1143000"/>
           </a:xfrm>
         </p:spPr>
@@ -4877,8 +4846,8 @@
         </p:nvSpPr>
         <p:spPr>
           <a:xfrm>
-            <a:off x="1074656" y="1229444"/>
-            <a:ext cx="10067826" cy="4401205"/>
+            <a:off x="1062087" y="963557"/>
+            <a:ext cx="10067826" cy="6124754"/>
           </a:xfrm>
           <a:prstGeom prst="rect">
             <a:avLst/>
@@ -4896,7 +4865,7 @@
                 <a:latin typeface="Times New Roman" pitchFamily="18" charset="0"/>
                 <a:cs typeface="Times New Roman" pitchFamily="18" charset="0"/>
               </a:rPr>
-              <a:t>В рамках данной работы было разработано веб-приложение для потоковой передачи видео и общения пользователей. Были решены следующие задачи:</a:t>
+              <a:t>В рамках данной работы были обучены нейросетевые модели для детекции дорожных объектов. Также было разработано веб-приложение для работы с обученной моделью. </a:t>
             </a:r>
           </a:p>
           <a:p>
@@ -4906,16 +4875,19 @@
             </a:endParaRPr>
           </a:p>
           <a:p>
-            <a:pPr marL="514350" indent="-514350">
-              <a:buAutoNum type="arabicPeriod"/>
-            </a:pPr>
             <a:r>
               <a:rPr lang="ru-RU" sz="2800" dirty="0">
                 <a:latin typeface="Times New Roman" pitchFamily="18" charset="0"/>
                 <a:cs typeface="Times New Roman" pitchFamily="18" charset="0"/>
               </a:rPr>
-              <a:t>Проведён анализ предметной области</a:t>
-            </a:r>
+              <a:t>Были решены следующие задачи:</a:t>
+            </a:r>
+          </a:p>
+          <a:p>
+            <a:endParaRPr lang="ru-RU" sz="2800" dirty="0">
+              <a:latin typeface="Times New Roman" pitchFamily="18" charset="0"/>
+              <a:cs typeface="Times New Roman" pitchFamily="18" charset="0"/>
+            </a:endParaRPr>
           </a:p>
           <a:p>
             <a:pPr marL="514350" indent="-514350">
@@ -4926,7 +4898,7 @@
                 <a:latin typeface="Times New Roman" pitchFamily="18" charset="0"/>
                 <a:cs typeface="Times New Roman" pitchFamily="18" charset="0"/>
               </a:rPr>
-              <a:t>Разработаны требования к веб-приложению</a:t>
+              <a:t>Найден и дополнительно размечен набор данных.</a:t>
             </a:r>
           </a:p>
           <a:p>
@@ -4938,7 +4910,7 @@
                 <a:latin typeface="Times New Roman" pitchFamily="18" charset="0"/>
                 <a:cs typeface="Times New Roman" pitchFamily="18" charset="0"/>
               </a:rPr>
-              <a:t>Спроектировано веб-приложение</a:t>
+              <a:t>Дополнен набор данных.</a:t>
             </a:r>
           </a:p>
           <a:p>
@@ -4950,7 +4922,7 @@
                 <a:latin typeface="Times New Roman" pitchFamily="18" charset="0"/>
                 <a:cs typeface="Times New Roman" pitchFamily="18" charset="0"/>
               </a:rPr>
-              <a:t>Реализовано приложение</a:t>
+              <a:t>Обучены нейросетевые модели.</a:t>
             </a:r>
           </a:p>
           <a:p>
@@ -4962,7 +4934,31 @@
                 <a:latin typeface="Times New Roman" pitchFamily="18" charset="0"/>
                 <a:cs typeface="Times New Roman" pitchFamily="18" charset="0"/>
               </a:rPr>
-              <a:t>Проведено тестирование веб-приложения</a:t>
+              <a:t>Проведены эксперименты и выявлена лучшая модель.</a:t>
+            </a:r>
+          </a:p>
+          <a:p>
+            <a:pPr marL="514350" indent="-514350">
+              <a:buAutoNum type="arabicPeriod"/>
+            </a:pPr>
+            <a:r>
+              <a:rPr lang="ru-RU" sz="2800" dirty="0">
+                <a:latin typeface="Times New Roman" pitchFamily="18" charset="0"/>
+                <a:cs typeface="Times New Roman" pitchFamily="18" charset="0"/>
+              </a:rPr>
+              <a:t>Спроектировано и разработано веб-приложение для использования обученной модели.</a:t>
+            </a:r>
+          </a:p>
+          <a:p>
+            <a:pPr marL="514350" indent="-514350">
+              <a:buAutoNum type="arabicPeriod"/>
+            </a:pPr>
+            <a:r>
+              <a:rPr lang="ru-RU" sz="2800" dirty="0">
+                <a:latin typeface="Times New Roman" pitchFamily="18" charset="0"/>
+                <a:cs typeface="Times New Roman" pitchFamily="18" charset="0"/>
+              </a:rPr>
+              <a:t>Проведено тестирование веб-приложения.</a:t>
             </a:r>
           </a:p>
           <a:p>
@@ -4997,7 +4993,7 @@
             <a:fld id="{1FB77788-E5A7-4255-94F6-739BDA5FC0D4}" type="slidenum">
               <a:rPr lang="ru-RU" smtClean="0"/>
               <a:pPr/>
-              <a:t>14</a:t>
+              <a:t>13</a:t>
             </a:fld>
             <a:r>
               <a:rPr lang="ru-RU"/>
@@ -5114,7 +5110,7 @@
                 <a:latin typeface="Times New Roman" pitchFamily="18" charset="0"/>
                 <a:cs typeface="Times New Roman" pitchFamily="18" charset="0"/>
               </a:rPr>
-              <a:t>1. Популярность стриминга</a:t>
+              <a:t>1. Машинное обучение и искусственный интеллект</a:t>
             </a:r>
             <a:br>
               <a:rPr lang="ru-RU" sz="3200" dirty="0">
@@ -5127,7 +5123,7 @@
                 <a:latin typeface="Times New Roman" pitchFamily="18" charset="0"/>
                 <a:cs typeface="Times New Roman" pitchFamily="18" charset="0"/>
               </a:rPr>
-              <a:t>2. Привлекательность для разной аудитории</a:t>
+              <a:t>2. Безопасность дорожного движения</a:t>
             </a:r>
           </a:p>
           <a:p>
@@ -5141,7 +5137,7 @@
                 <a:latin typeface="Times New Roman" pitchFamily="18" charset="0"/>
                 <a:cs typeface="Times New Roman" pitchFamily="18" charset="0"/>
               </a:rPr>
-              <a:t>3. Широкие возможности для монетизации контента</a:t>
+              <a:t>3. </a:t>
             </a:r>
           </a:p>
         </p:txBody>
@@ -5263,8 +5259,8 @@
         </p:nvSpPr>
         <p:spPr>
           <a:xfrm>
-            <a:off x="1065229" y="1147966"/>
-            <a:ext cx="10077253" cy="4832092"/>
+            <a:off x="1052259" y="1147966"/>
+            <a:ext cx="10288571" cy="4401205"/>
           </a:xfrm>
           <a:prstGeom prst="rect">
             <a:avLst/>
@@ -5292,10 +5288,11 @@
                 <a:latin typeface="Times New Roman" pitchFamily="18" charset="0"/>
                 <a:cs typeface="Times New Roman" pitchFamily="18" charset="0"/>
               </a:rPr>
-              <a:t>Разработка веб-приложения для потоковой передачи видео и общения пользователей</a:t>
-            </a:r>
-          </a:p>
-          <a:p>
+              <a:t>Реализация веб-приложения для детекции дорожных объектов.</a:t>
+            </a:r>
+          </a:p>
+          <a:p>
+            <a:pPr indent="442913"/>
             <a:endParaRPr lang="ru-RU" sz="2800" dirty="0">
               <a:latin typeface="Times New Roman" pitchFamily="18" charset="0"/>
               <a:cs typeface="Times New Roman" pitchFamily="18" charset="0"/>
@@ -5319,7 +5316,7 @@
                 <a:latin typeface="Times New Roman" pitchFamily="18" charset="0"/>
                 <a:cs typeface="Times New Roman" pitchFamily="18" charset="0"/>
               </a:rPr>
-              <a:t>Провести анализ предметной области</a:t>
+              <a:t>Сформировать обучающий набор данных.</a:t>
             </a:r>
           </a:p>
           <a:p>
@@ -5331,7 +5328,7 @@
                 <a:latin typeface="Times New Roman" pitchFamily="18" charset="0"/>
                 <a:cs typeface="Times New Roman" pitchFamily="18" charset="0"/>
               </a:rPr>
-              <a:t>Разработать требования к веб-положению</a:t>
+              <a:t>Обучить нейросетевые модели.</a:t>
             </a:r>
           </a:p>
           <a:p>
@@ -5343,7 +5340,7 @@
                 <a:latin typeface="Times New Roman" pitchFamily="18" charset="0"/>
                 <a:cs typeface="Times New Roman" pitchFamily="18" charset="0"/>
               </a:rPr>
-              <a:t>Спроектировать веб-приложение</a:t>
+              <a:t>Провести эксперименты и выявить лучшую модель.</a:t>
             </a:r>
           </a:p>
           <a:p>
@@ -5355,7 +5352,7 @@
                 <a:latin typeface="Times New Roman" pitchFamily="18" charset="0"/>
                 <a:cs typeface="Times New Roman" pitchFamily="18" charset="0"/>
               </a:rPr>
-              <a:t>Реализовать приложение</a:t>
+              <a:t>Разработать веб-приложение для использования модели.</a:t>
             </a:r>
           </a:p>
           <a:p>
@@ -5367,7 +5364,7 @@
                 <a:latin typeface="Times New Roman" pitchFamily="18" charset="0"/>
                 <a:cs typeface="Times New Roman" pitchFamily="18" charset="0"/>
               </a:rPr>
-              <a:t>Провести тестирование веб-приложения</a:t>
+              <a:t>Провести тестирование веб-приложения.</a:t>
             </a:r>
           </a:p>
           <a:p>
@@ -5911,68 +5908,148 @@
       </p:grpSpPr>
       <p:sp>
         <p:nvSpPr>
-          <p:cNvPr id="5" name="Заголовок 1">
+          <p:cNvPr id="4" name="Заголовок 1">
             <a:extLst>
               <a:ext uri="{FF2B5EF4-FFF2-40B4-BE49-F238E27FC236}">
-                <a16:creationId xmlns:a16="http://schemas.microsoft.com/office/drawing/2014/main" id="{08AFB1E6-1180-47CF-AADB-5C4D9D1C94F6}"/>
+                <a16:creationId xmlns:a16="http://schemas.microsoft.com/office/drawing/2014/main" id="{0D7D0BE2-2D2C-4923-8220-23B01E71F7BA}"/>
               </a:ext>
             </a:extLst>
           </p:cNvPr>
-          <p:cNvSpPr txBox="1">
-            <a:spLocks/>
-          </p:cNvSpPr>
-          <p:nvPr/>
+          <p:cNvSpPr>
+            <a:spLocks noGrp="1"/>
+          </p:cNvSpPr>
+          <p:nvPr>
+            <p:ph type="title"/>
+          </p:nvPr>
         </p:nvSpPr>
         <p:spPr>
           <a:xfrm>
-            <a:off x="2077039" y="-103626"/>
+            <a:off x="1981200" y="217978"/>
             <a:ext cx="8229600" cy="1143000"/>
+          </a:xfrm>
+        </p:spPr>
+        <p:txBody>
+          <a:bodyPr>
+            <a:normAutofit/>
+          </a:bodyPr>
+          <a:lstStyle/>
+          <a:p>
+            <a:pPr algn="ctr"/>
+            <a:r>
+              <a:rPr lang="ru-RU" dirty="0">
+                <a:latin typeface="Times New Roman" pitchFamily="18" charset="0"/>
+                <a:cs typeface="Times New Roman" pitchFamily="18" charset="0"/>
+              </a:rPr>
+              <a:t>Средства реализации</a:t>
+            </a:r>
+          </a:p>
+        </p:txBody>
+      </p:sp>
+      <p:sp>
+        <p:nvSpPr>
+          <p:cNvPr id="5" name="TextBox 4">
+            <a:extLst>
+              <a:ext uri="{FF2B5EF4-FFF2-40B4-BE49-F238E27FC236}">
+                <a16:creationId xmlns:a16="http://schemas.microsoft.com/office/drawing/2014/main" id="{C5EBCF29-450A-4288-AA41-620B0209AB78}"/>
+              </a:ext>
+            </a:extLst>
+          </p:cNvPr>
+          <p:cNvSpPr txBox="1"/>
+          <p:nvPr/>
+        </p:nvSpPr>
+        <p:spPr>
+          <a:xfrm>
+            <a:off x="1065229" y="1772816"/>
+            <a:ext cx="10077253" cy="2219838"/>
           </a:xfrm>
           <a:prstGeom prst="rect">
             <a:avLst/>
           </a:prstGeom>
+          <a:noFill/>
         </p:spPr>
         <p:txBody>
-          <a:bodyPr vert="horz" lIns="91440" tIns="45720" rIns="91440" bIns="45720" rtlCol="0" anchor="ctr">
-            <a:normAutofit/>
+          <a:bodyPr wrap="square" rtlCol="0">
+            <a:spAutoFit/>
           </a:bodyPr>
-          <a:lstStyle>
-            <a:lvl1pPr algn="l" defTabSz="914400" rtl="0" eaLnBrk="1" latinLnBrk="0" hangingPunct="1">
+          <a:lstStyle/>
+          <a:p>
+            <a:pPr marL="457200" indent="-457200">
               <a:lnSpc>
-                <a:spcPct val="90000"/>
+                <a:spcPct val="150000"/>
               </a:lnSpc>
-              <a:spcBef>
-                <a:spcPct val="0"/>
-              </a:spcBef>
-              <a:buNone/>
-              <a:defRPr sz="4400" kern="1200">
-                <a:solidFill>
-                  <a:schemeClr val="tx1"/>
-                </a:solidFill>
-                <a:latin typeface="+mj-lt"/>
-                <a:ea typeface="+mj-ea"/>
-                <a:cs typeface="+mj-cs"/>
-              </a:defRPr>
-            </a:lvl1pPr>
-          </a:lstStyle>
-          <a:p>
-            <a:pPr algn="ctr"/>
-            <a:r>
-              <a:rPr lang="ru-RU" dirty="0">
+              <a:buFont typeface="Arial" panose="020B0604020202020204" pitchFamily="34" charset="0"/>
+              <a:buChar char="•"/>
+            </a:pPr>
+            <a:r>
+              <a:rPr lang="en-US" sz="3200" dirty="0" err="1">
                 <a:latin typeface="Times New Roman" pitchFamily="18" charset="0"/>
                 <a:cs typeface="Times New Roman" pitchFamily="18" charset="0"/>
               </a:rPr>
-              <a:t>Диаграмма последовательности</a:t>
-            </a:r>
-          </a:p>
-        </p:txBody>
-      </p:sp>
-      <p:sp>
-        <p:nvSpPr>
-          <p:cNvPr id="11" name="Номер слайда 10">
+              <a:t>Ultralytics</a:t>
+            </a:r>
+            <a:r>
+              <a:rPr lang="en-US" sz="3200" dirty="0">
+                <a:latin typeface="Times New Roman" pitchFamily="18" charset="0"/>
+                <a:cs typeface="Times New Roman" pitchFamily="18" charset="0"/>
+              </a:rPr>
+              <a:t> YOLO</a:t>
+            </a:r>
+            <a:endParaRPr lang="ru-RU" sz="3200" dirty="0">
+              <a:latin typeface="Times New Roman" pitchFamily="18" charset="0"/>
+              <a:cs typeface="Times New Roman" pitchFamily="18" charset="0"/>
+            </a:endParaRPr>
+          </a:p>
+          <a:p>
+            <a:pPr marL="457200" indent="-457200">
+              <a:lnSpc>
+                <a:spcPct val="150000"/>
+              </a:lnSpc>
+              <a:buFont typeface="Arial" panose="020B0604020202020204" pitchFamily="34" charset="0"/>
+              <a:buChar char="•"/>
+            </a:pPr>
+            <a:r>
+              <a:rPr lang="ru-RU" sz="3200" dirty="0">
+                <a:latin typeface="Times New Roman" pitchFamily="18" charset="0"/>
+                <a:cs typeface="Times New Roman" pitchFamily="18" charset="0"/>
+              </a:rPr>
+              <a:t>Серверная часть: </a:t>
+            </a:r>
+            <a:r>
+              <a:rPr lang="en-US" sz="3200" dirty="0">
+                <a:latin typeface="Times New Roman" pitchFamily="18" charset="0"/>
+                <a:cs typeface="Times New Roman" pitchFamily="18" charset="0"/>
+              </a:rPr>
+              <a:t>Python</a:t>
+            </a:r>
+          </a:p>
+          <a:p>
+            <a:pPr marL="457200" indent="-457200">
+              <a:lnSpc>
+                <a:spcPct val="150000"/>
+              </a:lnSpc>
+              <a:buFont typeface="Arial" panose="020B0604020202020204" pitchFamily="34" charset="0"/>
+              <a:buChar char="•"/>
+            </a:pPr>
+            <a:r>
+              <a:rPr lang="ru-RU" sz="3200" dirty="0">
+                <a:latin typeface="Times New Roman" pitchFamily="18" charset="0"/>
+                <a:cs typeface="Times New Roman" pitchFamily="18" charset="0"/>
+              </a:rPr>
+              <a:t>Клиентская часть:</a:t>
+            </a:r>
+            <a:endParaRPr lang="en-US" sz="3200" dirty="0">
+              <a:latin typeface="Times New Roman" pitchFamily="18" charset="0"/>
+              <a:cs typeface="Times New Roman" pitchFamily="18" charset="0"/>
+            </a:endParaRPr>
+          </a:p>
+        </p:txBody>
+      </p:sp>
+      <p:sp>
+        <p:nvSpPr>
+          <p:cNvPr id="2" name="Номер слайда 1">
             <a:extLst>
               <a:ext uri="{FF2B5EF4-FFF2-40B4-BE49-F238E27FC236}">
-                <a16:creationId xmlns:a16="http://schemas.microsoft.com/office/drawing/2014/main" id="{FE060230-92E3-4D54-B637-036B28A13098}"/>
+                <a16:creationId xmlns:a16="http://schemas.microsoft.com/office/drawing/2014/main" id="{32D3499C-CA4B-4025-B4B2-EE8C8AC492DF}"/>
               </a:ext>
             </a:extLst>
           </p:cNvPr>
@@ -6004,7 +6081,7 @@
     </p:spTree>
     <p:extLst>
       <p:ext uri="{BB962C8B-B14F-4D97-AF65-F5344CB8AC3E}">
-        <p14:creationId xmlns:p14="http://schemas.microsoft.com/office/powerpoint/2010/main" val="92287534"/>
+        <p14:creationId xmlns:p14="http://schemas.microsoft.com/office/powerpoint/2010/main" val="2149375643"/>
       </p:ext>
     </p:extLst>
   </p:cSld>
@@ -6019,7 +6096,13 @@
   <p:cSld>
     <p:spTree>
       <p:nvGrpSpPr>
-        <p:cNvPr id="1" name=""/>
+        <p:cNvPr id="1" name="">
+          <a:extLst>
+            <a:ext uri="{FF2B5EF4-FFF2-40B4-BE49-F238E27FC236}">
+              <a16:creationId xmlns:a16="http://schemas.microsoft.com/office/drawing/2014/main" id="{33BDB698-2047-365E-0B13-03B247433B6E}"/>
+            </a:ext>
+          </a:extLst>
+        </p:cNvPr>
         <p:cNvGrpSpPr/>
         <p:nvPr/>
       </p:nvGrpSpPr>
@@ -6036,7 +6119,7 @@
           <p:cNvPr id="4" name="Заголовок 1">
             <a:extLst>
               <a:ext uri="{FF2B5EF4-FFF2-40B4-BE49-F238E27FC236}">
-                <a16:creationId xmlns:a16="http://schemas.microsoft.com/office/drawing/2014/main" id="{0D7D0BE2-2D2C-4923-8220-23B01E71F7BA}"/>
+                <a16:creationId xmlns:a16="http://schemas.microsoft.com/office/drawing/2014/main" id="{9CBC5E7F-2257-821F-A824-95518E604A2A}"/>
               </a:ext>
             </a:extLst>
           </p:cNvPr>
@@ -6049,7 +6132,7 @@
         </p:nvSpPr>
         <p:spPr>
           <a:xfrm>
-            <a:off x="1981200" y="217978"/>
+            <a:off x="1981200" y="-19455"/>
             <a:ext cx="8229600" cy="1143000"/>
           </a:xfrm>
         </p:spPr>
@@ -6065,53 +6148,17 @@
                 <a:latin typeface="Times New Roman" pitchFamily="18" charset="0"/>
                 <a:cs typeface="Times New Roman" pitchFamily="18" charset="0"/>
               </a:rPr>
-              <a:t>Структура базы данных</a:t>
-            </a:r>
-          </a:p>
-        </p:txBody>
-      </p:sp>
-      <p:pic>
-        <p:nvPicPr>
-          <p:cNvPr id="3" name="Рисунок 2">
+              <a:t>Обучение нейросетевой модели</a:t>
+            </a:r>
+          </a:p>
+        </p:txBody>
+      </p:sp>
+      <p:sp>
+        <p:nvSpPr>
+          <p:cNvPr id="2" name="Номер слайда 1">
             <a:extLst>
               <a:ext uri="{FF2B5EF4-FFF2-40B4-BE49-F238E27FC236}">
-                <a16:creationId xmlns:a16="http://schemas.microsoft.com/office/drawing/2014/main" id="{AC9973EE-DDB0-4110-A1D5-51D973AC2C11}"/>
-              </a:ext>
-            </a:extLst>
-          </p:cNvPr>
-          <p:cNvPicPr>
-            <a:picLocks noChangeAspect="1"/>
-          </p:cNvPicPr>
-          <p:nvPr/>
-        </p:nvPicPr>
-        <p:blipFill>
-          <a:blip r:embed="rId2">
-            <a:extLst>
-              <a:ext uri="{28A0092B-C50C-407E-A947-70E740481C1C}">
-                <a14:useLocalDpi xmlns:a14="http://schemas.microsoft.com/office/drawing/2010/main" val="0"/>
-              </a:ext>
-            </a:extLst>
-          </a:blip>
-          <a:stretch>
-            <a:fillRect/>
-          </a:stretch>
-        </p:blipFill>
-        <p:spPr>
-          <a:xfrm>
-            <a:off x="541479" y="1463720"/>
-            <a:ext cx="11386817" cy="4672556"/>
-          </a:xfrm>
-          <a:prstGeom prst="rect">
-            <a:avLst/>
-          </a:prstGeom>
-        </p:spPr>
-      </p:pic>
-      <p:sp>
-        <p:nvSpPr>
-          <p:cNvPr id="7" name="Номер слайда 6">
-            <a:extLst>
-              <a:ext uri="{FF2B5EF4-FFF2-40B4-BE49-F238E27FC236}">
-                <a16:creationId xmlns:a16="http://schemas.microsoft.com/office/drawing/2014/main" id="{4B18A1C4-18C9-4655-AC1C-9BB734B59F14}"/>
+                <a16:creationId xmlns:a16="http://schemas.microsoft.com/office/drawing/2014/main" id="{6FF53F86-867A-A539-1A73-7DE918A85DC3}"/>
               </a:ext>
             </a:extLst>
           </p:cNvPr>
@@ -6143,7 +6190,7 @@
     </p:spTree>
     <p:extLst>
       <p:ext uri="{BB962C8B-B14F-4D97-AF65-F5344CB8AC3E}">
-        <p14:creationId xmlns:p14="http://schemas.microsoft.com/office/powerpoint/2010/main" val="3312620805"/>
+        <p14:creationId xmlns:p14="http://schemas.microsoft.com/office/powerpoint/2010/main" val="614845612"/>
       </p:ext>
     </p:extLst>
   </p:cSld>
@@ -6158,7 +6205,13 @@
   <p:cSld>
     <p:spTree>
       <p:nvGrpSpPr>
-        <p:cNvPr id="1" name=""/>
+        <p:cNvPr id="1" name="">
+          <a:extLst>
+            <a:ext uri="{FF2B5EF4-FFF2-40B4-BE49-F238E27FC236}">
+              <a16:creationId xmlns:a16="http://schemas.microsoft.com/office/drawing/2014/main" id="{79724762-471F-45B4-2DAC-2AAB613E98CD}"/>
+            </a:ext>
+          </a:extLst>
+        </p:cNvPr>
         <p:cNvGrpSpPr/>
         <p:nvPr/>
       </p:nvGrpSpPr>
@@ -6175,7 +6228,7 @@
           <p:cNvPr id="4" name="Заголовок 1">
             <a:extLst>
               <a:ext uri="{FF2B5EF4-FFF2-40B4-BE49-F238E27FC236}">
-                <a16:creationId xmlns:a16="http://schemas.microsoft.com/office/drawing/2014/main" id="{0D7D0BE2-2D2C-4923-8220-23B01E71F7BA}"/>
+                <a16:creationId xmlns:a16="http://schemas.microsoft.com/office/drawing/2014/main" id="{A4C698A9-5C36-6C05-97EF-2665C29AE5B8}"/>
               </a:ext>
             </a:extLst>
           </p:cNvPr>
@@ -6188,7 +6241,7 @@
         </p:nvSpPr>
         <p:spPr>
           <a:xfrm>
-            <a:off x="1981200" y="217978"/>
+            <a:off x="1981200" y="-103760"/>
             <a:ext cx="8229600" cy="1143000"/>
           </a:xfrm>
         </p:spPr>
@@ -6204,171 +6257,8 @@
                 <a:latin typeface="Times New Roman" pitchFamily="18" charset="0"/>
                 <a:cs typeface="Times New Roman" pitchFamily="18" charset="0"/>
               </a:rPr>
-              <a:t>Средства реализации</a:t>
-            </a:r>
-          </a:p>
-        </p:txBody>
-      </p:sp>
-      <p:sp>
-        <p:nvSpPr>
-          <p:cNvPr id="5" name="TextBox 4">
-            <a:extLst>
-              <a:ext uri="{FF2B5EF4-FFF2-40B4-BE49-F238E27FC236}">
-                <a16:creationId xmlns:a16="http://schemas.microsoft.com/office/drawing/2014/main" id="{C5EBCF29-450A-4288-AA41-620B0209AB78}"/>
-              </a:ext>
-            </a:extLst>
-          </p:cNvPr>
-          <p:cNvSpPr txBox="1"/>
-          <p:nvPr/>
-        </p:nvSpPr>
-        <p:spPr>
-          <a:xfrm>
-            <a:off x="1065229" y="1772816"/>
-            <a:ext cx="10077253" cy="3697166"/>
-          </a:xfrm>
-          <a:prstGeom prst="rect">
-            <a:avLst/>
-          </a:prstGeom>
-          <a:noFill/>
-        </p:spPr>
-        <p:txBody>
-          <a:bodyPr wrap="square" rtlCol="0">
-            <a:spAutoFit/>
-          </a:bodyPr>
-          <a:lstStyle/>
-          <a:p>
-            <a:pPr marL="457200" indent="-457200">
-              <a:lnSpc>
-                <a:spcPct val="150000"/>
-              </a:lnSpc>
-              <a:buFont typeface="Arial" panose="020B0604020202020204" pitchFamily="34" charset="0"/>
-              <a:buChar char="•"/>
-            </a:pPr>
-            <a:r>
-              <a:rPr lang="ru-RU" sz="3200" dirty="0">
-                <a:latin typeface="Times New Roman" pitchFamily="18" charset="0"/>
-                <a:cs typeface="Times New Roman" pitchFamily="18" charset="0"/>
-              </a:rPr>
-              <a:t>Серверная часть: </a:t>
-            </a:r>
-            <a:r>
-              <a:rPr lang="en-US" sz="3200" dirty="0">
-                <a:latin typeface="Times New Roman" pitchFamily="18" charset="0"/>
-                <a:cs typeface="Times New Roman" pitchFamily="18" charset="0"/>
-              </a:rPr>
-              <a:t>Node.js, Next.js</a:t>
-            </a:r>
-          </a:p>
-          <a:p>
-            <a:pPr marL="457200" indent="-457200">
-              <a:lnSpc>
-                <a:spcPct val="150000"/>
-              </a:lnSpc>
-              <a:buFont typeface="Arial" panose="020B0604020202020204" pitchFamily="34" charset="0"/>
-              <a:buChar char="•"/>
-            </a:pPr>
-            <a:r>
-              <a:rPr lang="ru-RU" sz="3200" dirty="0">
-                <a:latin typeface="Times New Roman" pitchFamily="18" charset="0"/>
-                <a:cs typeface="Times New Roman" pitchFamily="18" charset="0"/>
-              </a:rPr>
-              <a:t>Клиентская часть: </a:t>
-            </a:r>
-            <a:r>
-              <a:rPr lang="en-US" sz="3200" dirty="0">
-                <a:latin typeface="Times New Roman" pitchFamily="18" charset="0"/>
-                <a:cs typeface="Times New Roman" pitchFamily="18" charset="0"/>
-              </a:rPr>
-              <a:t>React</a:t>
-            </a:r>
-          </a:p>
-          <a:p>
-            <a:pPr marL="457200" indent="-457200">
-              <a:lnSpc>
-                <a:spcPct val="150000"/>
-              </a:lnSpc>
-              <a:buFont typeface="Arial" panose="020B0604020202020204" pitchFamily="34" charset="0"/>
-              <a:buChar char="•"/>
-            </a:pPr>
-            <a:r>
-              <a:rPr lang="ru-RU" sz="3200" dirty="0">
-                <a:latin typeface="Times New Roman" pitchFamily="18" charset="0"/>
-                <a:cs typeface="Times New Roman" pitchFamily="18" charset="0"/>
-              </a:rPr>
-              <a:t>СУБД: </a:t>
-            </a:r>
-            <a:r>
-              <a:rPr lang="en-US" sz="3200" dirty="0">
-                <a:latin typeface="Times New Roman" pitchFamily="18" charset="0"/>
-                <a:cs typeface="Times New Roman" pitchFamily="18" charset="0"/>
-              </a:rPr>
-              <a:t>MySQL</a:t>
-            </a:r>
-            <a:endParaRPr lang="ru-RU" sz="3200" dirty="0">
-              <a:latin typeface="Times New Roman" pitchFamily="18" charset="0"/>
-              <a:cs typeface="Times New Roman" pitchFamily="18" charset="0"/>
-            </a:endParaRPr>
-          </a:p>
-          <a:p>
-            <a:pPr marL="457200" indent="-457200">
-              <a:lnSpc>
-                <a:spcPct val="150000"/>
-              </a:lnSpc>
-              <a:buFont typeface="Arial" panose="020B0604020202020204" pitchFamily="34" charset="0"/>
-              <a:buChar char="•"/>
-            </a:pPr>
-            <a:r>
-              <a:rPr lang="ru-RU" sz="3200" dirty="0">
-                <a:latin typeface="Times New Roman" pitchFamily="18" charset="0"/>
-                <a:cs typeface="Times New Roman" pitchFamily="18" charset="0"/>
-              </a:rPr>
-              <a:t>Сервис для аутентификации </a:t>
-            </a:r>
-            <a:r>
-              <a:rPr lang="en-US" sz="3200" dirty="0">
-                <a:latin typeface="Times New Roman" pitchFamily="18" charset="0"/>
-                <a:cs typeface="Times New Roman" pitchFamily="18" charset="0"/>
-              </a:rPr>
-              <a:t>Clerk</a:t>
-            </a:r>
-            <a:endParaRPr lang="ru-RU" sz="3200" dirty="0">
-              <a:latin typeface="Times New Roman" pitchFamily="18" charset="0"/>
-              <a:cs typeface="Times New Roman" pitchFamily="18" charset="0"/>
-            </a:endParaRPr>
-          </a:p>
-          <a:p>
-            <a:pPr marL="457200" indent="-457200">
-              <a:lnSpc>
-                <a:spcPct val="150000"/>
-              </a:lnSpc>
-              <a:buFont typeface="Arial" panose="020B0604020202020204" pitchFamily="34" charset="0"/>
-              <a:buChar char="•"/>
-            </a:pPr>
-            <a:r>
-              <a:rPr lang="ru-RU" sz="3200" dirty="0">
-                <a:latin typeface="Times New Roman" pitchFamily="18" charset="0"/>
-                <a:cs typeface="Times New Roman" pitchFamily="18" charset="0"/>
-              </a:rPr>
-              <a:t>Сервис для обеспечения конференц-связи</a:t>
-            </a:r>
-            <a:r>
-              <a:rPr lang="en-US" sz="3200" dirty="0">
-                <a:latin typeface="Times New Roman" pitchFamily="18" charset="0"/>
-                <a:cs typeface="Times New Roman" pitchFamily="18" charset="0"/>
-              </a:rPr>
-              <a:t> </a:t>
-            </a:r>
-            <a:r>
-              <a:rPr lang="en-US" sz="3200" dirty="0" err="1">
-                <a:latin typeface="Times New Roman" pitchFamily="18" charset="0"/>
-                <a:cs typeface="Times New Roman" pitchFamily="18" charset="0"/>
-              </a:rPr>
-              <a:t>LiveKit</a:t>
-            </a:r>
-            <a:endParaRPr lang="ru-RU" sz="3200" dirty="0">
-              <a:latin typeface="Times New Roman" pitchFamily="18" charset="0"/>
-              <a:cs typeface="Times New Roman" pitchFamily="18" charset="0"/>
-            </a:endParaRPr>
+              <a:t>Эксперименты</a:t>
+            </a:r>
           </a:p>
         </p:txBody>
       </p:sp>
@@ -6377,7 +6267,7 @@
           <p:cNvPr id="2" name="Номер слайда 1">
             <a:extLst>
               <a:ext uri="{FF2B5EF4-FFF2-40B4-BE49-F238E27FC236}">
-                <a16:creationId xmlns:a16="http://schemas.microsoft.com/office/drawing/2014/main" id="{32D3499C-CA4B-4025-B4B2-EE8C8AC492DF}"/>
+                <a16:creationId xmlns:a16="http://schemas.microsoft.com/office/drawing/2014/main" id="{D1783245-5BA7-AC7E-9457-397128EC1F44}"/>
               </a:ext>
             </a:extLst>
           </p:cNvPr>
@@ -6406,10 +6296,45 @@
           </a:p>
         </p:txBody>
       </p:sp>
+      <p:pic>
+        <p:nvPicPr>
+          <p:cNvPr id="3" name="Рисунок 2">
+            <a:extLst>
+              <a:ext uri="{FF2B5EF4-FFF2-40B4-BE49-F238E27FC236}">
+                <a16:creationId xmlns:a16="http://schemas.microsoft.com/office/drawing/2014/main" id="{FC9D7AF8-D4DD-F8DA-93EB-4C8FB1BAFA17}"/>
+              </a:ext>
+            </a:extLst>
+          </p:cNvPr>
+          <p:cNvPicPr>
+            <a:picLocks noChangeAspect="1"/>
+          </p:cNvPicPr>
+          <p:nvPr/>
+        </p:nvPicPr>
+        <p:blipFill>
+          <a:blip r:embed="rId3"/>
+          <a:stretch>
+            <a:fillRect/>
+          </a:stretch>
+        </p:blipFill>
+        <p:spPr>
+          <a:xfrm>
+            <a:off x="2652408" y="791303"/>
+            <a:ext cx="6880698" cy="6066697"/>
+          </a:xfrm>
+          <a:prstGeom prst="rect">
+            <a:avLst/>
+          </a:prstGeom>
+          <a:ln w="12700">
+            <a:solidFill>
+              <a:schemeClr val="tx1"/>
+            </a:solidFill>
+          </a:ln>
+        </p:spPr>
+      </p:pic>
     </p:spTree>
     <p:extLst>
       <p:ext uri="{BB962C8B-B14F-4D97-AF65-F5344CB8AC3E}">
-        <p14:creationId xmlns:p14="http://schemas.microsoft.com/office/powerpoint/2010/main" val="2149375643"/>
+        <p14:creationId xmlns:p14="http://schemas.microsoft.com/office/powerpoint/2010/main" val="3285963741"/>
       </p:ext>
     </p:extLst>
   </p:cSld>

--- a/ВКР/Презентация ВКР.pptx
+++ b/ВКР/Презентация ВКР.pptx
@@ -5,7 +5,7 @@
     <p:sldMasterId id="2147483672" r:id="rId1"/>
   </p:sldMasterIdLst>
   <p:notesMasterIdLst>
-    <p:notesMasterId r:id="rId15"/>
+    <p:notesMasterId r:id="rId18"/>
   </p:notesMasterIdLst>
   <p:sldIdLst>
     <p:sldId id="256" r:id="rId2"/>
@@ -14,13 +14,16 @@
     <p:sldId id="259" r:id="rId5"/>
     <p:sldId id="274" r:id="rId6"/>
     <p:sldId id="271" r:id="rId7"/>
-    <p:sldId id="265" r:id="rId8"/>
-    <p:sldId id="277" r:id="rId9"/>
+    <p:sldId id="281" r:id="rId8"/>
+    <p:sldId id="278" r:id="rId9"/>
     <p:sldId id="276" r:id="rId10"/>
-    <p:sldId id="273" r:id="rId11"/>
-    <p:sldId id="266" r:id="rId12"/>
-    <p:sldId id="269" r:id="rId13"/>
-    <p:sldId id="270" r:id="rId14"/>
+    <p:sldId id="279" r:id="rId11"/>
+    <p:sldId id="273" r:id="rId12"/>
+    <p:sldId id="280" r:id="rId13"/>
+    <p:sldId id="266" r:id="rId14"/>
+    <p:sldId id="269" r:id="rId15"/>
+    <p:sldId id="282" r:id="rId16"/>
+    <p:sldId id="270" r:id="rId17"/>
   </p:sldIdLst>
   <p:sldSz cx="12192000" cy="6858000"/>
   <p:notesSz cx="6858000" cy="9144000"/>
@@ -209,7 +212,7 @@
           <a:p>
             <a:fld id="{09B7CBF2-44B9-4FD7-ADE0-AEF665969899}" type="datetimeFigureOut">
               <a:rPr lang="ru-RU" smtClean="0"/>
-              <a:t>23.05.2025</a:t>
+              <a:t>26.05.2025</a:t>
             </a:fld>
             <a:endParaRPr lang="ru-RU"/>
           </a:p>
@@ -560,6 +563,107 @@
 </p:notes>
 </file>
 
+<file path=ppt/notesSlides/notesSlide10.xml><?xml version="1.0" encoding="utf-8"?>
+<p:notes xmlns:a="http://schemas.openxmlformats.org/drawingml/2006/main" xmlns:r="http://schemas.openxmlformats.org/officeDocument/2006/relationships" xmlns:p="http://schemas.openxmlformats.org/presentationml/2006/main">
+  <p:cSld>
+    <p:spTree>
+      <p:nvGrpSpPr>
+        <p:cNvPr id="1" name=""/>
+        <p:cNvGrpSpPr/>
+        <p:nvPr/>
+      </p:nvGrpSpPr>
+      <p:grpSpPr>
+        <a:xfrm>
+          <a:off x="0" y="0"/>
+          <a:ext cx="0" cy="0"/>
+          <a:chOff x="0" y="0"/>
+          <a:chExt cx="0" cy="0"/>
+        </a:xfrm>
+      </p:grpSpPr>
+      <p:sp>
+        <p:nvSpPr>
+          <p:cNvPr id="2" name="Образ слайда 1"/>
+          <p:cNvSpPr>
+            <a:spLocks noGrp="1" noRot="1" noChangeAspect="1"/>
+          </p:cNvSpPr>
+          <p:nvPr>
+            <p:ph type="sldImg"/>
+          </p:nvPr>
+        </p:nvSpPr>
+        <p:spPr/>
+      </p:sp>
+      <p:sp>
+        <p:nvSpPr>
+          <p:cNvPr id="3" name="Заметки 2"/>
+          <p:cNvSpPr>
+            <a:spLocks noGrp="1"/>
+          </p:cNvSpPr>
+          <p:nvPr>
+            <p:ph type="body" idx="1"/>
+          </p:nvPr>
+        </p:nvSpPr>
+        <p:spPr/>
+        <p:txBody>
+          <a:bodyPr/>
+          <a:lstStyle/>
+          <a:p>
+            <a:r>
+              <a:rPr lang="ru-RU" sz="1800" dirty="0">
+                <a:effectLst/>
+                <a:latin typeface="Times New Roman" panose="02020603050405020304" pitchFamily="18" charset="0"/>
+                <a:ea typeface="Times New Roman" panose="02020603050405020304" pitchFamily="18" charset="0"/>
+              </a:rPr>
+              <a:t>Для проверки системы использовалось функциональное тестирование. Это один из самых популярных видов тестирования, который проверяет соответствие функциональности продукта тому, как он был задуман.</a:t>
+            </a:r>
+          </a:p>
+          <a:p>
+            <a:r>
+              <a:rPr lang="ru-RU" sz="1800" dirty="0">
+                <a:effectLst/>
+                <a:latin typeface="Times New Roman" panose="02020603050405020304" pitchFamily="18" charset="0"/>
+              </a:rPr>
+              <a:t>Были проверены следующие функции:</a:t>
+            </a:r>
+            <a:endParaRPr lang="ru-RU" dirty="0"/>
+          </a:p>
+        </p:txBody>
+      </p:sp>
+      <p:sp>
+        <p:nvSpPr>
+          <p:cNvPr id="4" name="Номер слайда 3"/>
+          <p:cNvSpPr>
+            <a:spLocks noGrp="1"/>
+          </p:cNvSpPr>
+          <p:nvPr>
+            <p:ph type="sldNum" sz="quarter" idx="5"/>
+          </p:nvPr>
+        </p:nvSpPr>
+        <p:spPr/>
+        <p:txBody>
+          <a:bodyPr/>
+          <a:lstStyle/>
+          <a:p>
+            <a:fld id="{70C95F39-9986-42CA-BA2A-89BEF2EFFE33}" type="slidenum">
+              <a:rPr lang="ru-RU" smtClean="0"/>
+              <a:t>15</a:t>
+            </a:fld>
+            <a:endParaRPr lang="ru-RU"/>
+          </a:p>
+        </p:txBody>
+      </p:sp>
+    </p:spTree>
+    <p:extLst>
+      <p:ext uri="{BB962C8B-B14F-4D97-AF65-F5344CB8AC3E}">
+        <p14:creationId xmlns:p14="http://schemas.microsoft.com/office/powerpoint/2010/main" val="4056127078"/>
+      </p:ext>
+    </p:extLst>
+  </p:cSld>
+  <p:clrMapOvr>
+    <a:masterClrMapping/>
+  </p:clrMapOvr>
+</p:notes>
+</file>
+
 <file path=ppt/notesSlides/notesSlide2.xml><?xml version="1.0" encoding="utf-8"?>
 <p:notes xmlns:a="http://schemas.openxmlformats.org/drawingml/2006/main" xmlns:r="http://schemas.openxmlformats.org/officeDocument/2006/relationships" xmlns:p="http://schemas.openxmlformats.org/presentationml/2006/main">
   <p:cSld>
@@ -782,7 +886,7 @@
           <a:p>
             <a:r>
               <a:rPr lang="ru-RU" dirty="0"/>
-              <a:t>Мною выделены основные функции веб-приложения.</a:t>
+              <a:t>Мною выделены основные функции</a:t>
             </a:r>
           </a:p>
         </p:txBody>
@@ -824,6 +928,93 @@
 </file>
 
 <file path=ppt/notesSlides/notesSlide5.xml><?xml version="1.0" encoding="utf-8"?>
+<p:notes xmlns:a="http://schemas.openxmlformats.org/drawingml/2006/main" xmlns:r="http://schemas.openxmlformats.org/officeDocument/2006/relationships" xmlns:p="http://schemas.openxmlformats.org/presentationml/2006/main">
+  <p:cSld>
+    <p:spTree>
+      <p:nvGrpSpPr>
+        <p:cNvPr id="1" name=""/>
+        <p:cNvGrpSpPr/>
+        <p:nvPr/>
+      </p:nvGrpSpPr>
+      <p:grpSpPr>
+        <a:xfrm>
+          <a:off x="0" y="0"/>
+          <a:ext cx="0" cy="0"/>
+          <a:chOff x="0" y="0"/>
+          <a:chExt cx="0" cy="0"/>
+        </a:xfrm>
+      </p:grpSpPr>
+      <p:sp>
+        <p:nvSpPr>
+          <p:cNvPr id="2" name="Образ слайда 1"/>
+          <p:cNvSpPr>
+            <a:spLocks noGrp="1" noRot="1" noChangeAspect="1"/>
+          </p:cNvSpPr>
+          <p:nvPr>
+            <p:ph type="sldImg"/>
+          </p:nvPr>
+        </p:nvSpPr>
+        <p:spPr/>
+      </p:sp>
+      <p:sp>
+        <p:nvSpPr>
+          <p:cNvPr id="3" name="Заметки 2"/>
+          <p:cNvSpPr>
+            <a:spLocks noGrp="1"/>
+          </p:cNvSpPr>
+          <p:nvPr>
+            <p:ph type="body" idx="1"/>
+          </p:nvPr>
+        </p:nvSpPr>
+        <p:spPr/>
+        <p:txBody>
+          <a:bodyPr/>
+          <a:lstStyle/>
+          <a:p>
+            <a:r>
+              <a:rPr lang="ru-RU" dirty="0"/>
+              <a:t>Сформирован набор данных</a:t>
+            </a:r>
+          </a:p>
+        </p:txBody>
+      </p:sp>
+      <p:sp>
+        <p:nvSpPr>
+          <p:cNvPr id="4" name="Номер слайда 3"/>
+          <p:cNvSpPr>
+            <a:spLocks noGrp="1"/>
+          </p:cNvSpPr>
+          <p:nvPr>
+            <p:ph type="sldNum" sz="quarter" idx="5"/>
+          </p:nvPr>
+        </p:nvSpPr>
+        <p:spPr/>
+        <p:txBody>
+          <a:bodyPr/>
+          <a:lstStyle/>
+          <a:p>
+            <a:fld id="{70C95F39-9986-42CA-BA2A-89BEF2EFFE33}" type="slidenum">
+              <a:rPr lang="ru-RU" smtClean="0"/>
+              <a:t>7</a:t>
+            </a:fld>
+            <a:endParaRPr lang="ru-RU"/>
+          </a:p>
+        </p:txBody>
+      </p:sp>
+    </p:spTree>
+    <p:extLst>
+      <p:ext uri="{BB962C8B-B14F-4D97-AF65-F5344CB8AC3E}">
+        <p14:creationId xmlns:p14="http://schemas.microsoft.com/office/powerpoint/2010/main" val="4199771427"/>
+      </p:ext>
+    </p:extLst>
+  </p:cSld>
+  <p:clrMapOvr>
+    <a:masterClrMapping/>
+  </p:clrMapOvr>
+</p:notes>
+</file>
+
+<file path=ppt/notesSlides/notesSlide6.xml><?xml version="1.0" encoding="utf-8"?>
 <p:notes xmlns:a="http://schemas.openxmlformats.org/drawingml/2006/main" xmlns:r="http://schemas.openxmlformats.org/officeDocument/2006/relationships" xmlns:p="http://schemas.openxmlformats.org/presentationml/2006/main">
   <p:cSld>
     <p:spTree>
@@ -924,7 +1115,7 @@
     </p:spTree>
     <p:extLst>
       <p:ext uri="{BB962C8B-B14F-4D97-AF65-F5344CB8AC3E}">
-        <p14:creationId xmlns:p14="http://schemas.microsoft.com/office/powerpoint/2010/main" val="3241441780"/>
+        <p14:creationId xmlns:p14="http://schemas.microsoft.com/office/powerpoint/2010/main" val="2901114960"/>
       </p:ext>
     </p:extLst>
   </p:cSld>
@@ -934,7 +1125,7 @@
 </p:notes>
 </file>
 
-<file path=ppt/notesSlides/notesSlide6.xml><?xml version="1.0" encoding="utf-8"?>
+<file path=ppt/notesSlides/notesSlide7.xml><?xml version="1.0" encoding="utf-8"?>
 <p:notes xmlns:a="http://schemas.openxmlformats.org/drawingml/2006/main" xmlns:r="http://schemas.openxmlformats.org/officeDocument/2006/relationships" xmlns:p="http://schemas.openxmlformats.org/presentationml/2006/main">
   <p:cSld>
     <p:spTree>
@@ -1045,7 +1236,118 @@
 </p:notes>
 </file>
 
-<file path=ppt/notesSlides/notesSlide7.xml><?xml version="1.0" encoding="utf-8"?>
+<file path=ppt/notesSlides/notesSlide8.xml><?xml version="1.0" encoding="utf-8"?>
+<p:notes xmlns:a="http://schemas.openxmlformats.org/drawingml/2006/main" xmlns:r="http://schemas.openxmlformats.org/officeDocument/2006/relationships" xmlns:p="http://schemas.openxmlformats.org/presentationml/2006/main">
+  <p:cSld>
+    <p:spTree>
+      <p:nvGrpSpPr>
+        <p:cNvPr id="1" name="">
+          <a:extLst>
+            <a:ext uri="{FF2B5EF4-FFF2-40B4-BE49-F238E27FC236}">
+              <a16:creationId xmlns:a16="http://schemas.microsoft.com/office/drawing/2014/main" id="{99D5B2C6-1FE0-FBEA-2AB0-F680D00C5A24}"/>
+            </a:ext>
+          </a:extLst>
+        </p:cNvPr>
+        <p:cNvGrpSpPr/>
+        <p:nvPr/>
+      </p:nvGrpSpPr>
+      <p:grpSpPr>
+        <a:xfrm>
+          <a:off x="0" y="0"/>
+          <a:ext cx="0" cy="0"/>
+          <a:chOff x="0" y="0"/>
+          <a:chExt cx="0" cy="0"/>
+        </a:xfrm>
+      </p:grpSpPr>
+      <p:sp>
+        <p:nvSpPr>
+          <p:cNvPr id="2" name="Образ слайда 1">
+            <a:extLst>
+              <a:ext uri="{FF2B5EF4-FFF2-40B4-BE49-F238E27FC236}">
+                <a16:creationId xmlns:a16="http://schemas.microsoft.com/office/drawing/2014/main" id="{182BA091-156A-5FB4-D2E3-984DD5E62C0C}"/>
+              </a:ext>
+            </a:extLst>
+          </p:cNvPr>
+          <p:cNvSpPr>
+            <a:spLocks noGrp="1" noRot="1" noChangeAspect="1"/>
+          </p:cNvSpPr>
+          <p:nvPr>
+            <p:ph type="sldImg"/>
+          </p:nvPr>
+        </p:nvSpPr>
+        <p:spPr/>
+      </p:sp>
+      <p:sp>
+        <p:nvSpPr>
+          <p:cNvPr id="3" name="Заметки 2">
+            <a:extLst>
+              <a:ext uri="{FF2B5EF4-FFF2-40B4-BE49-F238E27FC236}">
+                <a16:creationId xmlns:a16="http://schemas.microsoft.com/office/drawing/2014/main" id="{8BEC5B86-F21E-7D2D-594D-6FDC49DB7E99}"/>
+              </a:ext>
+            </a:extLst>
+          </p:cNvPr>
+          <p:cNvSpPr>
+            <a:spLocks noGrp="1"/>
+          </p:cNvSpPr>
+          <p:nvPr>
+            <p:ph type="body" idx="1"/>
+          </p:nvPr>
+        </p:nvSpPr>
+        <p:spPr/>
+        <p:txBody>
+          <a:bodyPr/>
+          <a:lstStyle/>
+          <a:p>
+            <a:r>
+              <a:rPr lang="ru-RU" dirty="0"/>
+              <a:t>Мною выделены основные функции веб-приложения.</a:t>
+            </a:r>
+          </a:p>
+        </p:txBody>
+      </p:sp>
+      <p:sp>
+        <p:nvSpPr>
+          <p:cNvPr id="4" name="Номер слайда 3">
+            <a:extLst>
+              <a:ext uri="{FF2B5EF4-FFF2-40B4-BE49-F238E27FC236}">
+                <a16:creationId xmlns:a16="http://schemas.microsoft.com/office/drawing/2014/main" id="{FD2CE8EC-04A7-D0A3-B4F7-536827882138}"/>
+              </a:ext>
+            </a:extLst>
+          </p:cNvPr>
+          <p:cNvSpPr>
+            <a:spLocks noGrp="1"/>
+          </p:cNvSpPr>
+          <p:nvPr>
+            <p:ph type="sldNum" sz="quarter" idx="5"/>
+          </p:nvPr>
+        </p:nvSpPr>
+        <p:spPr/>
+        <p:txBody>
+          <a:bodyPr/>
+          <a:lstStyle/>
+          <a:p>
+            <a:fld id="{70C95F39-9986-42CA-BA2A-89BEF2EFFE33}" type="slidenum">
+              <a:rPr lang="ru-RU" smtClean="0"/>
+              <a:t>10</a:t>
+            </a:fld>
+            <a:endParaRPr lang="ru-RU"/>
+          </a:p>
+        </p:txBody>
+      </p:sp>
+    </p:spTree>
+    <p:extLst>
+      <p:ext uri="{BB962C8B-B14F-4D97-AF65-F5344CB8AC3E}">
+        <p14:creationId xmlns:p14="http://schemas.microsoft.com/office/powerpoint/2010/main" val="1475204535"/>
+      </p:ext>
+    </p:extLst>
+  </p:cSld>
+  <p:clrMapOvr>
+    <a:masterClrMapping/>
+  </p:clrMapOvr>
+</p:notes>
+</file>
+
+<file path=ppt/notesSlides/notesSlide9.xml><?xml version="1.0" encoding="utf-8"?>
 <p:notes xmlns:a="http://schemas.openxmlformats.org/drawingml/2006/main" xmlns:r="http://schemas.openxmlformats.org/officeDocument/2006/relationships" xmlns:p="http://schemas.openxmlformats.org/presentationml/2006/main">
   <p:cSld>
     <p:spTree>
@@ -1127,7 +1429,7 @@
           <a:p>
             <a:fld id="{70C95F39-9986-42CA-BA2A-89BEF2EFFE33}" type="slidenum">
               <a:rPr lang="ru-RU" smtClean="0"/>
-              <a:t>12</a:t>
+              <a:t>14</a:t>
             </a:fld>
             <a:endParaRPr lang="ru-RU"/>
           </a:p>
@@ -1277,7 +1579,7 @@
           <a:p>
             <a:fld id="{F5CF9F3A-188F-4C16-A2DE-2587DE574B1E}" type="datetime1">
               <a:rPr lang="ru-RU" smtClean="0"/>
-              <a:t>23.05.2025</a:t>
+              <a:t>26.05.2025</a:t>
             </a:fld>
             <a:endParaRPr lang="ru-RU"/>
           </a:p>
@@ -1447,7 +1749,7 @@
           <a:p>
             <a:fld id="{3A11F0EA-DC1B-403A-BF71-142FC9FB47EA}" type="datetime1">
               <a:rPr lang="ru-RU" smtClean="0"/>
-              <a:t>23.05.2025</a:t>
+              <a:t>26.05.2025</a:t>
             </a:fld>
             <a:endParaRPr lang="ru-RU"/>
           </a:p>
@@ -1627,7 +1929,7 @@
           <a:p>
             <a:fld id="{CCC85F8A-18D6-4BA8-A576-50974D5C4A22}" type="datetime1">
               <a:rPr lang="ru-RU" smtClean="0"/>
-              <a:t>23.05.2025</a:t>
+              <a:t>26.05.2025</a:t>
             </a:fld>
             <a:endParaRPr lang="ru-RU"/>
           </a:p>
@@ -1797,7 +2099,7 @@
           <a:p>
             <a:fld id="{545A4267-40AA-4092-A36F-C26D6811F45A}" type="datetime1">
               <a:rPr lang="ru-RU" smtClean="0"/>
-              <a:t>23.05.2025</a:t>
+              <a:t>26.05.2025</a:t>
             </a:fld>
             <a:endParaRPr lang="ru-RU"/>
           </a:p>
@@ -2051,7 +2353,7 @@
           <a:p>
             <a:fld id="{E7A0052E-2485-4FD0-B116-14C5D93EDDE8}" type="datetime1">
               <a:rPr lang="ru-RU" smtClean="0"/>
-              <a:t>23.05.2025</a:t>
+              <a:t>26.05.2025</a:t>
             </a:fld>
             <a:endParaRPr lang="ru-RU"/>
           </a:p>
@@ -2283,7 +2585,7 @@
           <a:p>
             <a:fld id="{B8CB62B4-F45C-4AC4-ABBE-0574B703B479}" type="datetime1">
               <a:rPr lang="ru-RU" smtClean="0"/>
-              <a:t>23.05.2025</a:t>
+              <a:t>26.05.2025</a:t>
             </a:fld>
             <a:endParaRPr lang="ru-RU"/>
           </a:p>
@@ -2650,7 +2952,7 @@
           <a:p>
             <a:fld id="{B4B7E3C1-EF5D-4588-B524-A705B5B0D133}" type="datetime1">
               <a:rPr lang="ru-RU" smtClean="0"/>
-              <a:t>23.05.2025</a:t>
+              <a:t>26.05.2025</a:t>
             </a:fld>
             <a:endParaRPr lang="ru-RU"/>
           </a:p>
@@ -2768,7 +3070,7 @@
           <a:p>
             <a:fld id="{E7435BB4-24F7-4230-8D01-C405E5E94E64}" type="datetime1">
               <a:rPr lang="ru-RU" smtClean="0"/>
-              <a:t>23.05.2025</a:t>
+              <a:t>26.05.2025</a:t>
             </a:fld>
             <a:endParaRPr lang="ru-RU"/>
           </a:p>
@@ -2863,7 +3165,7 @@
           <a:p>
             <a:fld id="{65A904D9-2361-4337-8CBD-AF145C2276BB}" type="datetime1">
               <a:rPr lang="ru-RU" smtClean="0"/>
-              <a:t>23.05.2025</a:t>
+              <a:t>26.05.2025</a:t>
             </a:fld>
             <a:endParaRPr lang="ru-RU"/>
           </a:p>
@@ -3140,7 +3442,7 @@
           <a:p>
             <a:fld id="{7245CB82-17B0-42A9-AB4B-7BA95240445A}" type="datetime1">
               <a:rPr lang="ru-RU" smtClean="0"/>
-              <a:t>23.05.2025</a:t>
+              <a:t>26.05.2025</a:t>
             </a:fld>
             <a:endParaRPr lang="ru-RU"/>
           </a:p>
@@ -3397,7 +3699,7 @@
           <a:p>
             <a:fld id="{1DD37A11-3641-4D89-9551-B66F594B6E05}" type="datetime1">
               <a:rPr lang="ru-RU" smtClean="0"/>
-              <a:t>23.05.2025</a:t>
+              <a:t>26.05.2025</a:t>
             </a:fld>
             <a:endParaRPr lang="ru-RU"/>
           </a:p>
@@ -3610,7 +3912,7 @@
           <a:p>
             <a:fld id="{C7EACBE0-ED2A-454B-897D-9089BF3ED2F7}" type="datetime1">
               <a:rPr lang="ru-RU" smtClean="0"/>
-              <a:t>23.05.2025</a:t>
+              <a:t>26.05.2025</a:t>
             </a:fld>
             <a:endParaRPr lang="ru-RU"/>
           </a:p>
@@ -4034,7 +4336,7 @@
         </p:nvSpPr>
         <p:spPr>
           <a:xfrm>
-            <a:off x="2348620" y="2829757"/>
+            <a:off x="2348620" y="2720428"/>
             <a:ext cx="7772400" cy="514390"/>
           </a:xfrm>
         </p:spPr>
@@ -4045,20 +4347,20 @@
           <a:lstStyle/>
           <a:p>
             <a:r>
-              <a:rPr lang="ru-RU" sz="3200" dirty="0">
+              <a:rPr lang="ru-RU" sz="3200" b="1" dirty="0">
                 <a:latin typeface="Times New Roman" pitchFamily="18" charset="0"/>
                 <a:cs typeface="Times New Roman" pitchFamily="18" charset="0"/>
               </a:rPr>
               <a:t>Разработка веб-приложения</a:t>
             </a:r>
             <a:br>
-              <a:rPr lang="ru-RU" sz="3200" dirty="0">
+              <a:rPr lang="ru-RU" sz="3200" b="1" dirty="0">
                 <a:latin typeface="Times New Roman" pitchFamily="18" charset="0"/>
                 <a:cs typeface="Times New Roman" pitchFamily="18" charset="0"/>
               </a:rPr>
             </a:br>
             <a:r>
-              <a:rPr lang="ru-RU" sz="3200" dirty="0">
+              <a:rPr lang="ru-RU" sz="3200" b="1" dirty="0">
                 <a:latin typeface="Times New Roman" pitchFamily="18" charset="0"/>
                 <a:cs typeface="Times New Roman" pitchFamily="18" charset="0"/>
               </a:rPr>
@@ -4082,7 +4384,7 @@
         <p:spPr>
           <a:xfrm>
             <a:off x="0" y="138002"/>
-            <a:ext cx="12192000" cy="1631216"/>
+            <a:ext cx="12192000" cy="1477328"/>
           </a:xfrm>
           <a:prstGeom prst="rect">
             <a:avLst/>
@@ -4097,7 +4399,7 @@
           <a:p>
             <a:pPr algn="ctr"/>
             <a:r>
-              <a:rPr lang="ru-RU" sz="2000" dirty="0">
+              <a:rPr lang="ru-RU" dirty="0">
                 <a:latin typeface="Times New Roman" pitchFamily="18" charset="0"/>
                 <a:cs typeface="Times New Roman" pitchFamily="18" charset="0"/>
               </a:rPr>
@@ -4107,7 +4409,7 @@
           <a:p>
             <a:pPr algn="ctr"/>
             <a:r>
-              <a:rPr lang="ru-RU" sz="2000" dirty="0">
+              <a:rPr lang="ru-RU" dirty="0">
                 <a:latin typeface="Times New Roman" pitchFamily="18" charset="0"/>
                 <a:cs typeface="Times New Roman" pitchFamily="18" charset="0"/>
               </a:rPr>
@@ -4117,7 +4419,7 @@
           <a:p>
             <a:pPr algn="ctr"/>
             <a:r>
-              <a:rPr lang="ru-RU" sz="2000" dirty="0">
+              <a:rPr lang="ru-RU" dirty="0">
                 <a:latin typeface="Times New Roman" pitchFamily="18" charset="0"/>
                 <a:cs typeface="Times New Roman" pitchFamily="18" charset="0"/>
               </a:rPr>
@@ -4127,7 +4429,7 @@
           <a:p>
             <a:pPr algn="ctr"/>
             <a:r>
-              <a:rPr lang="ru-RU" sz="2000" dirty="0">
+              <a:rPr lang="ru-RU" dirty="0">
                 <a:latin typeface="Times New Roman" pitchFamily="18" charset="0"/>
                 <a:cs typeface="Times New Roman" pitchFamily="18" charset="0"/>
               </a:rPr>
@@ -4137,7 +4439,7 @@
           <a:p>
             <a:pPr algn="ctr"/>
             <a:r>
-              <a:rPr lang="ru-RU" sz="2000" dirty="0">
+              <a:rPr lang="ru-RU" dirty="0">
                 <a:latin typeface="Times New Roman" pitchFamily="18" charset="0"/>
                 <a:cs typeface="Times New Roman" pitchFamily="18" charset="0"/>
               </a:rPr>
@@ -4160,7 +4462,7 @@
         </p:nvSpPr>
         <p:spPr>
           <a:xfrm>
-            <a:off x="1244338" y="4066760"/>
+            <a:off x="1244338" y="4225784"/>
             <a:ext cx="3535052" cy="1015663"/>
           </a:xfrm>
           <a:prstGeom prst="rect">
@@ -4220,7 +4522,7 @@
         </p:nvSpPr>
         <p:spPr>
           <a:xfrm>
-            <a:off x="7746987" y="4066760"/>
+            <a:off x="7746987" y="4245662"/>
             <a:ext cx="3074983" cy="1015663"/>
           </a:xfrm>
           <a:prstGeom prst="rect">
@@ -4319,7 +4621,13 @@
   <p:cSld>
     <p:spTree>
       <p:nvGrpSpPr>
-        <p:cNvPr id="1" name=""/>
+        <p:cNvPr id="1" name="">
+          <a:extLst>
+            <a:ext uri="{FF2B5EF4-FFF2-40B4-BE49-F238E27FC236}">
+              <a16:creationId xmlns:a16="http://schemas.microsoft.com/office/drawing/2014/main" id="{79724762-471F-45B4-2DAC-2AAB613E98CD}"/>
+            </a:ext>
+          </a:extLst>
+        </p:cNvPr>
         <p:cNvGrpSpPr/>
         <p:nvPr/>
       </p:nvGrpSpPr>
@@ -4331,114 +4639,22 @@
           <a:chExt cx="0" cy="0"/>
         </a:xfrm>
       </p:grpSpPr>
-      <p:sp>
-        <p:nvSpPr>
-          <p:cNvPr id="5" name="Заголовок 1">
+      <p:pic>
+        <p:nvPicPr>
+          <p:cNvPr id="2050" name="Picture 2">
             <a:extLst>
               <a:ext uri="{FF2B5EF4-FFF2-40B4-BE49-F238E27FC236}">
-                <a16:creationId xmlns:a16="http://schemas.microsoft.com/office/drawing/2014/main" id="{08AFB1E6-1180-47CF-AADB-5C4D9D1C94F6}"/>
-              </a:ext>
-            </a:extLst>
-          </p:cNvPr>
-          <p:cNvSpPr txBox="1">
-            <a:spLocks/>
-          </p:cNvSpPr>
-          <p:nvPr/>
-        </p:nvSpPr>
-        <p:spPr>
-          <a:xfrm>
-            <a:off x="2077039" y="-103626"/>
-            <a:ext cx="8229600" cy="1143000"/>
-          </a:xfrm>
-          <a:prstGeom prst="rect">
-            <a:avLst/>
-          </a:prstGeom>
-        </p:spPr>
-        <p:txBody>
-          <a:bodyPr vert="horz" lIns="91440" tIns="45720" rIns="91440" bIns="45720" rtlCol="0" anchor="ctr">
-            <a:normAutofit/>
-          </a:bodyPr>
-          <a:lstStyle>
-            <a:lvl1pPr algn="l" defTabSz="914400" rtl="0" eaLnBrk="1" latinLnBrk="0" hangingPunct="1">
-              <a:lnSpc>
-                <a:spcPct val="90000"/>
-              </a:lnSpc>
-              <a:spcBef>
-                <a:spcPct val="0"/>
-              </a:spcBef>
-              <a:buNone/>
-              <a:defRPr sz="4400" kern="1200">
-                <a:solidFill>
-                  <a:schemeClr val="tx1"/>
-                </a:solidFill>
-                <a:latin typeface="+mj-lt"/>
-                <a:ea typeface="+mj-ea"/>
-                <a:cs typeface="+mj-cs"/>
-              </a:defRPr>
-            </a:lvl1pPr>
-          </a:lstStyle>
-          <a:p>
-            <a:pPr algn="ctr"/>
-            <a:r>
-              <a:rPr lang="ru-RU" dirty="0">
-                <a:latin typeface="Times New Roman" pitchFamily="18" charset="0"/>
-                <a:cs typeface="Times New Roman" pitchFamily="18" charset="0"/>
-              </a:rPr>
-              <a:t>Диаграмма последовательности</a:t>
-            </a:r>
-          </a:p>
-        </p:txBody>
-      </p:sp>
-      <p:sp>
-        <p:nvSpPr>
-          <p:cNvPr id="11" name="Номер слайда 10">
-            <a:extLst>
-              <a:ext uri="{FF2B5EF4-FFF2-40B4-BE49-F238E27FC236}">
-                <a16:creationId xmlns:a16="http://schemas.microsoft.com/office/drawing/2014/main" id="{FE060230-92E3-4D54-B637-036B28A13098}"/>
-              </a:ext>
-            </a:extLst>
-          </p:cNvPr>
-          <p:cNvSpPr>
-            <a:spLocks noGrp="1"/>
-          </p:cNvSpPr>
-          <p:nvPr>
-            <p:ph type="sldNum" sz="quarter" idx="12"/>
-          </p:nvPr>
-        </p:nvSpPr>
-        <p:spPr/>
-        <p:txBody>
-          <a:bodyPr/>
-          <a:lstStyle/>
-          <a:p>
-            <a:fld id="{1FB77788-E5A7-4255-94F6-739BDA5FC0D4}" type="slidenum">
-              <a:rPr lang="ru-RU" smtClean="0"/>
-              <a:pPr/>
-              <a:t>10</a:t>
-            </a:fld>
-            <a:r>
-              <a:rPr lang="ru-RU"/>
-              <a:t>/17</a:t>
-            </a:r>
-            <a:endParaRPr lang="ru-RU" dirty="0"/>
-          </a:p>
-        </p:txBody>
-      </p:sp>
-      <p:pic>
-        <p:nvPicPr>
-          <p:cNvPr id="2" name="Рисунок 1">
-            <a:extLst>
-              <a:ext uri="{FF2B5EF4-FFF2-40B4-BE49-F238E27FC236}">
-                <a16:creationId xmlns:a16="http://schemas.microsoft.com/office/drawing/2014/main" id="{DF28B1EC-F213-12BE-5B6A-DDBE2B2BCAA7}"/>
+                <a16:creationId xmlns:a16="http://schemas.microsoft.com/office/drawing/2014/main" id="{43FA98AC-8D7F-40B1-84B0-2B152291E8D5}"/>
               </a:ext>
             </a:extLst>
           </p:cNvPr>
           <p:cNvPicPr>
-            <a:picLocks noChangeAspect="1"/>
+            <a:picLocks noChangeAspect="1" noChangeArrowheads="1"/>
           </p:cNvPicPr>
           <p:nvPr/>
         </p:nvPicPr>
         <p:blipFill>
-          <a:blip r:embed="rId2">
+          <a:blip r:embed="rId3">
             <a:extLst>
               <a:ext uri="{28A0092B-C50C-407E-A947-70E740481C1C}">
                 <a14:useLocalDpi xmlns:a14="http://schemas.microsoft.com/office/drawing/2010/main" val="0"/>
@@ -4452,24 +4668,105 @@
         </p:blipFill>
         <p:spPr bwMode="auto">
           <a:xfrm>
-            <a:off x="3221672" y="700357"/>
-            <a:ext cx="5748655" cy="6092825"/>
+            <a:off x="1858617" y="653497"/>
+            <a:ext cx="8391941" cy="6293956"/>
           </a:xfrm>
           <a:prstGeom prst="rect">
             <a:avLst/>
           </a:prstGeom>
           <a:noFill/>
-          <a:ln w="9525">
-            <a:solidFill>
-              <a:schemeClr val="tx1"/>
-            </a:solidFill>
-          </a:ln>
+          <a:extLst>
+            <a:ext uri="{909E8E84-426E-40DD-AFC4-6F175D3DCCD1}">
+              <a14:hiddenFill xmlns:a14="http://schemas.microsoft.com/office/drawing/2010/main">
+                <a:solidFill>
+                  <a:srgbClr val="FFFFFF"/>
+                </a:solidFill>
+              </a14:hiddenFill>
+            </a:ext>
+          </a:extLst>
         </p:spPr>
       </p:pic>
+      <p:sp>
+        <p:nvSpPr>
+          <p:cNvPr id="4" name="Заголовок 1">
+            <a:extLst>
+              <a:ext uri="{FF2B5EF4-FFF2-40B4-BE49-F238E27FC236}">
+                <a16:creationId xmlns:a16="http://schemas.microsoft.com/office/drawing/2014/main" id="{A4C698A9-5C36-6C05-97EF-2665C29AE5B8}"/>
+              </a:ext>
+            </a:extLst>
+          </p:cNvPr>
+          <p:cNvSpPr>
+            <a:spLocks noGrp="1"/>
+          </p:cNvSpPr>
+          <p:nvPr>
+            <p:ph type="title"/>
+          </p:nvPr>
+        </p:nvSpPr>
+        <p:spPr>
+          <a:xfrm>
+            <a:off x="1981200" y="-133577"/>
+            <a:ext cx="8229600" cy="1143000"/>
+          </a:xfrm>
+        </p:spPr>
+        <p:txBody>
+          <a:bodyPr>
+            <a:normAutofit/>
+          </a:bodyPr>
+          <a:lstStyle/>
+          <a:p>
+            <a:pPr algn="ctr"/>
+            <a:r>
+              <a:rPr lang="ru-RU" dirty="0">
+                <a:latin typeface="Times New Roman" pitchFamily="18" charset="0"/>
+                <a:cs typeface="Times New Roman" pitchFamily="18" charset="0"/>
+              </a:rPr>
+              <a:t>Тестирование</a:t>
+            </a:r>
+          </a:p>
+        </p:txBody>
+      </p:sp>
+      <p:sp>
+        <p:nvSpPr>
+          <p:cNvPr id="2" name="Номер слайда 1">
+            <a:extLst>
+              <a:ext uri="{FF2B5EF4-FFF2-40B4-BE49-F238E27FC236}">
+                <a16:creationId xmlns:a16="http://schemas.microsoft.com/office/drawing/2014/main" id="{D1783245-5BA7-AC7E-9457-397128EC1F44}"/>
+              </a:ext>
+            </a:extLst>
+          </p:cNvPr>
+          <p:cNvSpPr>
+            <a:spLocks noGrp="1"/>
+          </p:cNvSpPr>
+          <p:nvPr>
+            <p:ph type="sldNum" sz="quarter" idx="12"/>
+          </p:nvPr>
+        </p:nvSpPr>
+        <p:spPr/>
+        <p:txBody>
+          <a:bodyPr/>
+          <a:lstStyle/>
+          <a:p>
+            <a:fld id="{1FB77788-E5A7-4255-94F6-739BDA5FC0D4}" type="slidenum">
+              <a:rPr lang="ru-RU" smtClean="0"/>
+              <a:pPr/>
+              <a:t>10</a:t>
+            </a:fld>
+            <a:r>
+              <a:rPr lang="ru-RU" dirty="0"/>
+              <a:t>/1</a:t>
+            </a:r>
+            <a:r>
+              <a:rPr lang="en-US" dirty="0"/>
+              <a:t>6</a:t>
+            </a:r>
+            <a:endParaRPr lang="ru-RU" dirty="0"/>
+          </a:p>
+        </p:txBody>
+      </p:sp>
     </p:spTree>
     <p:extLst>
       <p:ext uri="{BB962C8B-B14F-4D97-AF65-F5344CB8AC3E}">
-        <p14:creationId xmlns:p14="http://schemas.microsoft.com/office/powerpoint/2010/main" val="92287534"/>
+        <p14:creationId xmlns:p14="http://schemas.microsoft.com/office/powerpoint/2010/main" val="3447203779"/>
       </p:ext>
     </p:extLst>
   </p:cSld>
@@ -4498,49 +4795,68 @@
       </p:grpSpPr>
       <p:sp>
         <p:nvSpPr>
-          <p:cNvPr id="4" name="Заголовок 1">
+          <p:cNvPr id="5" name="Заголовок 1">
             <a:extLst>
               <a:ext uri="{FF2B5EF4-FFF2-40B4-BE49-F238E27FC236}">
-                <a16:creationId xmlns:a16="http://schemas.microsoft.com/office/drawing/2014/main" id="{0D7D0BE2-2D2C-4923-8220-23B01E71F7BA}"/>
+                <a16:creationId xmlns:a16="http://schemas.microsoft.com/office/drawing/2014/main" id="{08AFB1E6-1180-47CF-AADB-5C4D9D1C94F6}"/>
               </a:ext>
             </a:extLst>
           </p:cNvPr>
-          <p:cNvSpPr>
-            <a:spLocks noGrp="1"/>
-          </p:cNvSpPr>
-          <p:nvPr>
-            <p:ph type="title"/>
-          </p:nvPr>
+          <p:cNvSpPr txBox="1">
+            <a:spLocks/>
+          </p:cNvSpPr>
+          <p:nvPr/>
         </p:nvSpPr>
         <p:spPr>
           <a:xfrm>
-            <a:off x="1981200" y="108642"/>
+            <a:off x="2077039" y="-4236"/>
             <a:ext cx="8229600" cy="1143000"/>
           </a:xfrm>
+          <a:prstGeom prst="rect">
+            <a:avLst/>
+          </a:prstGeom>
         </p:spPr>
         <p:txBody>
-          <a:bodyPr>
+          <a:bodyPr vert="horz" lIns="91440" tIns="45720" rIns="91440" bIns="45720" rtlCol="0" anchor="ctr">
             <a:normAutofit/>
           </a:bodyPr>
-          <a:lstStyle/>
+          <a:lstStyle>
+            <a:lvl1pPr algn="l" defTabSz="914400" rtl="0" eaLnBrk="1" latinLnBrk="0" hangingPunct="1">
+              <a:lnSpc>
+                <a:spcPct val="90000"/>
+              </a:lnSpc>
+              <a:spcBef>
+                <a:spcPct val="0"/>
+              </a:spcBef>
+              <a:buNone/>
+              <a:defRPr sz="4400" kern="1200">
+                <a:solidFill>
+                  <a:schemeClr val="tx1"/>
+                </a:solidFill>
+                <a:latin typeface="+mj-lt"/>
+                <a:ea typeface="+mj-ea"/>
+                <a:cs typeface="+mj-cs"/>
+              </a:defRPr>
+            </a:lvl1pPr>
+          </a:lstStyle>
           <a:p>
             <a:pPr algn="ctr"/>
             <a:r>
               <a:rPr lang="ru-RU" dirty="0">
-                <a:latin typeface="Times New Roman" pitchFamily="18" charset="0"/>
+                <a:latin typeface="Times New Roman" panose="02020603050405020304" pitchFamily="18" charset="0"/>
                 <a:cs typeface="Times New Roman" pitchFamily="18" charset="0"/>
               </a:rPr>
-              <a:t>Главная страница</a:t>
-            </a:r>
-          </a:p>
-        </p:txBody>
-      </p:sp>
-      <p:sp>
-        <p:nvSpPr>
-          <p:cNvPr id="2" name="Номер слайда 1">
+              <a:t>Архитектура приложения</a:t>
+            </a:r>
+          </a:p>
+        </p:txBody>
+      </p:sp>
+      <p:sp>
+        <p:nvSpPr>
+          <p:cNvPr id="11" name="Номер слайда 10">
             <a:extLst>
               <a:ext uri="{FF2B5EF4-FFF2-40B4-BE49-F238E27FC236}">
-                <a16:creationId xmlns:a16="http://schemas.microsoft.com/office/drawing/2014/main" id="{52418926-B1DE-4141-8419-4A21200C8990}"/>
+                <a16:creationId xmlns:a16="http://schemas.microsoft.com/office/drawing/2014/main" id="{FE060230-92E3-4D54-B637-036B28A13098}"/>
               </a:ext>
             </a:extLst>
           </p:cNvPr>
@@ -4562,17 +4878,51 @@
               <a:t>11</a:t>
             </a:fld>
             <a:r>
-              <a:rPr lang="ru-RU"/>
-              <a:t>/17</a:t>
+              <a:rPr lang="ru-RU" dirty="0"/>
+              <a:t>/1</a:t>
+            </a:r>
+            <a:r>
+              <a:rPr lang="en-US" dirty="0"/>
+              <a:t>6</a:t>
             </a:r>
             <a:endParaRPr lang="ru-RU" dirty="0"/>
           </a:p>
         </p:txBody>
       </p:sp>
+      <p:pic>
+        <p:nvPicPr>
+          <p:cNvPr id="8" name="Рисунок 7">
+            <a:extLst>
+              <a:ext uri="{FF2B5EF4-FFF2-40B4-BE49-F238E27FC236}">
+                <a16:creationId xmlns:a16="http://schemas.microsoft.com/office/drawing/2014/main" id="{15E89B89-BDF3-4650-BD38-5729A6BDDFC7}"/>
+              </a:ext>
+            </a:extLst>
+          </p:cNvPr>
+          <p:cNvPicPr>
+            <a:picLocks noChangeAspect="1"/>
+          </p:cNvPicPr>
+          <p:nvPr/>
+        </p:nvPicPr>
+        <p:blipFill>
+          <a:blip r:embed="rId2"/>
+          <a:stretch>
+            <a:fillRect/>
+          </a:stretch>
+        </p:blipFill>
+        <p:spPr>
+          <a:xfrm>
+            <a:off x="774260" y="1548821"/>
+            <a:ext cx="10487944" cy="4245693"/>
+          </a:xfrm>
+          <a:prstGeom prst="rect">
+            <a:avLst/>
+          </a:prstGeom>
+        </p:spPr>
+      </p:pic>
     </p:spTree>
     <p:extLst>
       <p:ext uri="{BB962C8B-B14F-4D97-AF65-F5344CB8AC3E}">
-        <p14:creationId xmlns:p14="http://schemas.microsoft.com/office/powerpoint/2010/main" val="3350237834"/>
+        <p14:creationId xmlns:p14="http://schemas.microsoft.com/office/powerpoint/2010/main" val="92287534"/>
       </p:ext>
     </p:extLst>
   </p:cSld>
@@ -4599,130 +4949,93 @@
           <a:chExt cx="0" cy="0"/>
         </a:xfrm>
       </p:grpSpPr>
-      <p:sp>
-        <p:nvSpPr>
-          <p:cNvPr id="4" name="Заголовок 1">
+      <p:pic>
+        <p:nvPicPr>
+          <p:cNvPr id="4" name="Рисунок 3">
             <a:extLst>
               <a:ext uri="{FF2B5EF4-FFF2-40B4-BE49-F238E27FC236}">
-                <a16:creationId xmlns:a16="http://schemas.microsoft.com/office/drawing/2014/main" id="{BAADC3CD-C73B-4F09-9A29-317A6DA0C7E5}"/>
+                <a16:creationId xmlns:a16="http://schemas.microsoft.com/office/drawing/2014/main" id="{919BF94C-5A51-4F18-BA92-F4FC9E6E4A0B}"/>
               </a:ext>
             </a:extLst>
           </p:cNvPr>
-          <p:cNvSpPr>
-            <a:spLocks noGrp="1"/>
-          </p:cNvSpPr>
-          <p:nvPr>
-            <p:ph type="title"/>
-          </p:nvPr>
-        </p:nvSpPr>
+          <p:cNvPicPr>
+            <a:picLocks noChangeAspect="1"/>
+          </p:cNvPicPr>
+          <p:nvPr/>
+        </p:nvPicPr>
+        <p:blipFill>
+          <a:blip r:embed="rId2"/>
+          <a:stretch>
+            <a:fillRect/>
+          </a:stretch>
+        </p:blipFill>
         <p:spPr>
           <a:xfrm>
-            <a:off x="2102462" y="692782"/>
-            <a:ext cx="8229600" cy="1143000"/>
-          </a:xfrm>
-        </p:spPr>
-        <p:txBody>
-          <a:bodyPr>
-            <a:normAutofit/>
-          </a:bodyPr>
-          <a:lstStyle/>
-          <a:p>
-            <a:pPr algn="ctr"/>
-            <a:r>
-              <a:rPr lang="ru-RU" dirty="0">
-                <a:latin typeface="Times New Roman" pitchFamily="18" charset="0"/>
-                <a:cs typeface="Times New Roman" pitchFamily="18" charset="0"/>
-              </a:rPr>
-              <a:t>Тестирование</a:t>
-            </a:r>
-          </a:p>
-        </p:txBody>
-      </p:sp>
-      <p:sp>
-        <p:nvSpPr>
-          <p:cNvPr id="5" name="TextBox 4">
-            <a:extLst>
-              <a:ext uri="{FF2B5EF4-FFF2-40B4-BE49-F238E27FC236}">
-                <a16:creationId xmlns:a16="http://schemas.microsoft.com/office/drawing/2014/main" id="{959DDE73-FC19-4850-A3D6-70FEF85A9B27}"/>
-              </a:ext>
-            </a:extLst>
-          </p:cNvPr>
-          <p:cNvSpPr txBox="1"/>
-          <p:nvPr/>
-        </p:nvSpPr>
-        <p:spPr>
-          <a:xfrm>
-            <a:off x="1365716" y="2775450"/>
-            <a:ext cx="10096107" cy="2246769"/>
+            <a:off x="2286000" y="567138"/>
+            <a:ext cx="8020639" cy="6454355"/>
           </a:xfrm>
           <a:prstGeom prst="rect">
             <a:avLst/>
           </a:prstGeom>
-          <a:noFill/>
         </p:spPr>
-        <p:txBody>
-          <a:bodyPr wrap="square" rtlCol="0">
-            <a:spAutoFit/>
+      </p:pic>
+      <p:sp>
+        <p:nvSpPr>
+          <p:cNvPr id="5" name="Заголовок 1">
+            <a:extLst>
+              <a:ext uri="{FF2B5EF4-FFF2-40B4-BE49-F238E27FC236}">
+                <a16:creationId xmlns:a16="http://schemas.microsoft.com/office/drawing/2014/main" id="{08AFB1E6-1180-47CF-AADB-5C4D9D1C94F6}"/>
+              </a:ext>
+            </a:extLst>
+          </p:cNvPr>
+          <p:cNvSpPr txBox="1">
+            <a:spLocks/>
+          </p:cNvSpPr>
+          <p:nvPr/>
+        </p:nvSpPr>
+        <p:spPr>
+          <a:xfrm>
+            <a:off x="2077039" y="-103626"/>
+            <a:ext cx="8229600" cy="1143000"/>
+          </a:xfrm>
+          <a:prstGeom prst="rect">
+            <a:avLst/>
+          </a:prstGeom>
+        </p:spPr>
+        <p:txBody>
+          <a:bodyPr vert="horz" lIns="91440" tIns="45720" rIns="91440" bIns="45720" rtlCol="0" anchor="ctr">
+            <a:normAutofit/>
           </a:bodyPr>
-          <a:lstStyle/>
-          <a:p>
-            <a:pPr marL="514350" indent="-514350">
-              <a:buFont typeface="+mj-lt"/>
-              <a:buAutoNum type="arabicPeriod"/>
-            </a:pPr>
-            <a:r>
-              <a:rPr lang="ru-RU" sz="2800" dirty="0">
-                <a:latin typeface="Times New Roman" pitchFamily="18" charset="0"/>
-                <a:cs typeface="Times New Roman" pitchFamily="18" charset="0"/>
+          <a:lstStyle>
+            <a:lvl1pPr algn="l" defTabSz="914400" rtl="0" eaLnBrk="1" latinLnBrk="0" hangingPunct="1">
+              <a:lnSpc>
+                <a:spcPct val="90000"/>
+              </a:lnSpc>
+              <a:spcBef>
+                <a:spcPct val="0"/>
+              </a:spcBef>
+              <a:buNone/>
+              <a:defRPr sz="4400" kern="1200">
+                <a:solidFill>
+                  <a:schemeClr val="tx1"/>
+                </a:solidFill>
+                <a:latin typeface="+mj-lt"/>
+                <a:ea typeface="+mj-ea"/>
+                <a:cs typeface="+mj-cs"/>
+              </a:defRPr>
+            </a:lvl1pPr>
+          </a:lstStyle>
+          <a:p>
+            <a:pPr algn="ctr"/>
+            <a:r>
+              <a:rPr lang="ru-RU" dirty="0">
+                <a:effectLst/>
+                <a:latin typeface="Times New Roman" panose="02020603050405020304" pitchFamily="18" charset="0"/>
+                <a:ea typeface="Times New Roman" panose="02020603050405020304" pitchFamily="18" charset="0"/>
               </a:rPr>
-              <a:t>Проверка загрузки модели</a:t>
-            </a:r>
-          </a:p>
-          <a:p>
-            <a:pPr marL="514350" indent="-514350">
-              <a:buFont typeface="+mj-lt"/>
-              <a:buAutoNum type="arabicPeriod"/>
-            </a:pPr>
-            <a:r>
-              <a:rPr lang="ru-RU" sz="2800" dirty="0">
-                <a:latin typeface="Times New Roman" pitchFamily="18" charset="0"/>
-                <a:cs typeface="Times New Roman" pitchFamily="18" charset="0"/>
-              </a:rPr>
-              <a:t>Проверка выпадающего меню</a:t>
-            </a:r>
-          </a:p>
-          <a:p>
-            <a:pPr marL="514350" indent="-514350">
-              <a:buFont typeface="+mj-lt"/>
-              <a:buAutoNum type="arabicPeriod"/>
-            </a:pPr>
-            <a:r>
-              <a:rPr lang="ru-RU" sz="2800" dirty="0">
-                <a:latin typeface="Times New Roman" pitchFamily="18" charset="0"/>
-                <a:cs typeface="Times New Roman" pitchFamily="18" charset="0"/>
-              </a:rPr>
-              <a:t>Проверка загрузки и обработки изображений</a:t>
-            </a:r>
-          </a:p>
-          <a:p>
-            <a:pPr marL="514350" indent="-514350">
-              <a:buFont typeface="+mj-lt"/>
-              <a:buAutoNum type="arabicPeriod"/>
-            </a:pPr>
-            <a:r>
-              <a:rPr lang="ru-RU" sz="2800" dirty="0">
-                <a:latin typeface="Times New Roman" pitchFamily="18" charset="0"/>
-                <a:cs typeface="Times New Roman" pitchFamily="18" charset="0"/>
-              </a:rPr>
-              <a:t>Проверка загрузки и обработки видео</a:t>
-            </a:r>
-          </a:p>
-          <a:p>
-            <a:pPr marL="457200" indent="-457200">
-              <a:buFont typeface="Arial" panose="020B0604020202020204" pitchFamily="34" charset="0"/>
-              <a:buChar char="•"/>
-            </a:pPr>
-            <a:endParaRPr lang="ru-RU" sz="2800" dirty="0">
+              <a:t>Обработка видео</a:t>
+            </a:r>
+            <a:endParaRPr lang="ru-RU" dirty="0">
               <a:latin typeface="Times New Roman" pitchFamily="18" charset="0"/>
               <a:cs typeface="Times New Roman" pitchFamily="18" charset="0"/>
             </a:endParaRPr>
@@ -4731,10 +5044,10 @@
       </p:sp>
       <p:sp>
         <p:nvSpPr>
-          <p:cNvPr id="2" name="Номер слайда 1">
+          <p:cNvPr id="11" name="Номер слайда 10">
             <a:extLst>
               <a:ext uri="{FF2B5EF4-FFF2-40B4-BE49-F238E27FC236}">
-                <a16:creationId xmlns:a16="http://schemas.microsoft.com/office/drawing/2014/main" id="{533C03AE-3550-4F10-A341-CFEEC4FBB7F5}"/>
+                <a16:creationId xmlns:a16="http://schemas.microsoft.com/office/drawing/2014/main" id="{FE060230-92E3-4D54-B637-036B28A13098}"/>
               </a:ext>
             </a:extLst>
           </p:cNvPr>
@@ -4756,8 +5069,12 @@
               <a:t>12</a:t>
             </a:fld>
             <a:r>
-              <a:rPr lang="ru-RU"/>
-              <a:t>/17</a:t>
+              <a:rPr lang="ru-RU" dirty="0"/>
+              <a:t>/1</a:t>
+            </a:r>
+            <a:r>
+              <a:rPr lang="en-US" dirty="0"/>
+              <a:t>6</a:t>
             </a:r>
             <a:endParaRPr lang="ru-RU" dirty="0"/>
           </a:p>
@@ -4766,7 +5083,7 @@
     </p:spTree>
     <p:extLst>
       <p:ext uri="{BB962C8B-B14F-4D97-AF65-F5344CB8AC3E}">
-        <p14:creationId xmlns:p14="http://schemas.microsoft.com/office/powerpoint/2010/main" val="4074368438"/>
+        <p14:creationId xmlns:p14="http://schemas.microsoft.com/office/powerpoint/2010/main" val="1820434540"/>
       </p:ext>
     </p:extLst>
   </p:cSld>
@@ -4795,6 +5112,656 @@
       </p:grpSpPr>
       <p:sp>
         <p:nvSpPr>
+          <p:cNvPr id="4" name="Заголовок 1">
+            <a:extLst>
+              <a:ext uri="{FF2B5EF4-FFF2-40B4-BE49-F238E27FC236}">
+                <a16:creationId xmlns:a16="http://schemas.microsoft.com/office/drawing/2014/main" id="{0D7D0BE2-2D2C-4923-8220-23B01E71F7BA}"/>
+              </a:ext>
+            </a:extLst>
+          </p:cNvPr>
+          <p:cNvSpPr>
+            <a:spLocks noGrp="1"/>
+          </p:cNvSpPr>
+          <p:nvPr>
+            <p:ph type="title"/>
+          </p:nvPr>
+        </p:nvSpPr>
+        <p:spPr>
+          <a:xfrm>
+            <a:off x="1981200" y="-169653"/>
+            <a:ext cx="8229600" cy="1143000"/>
+          </a:xfrm>
+        </p:spPr>
+        <p:txBody>
+          <a:bodyPr>
+            <a:normAutofit/>
+          </a:bodyPr>
+          <a:lstStyle/>
+          <a:p>
+            <a:pPr algn="ctr"/>
+            <a:r>
+              <a:rPr lang="ru-RU" dirty="0">
+                <a:latin typeface="Times New Roman" pitchFamily="18" charset="0"/>
+                <a:cs typeface="Times New Roman" pitchFamily="18" charset="0"/>
+              </a:rPr>
+              <a:t>Пользовательский интерфейс</a:t>
+            </a:r>
+          </a:p>
+        </p:txBody>
+      </p:sp>
+      <p:sp>
+        <p:nvSpPr>
+          <p:cNvPr id="2" name="Номер слайда 1">
+            <a:extLst>
+              <a:ext uri="{FF2B5EF4-FFF2-40B4-BE49-F238E27FC236}">
+                <a16:creationId xmlns:a16="http://schemas.microsoft.com/office/drawing/2014/main" id="{52418926-B1DE-4141-8419-4A21200C8990}"/>
+              </a:ext>
+            </a:extLst>
+          </p:cNvPr>
+          <p:cNvSpPr>
+            <a:spLocks noGrp="1"/>
+          </p:cNvSpPr>
+          <p:nvPr>
+            <p:ph type="sldNum" sz="quarter" idx="12"/>
+          </p:nvPr>
+        </p:nvSpPr>
+        <p:spPr/>
+        <p:txBody>
+          <a:bodyPr/>
+          <a:lstStyle/>
+          <a:p>
+            <a:fld id="{1FB77788-E5A7-4255-94F6-739BDA5FC0D4}" type="slidenum">
+              <a:rPr lang="ru-RU" smtClean="0"/>
+              <a:pPr/>
+              <a:t>13</a:t>
+            </a:fld>
+            <a:r>
+              <a:rPr lang="ru-RU" dirty="0"/>
+              <a:t>/1</a:t>
+            </a:r>
+            <a:r>
+              <a:rPr lang="en-US" dirty="0"/>
+              <a:t>6</a:t>
+            </a:r>
+            <a:endParaRPr lang="ru-RU" dirty="0"/>
+          </a:p>
+        </p:txBody>
+      </p:sp>
+      <p:pic>
+        <p:nvPicPr>
+          <p:cNvPr id="5" name="Рисунок 4">
+            <a:extLst>
+              <a:ext uri="{FF2B5EF4-FFF2-40B4-BE49-F238E27FC236}">
+                <a16:creationId xmlns:a16="http://schemas.microsoft.com/office/drawing/2014/main" id="{4E0DCC12-647A-4DB3-A1EA-ACB050D39393}"/>
+              </a:ext>
+            </a:extLst>
+          </p:cNvPr>
+          <p:cNvPicPr>
+            <a:picLocks noChangeAspect="1"/>
+          </p:cNvPicPr>
+          <p:nvPr/>
+        </p:nvPicPr>
+        <p:blipFill rotWithShape="1">
+          <a:blip r:embed="rId2"/>
+          <a:srcRect l="4040" r="2752"/>
+          <a:stretch/>
+        </p:blipFill>
+        <p:spPr>
+          <a:xfrm>
+            <a:off x="1530625" y="777815"/>
+            <a:ext cx="8945217" cy="5931099"/>
+          </a:xfrm>
+          <a:prstGeom prst="rect">
+            <a:avLst/>
+          </a:prstGeom>
+          <a:ln w="12700">
+            <a:solidFill>
+              <a:schemeClr val="tx1"/>
+            </a:solidFill>
+          </a:ln>
+        </p:spPr>
+      </p:pic>
+    </p:spTree>
+    <p:extLst>
+      <p:ext uri="{BB962C8B-B14F-4D97-AF65-F5344CB8AC3E}">
+        <p14:creationId xmlns:p14="http://schemas.microsoft.com/office/powerpoint/2010/main" val="3350237834"/>
+      </p:ext>
+    </p:extLst>
+  </p:cSld>
+  <p:clrMapOvr>
+    <a:masterClrMapping/>
+  </p:clrMapOvr>
+</p:sld>
+</file>
+
+<file path=ppt/slides/slide14.xml><?xml version="1.0" encoding="utf-8"?>
+<p:sld xmlns:a="http://schemas.openxmlformats.org/drawingml/2006/main" xmlns:r="http://schemas.openxmlformats.org/officeDocument/2006/relationships" xmlns:p="http://schemas.openxmlformats.org/presentationml/2006/main">
+  <p:cSld>
+    <p:spTree>
+      <p:nvGrpSpPr>
+        <p:cNvPr id="1" name=""/>
+        <p:cNvGrpSpPr/>
+        <p:nvPr/>
+      </p:nvGrpSpPr>
+      <p:grpSpPr>
+        <a:xfrm>
+          <a:off x="0" y="0"/>
+          <a:ext cx="0" cy="0"/>
+          <a:chOff x="0" y="0"/>
+          <a:chExt cx="0" cy="0"/>
+        </a:xfrm>
+      </p:grpSpPr>
+      <p:sp>
+        <p:nvSpPr>
+          <p:cNvPr id="4" name="Заголовок 1">
+            <a:extLst>
+              <a:ext uri="{FF2B5EF4-FFF2-40B4-BE49-F238E27FC236}">
+                <a16:creationId xmlns:a16="http://schemas.microsoft.com/office/drawing/2014/main" id="{BAADC3CD-C73B-4F09-9A29-317A6DA0C7E5}"/>
+              </a:ext>
+            </a:extLst>
+          </p:cNvPr>
+          <p:cNvSpPr>
+            <a:spLocks noGrp="1"/>
+          </p:cNvSpPr>
+          <p:nvPr>
+            <p:ph type="title"/>
+          </p:nvPr>
+        </p:nvSpPr>
+        <p:spPr>
+          <a:xfrm>
+            <a:off x="2102462" y="116308"/>
+            <a:ext cx="8229600" cy="1143000"/>
+          </a:xfrm>
+        </p:spPr>
+        <p:txBody>
+          <a:bodyPr>
+            <a:normAutofit/>
+          </a:bodyPr>
+          <a:lstStyle/>
+          <a:p>
+            <a:pPr algn="ctr"/>
+            <a:r>
+              <a:rPr lang="ru-RU" dirty="0">
+                <a:latin typeface="Times New Roman" pitchFamily="18" charset="0"/>
+                <a:cs typeface="Times New Roman" pitchFamily="18" charset="0"/>
+              </a:rPr>
+              <a:t>Средства разработки</a:t>
+            </a:r>
+          </a:p>
+        </p:txBody>
+      </p:sp>
+      <p:sp>
+        <p:nvSpPr>
+          <p:cNvPr id="2" name="Номер слайда 1">
+            <a:extLst>
+              <a:ext uri="{FF2B5EF4-FFF2-40B4-BE49-F238E27FC236}">
+                <a16:creationId xmlns:a16="http://schemas.microsoft.com/office/drawing/2014/main" id="{533C03AE-3550-4F10-A341-CFEEC4FBB7F5}"/>
+              </a:ext>
+            </a:extLst>
+          </p:cNvPr>
+          <p:cNvSpPr>
+            <a:spLocks noGrp="1"/>
+          </p:cNvSpPr>
+          <p:nvPr>
+            <p:ph type="sldNum" sz="quarter" idx="12"/>
+          </p:nvPr>
+        </p:nvSpPr>
+        <p:spPr/>
+        <p:txBody>
+          <a:bodyPr/>
+          <a:lstStyle/>
+          <a:p>
+            <a:fld id="{1FB77788-E5A7-4255-94F6-739BDA5FC0D4}" type="slidenum">
+              <a:rPr lang="ru-RU" smtClean="0"/>
+              <a:pPr/>
+              <a:t>14</a:t>
+            </a:fld>
+            <a:r>
+              <a:rPr lang="ru-RU" dirty="0"/>
+              <a:t>/1</a:t>
+            </a:r>
+            <a:r>
+              <a:rPr lang="en-US" dirty="0"/>
+              <a:t>6</a:t>
+            </a:r>
+            <a:endParaRPr lang="ru-RU" dirty="0"/>
+          </a:p>
+        </p:txBody>
+      </p:sp>
+      <p:sp>
+        <p:nvSpPr>
+          <p:cNvPr id="6" name="Объект 2">
+            <a:extLst>
+              <a:ext uri="{FF2B5EF4-FFF2-40B4-BE49-F238E27FC236}">
+                <a16:creationId xmlns:a16="http://schemas.microsoft.com/office/drawing/2014/main" id="{C624ED0A-1DC7-44DD-B0ED-2E0CB648160A}"/>
+              </a:ext>
+            </a:extLst>
+          </p:cNvPr>
+          <p:cNvSpPr>
+            <a:spLocks noGrp="1" noChangeArrowheads="1"/>
+          </p:cNvSpPr>
+          <p:nvPr>
+            <p:ph idx="1"/>
+          </p:nvPr>
+        </p:nvSpPr>
+        <p:spPr>
+          <a:xfrm>
+            <a:off x="688975" y="1716983"/>
+            <a:ext cx="10814050" cy="3074988"/>
+          </a:xfrm>
+        </p:spPr>
+        <p:txBody>
+          <a:bodyPr>
+            <a:noAutofit/>
+          </a:bodyPr>
+          <a:lstStyle/>
+          <a:p>
+            <a:pPr marL="514350" indent="-514350" eaLnBrk="1" hangingPunct="1">
+              <a:lnSpc>
+                <a:spcPct val="120000"/>
+              </a:lnSpc>
+              <a:spcBef>
+                <a:spcPts val="1200"/>
+              </a:spcBef>
+              <a:buFont typeface="+mj-lt"/>
+              <a:buAutoNum type="arabicPeriod"/>
+              <a:defRPr/>
+            </a:pPr>
+            <a:r>
+              <a:rPr lang="ru-RU" altLang="zh-CN" dirty="0">
+                <a:latin typeface="Times New Roman" panose="02020603050405020304" pitchFamily="18" charset="0"/>
+                <a:cs typeface="Times New Roman" panose="02020603050405020304" pitchFamily="18" charset="0"/>
+              </a:rPr>
+              <a:t>Язык программирования</a:t>
+            </a:r>
+            <a:r>
+              <a:rPr lang="en-US" altLang="ru-RU" dirty="0">
+                <a:latin typeface="Times New Roman" panose="02020603050405020304" pitchFamily="18" charset="0"/>
+                <a:cs typeface="Times New Roman" panose="02020603050405020304" pitchFamily="18" charset="0"/>
+              </a:rPr>
+              <a:t>: Python </a:t>
+            </a:r>
+            <a:endParaRPr lang="ru-RU" altLang="zh-CN" dirty="0">
+              <a:latin typeface="Times New Roman" panose="02020603050405020304" pitchFamily="18" charset="0"/>
+              <a:cs typeface="Times New Roman" panose="02020603050405020304" pitchFamily="18" charset="0"/>
+            </a:endParaRPr>
+          </a:p>
+          <a:p>
+            <a:pPr marL="514350" indent="-514350" eaLnBrk="1" hangingPunct="1">
+              <a:lnSpc>
+                <a:spcPct val="120000"/>
+              </a:lnSpc>
+              <a:spcBef>
+                <a:spcPts val="1200"/>
+              </a:spcBef>
+              <a:buFont typeface="+mj-lt"/>
+              <a:buAutoNum type="arabicPeriod"/>
+              <a:defRPr/>
+            </a:pPr>
+            <a:r>
+              <a:rPr lang="ru-RU" altLang="ru-RU" dirty="0">
+                <a:latin typeface="Times New Roman" panose="02020603050405020304" pitchFamily="18" charset="0"/>
+                <a:cs typeface="Times New Roman" panose="02020603050405020304" pitchFamily="18" charset="0"/>
+              </a:rPr>
+              <a:t>Среда выполнения кода </a:t>
+            </a:r>
+            <a:r>
+              <a:rPr lang="en-US" altLang="ru-RU" dirty="0">
+                <a:latin typeface="Times New Roman" panose="02020603050405020304" pitchFamily="18" charset="0"/>
+                <a:cs typeface="Times New Roman" panose="02020603050405020304" pitchFamily="18" charset="0"/>
+              </a:rPr>
+              <a:t>: Google </a:t>
+            </a:r>
+            <a:r>
+              <a:rPr lang="en-US" altLang="ru-RU" dirty="0" err="1">
+                <a:latin typeface="Times New Roman" panose="02020603050405020304" pitchFamily="18" charset="0"/>
+                <a:cs typeface="Times New Roman" panose="02020603050405020304" pitchFamily="18" charset="0"/>
+              </a:rPr>
+              <a:t>Colaboratory</a:t>
+            </a:r>
+            <a:endParaRPr lang="en-US" altLang="ru-RU" dirty="0">
+              <a:latin typeface="Times New Roman" panose="02020603050405020304" pitchFamily="18" charset="0"/>
+              <a:cs typeface="Times New Roman" panose="02020603050405020304" pitchFamily="18" charset="0"/>
+            </a:endParaRPr>
+          </a:p>
+          <a:p>
+            <a:pPr marL="514350" indent="-514350" eaLnBrk="1" hangingPunct="1">
+              <a:lnSpc>
+                <a:spcPct val="120000"/>
+              </a:lnSpc>
+              <a:spcBef>
+                <a:spcPts val="1200"/>
+              </a:spcBef>
+              <a:buFont typeface="+mj-lt"/>
+              <a:buAutoNum type="arabicPeriod"/>
+              <a:defRPr/>
+            </a:pPr>
+            <a:r>
+              <a:rPr lang="ru-RU" altLang="zh-CN" dirty="0">
+                <a:latin typeface="Times New Roman" panose="02020603050405020304" pitchFamily="18" charset="0"/>
+                <a:cs typeface="Times New Roman" panose="02020603050405020304" pitchFamily="18" charset="0"/>
+              </a:rPr>
+              <a:t>Библиотеки: </a:t>
+            </a:r>
+          </a:p>
+          <a:p>
+            <a:pPr indent="485775" eaLnBrk="1" hangingPunct="1">
+              <a:lnSpc>
+                <a:spcPct val="120000"/>
+              </a:lnSpc>
+              <a:spcBef>
+                <a:spcPts val="1200"/>
+              </a:spcBef>
+              <a:tabLst>
+                <a:tab pos="714375" algn="l"/>
+              </a:tabLst>
+              <a:defRPr/>
+            </a:pPr>
+            <a:r>
+              <a:rPr lang="en-US" altLang="ru-RU" dirty="0" err="1">
+                <a:latin typeface="Times New Roman" panose="02020603050405020304" pitchFamily="18" charset="0"/>
+                <a:cs typeface="Times New Roman" panose="02020603050405020304" pitchFamily="18" charset="0"/>
+              </a:rPr>
+              <a:t>ultralytics</a:t>
+            </a:r>
+            <a:r>
+              <a:rPr lang="en-US" altLang="ru-RU" dirty="0">
+                <a:latin typeface="Times New Roman" panose="02020603050405020304" pitchFamily="18" charset="0"/>
+                <a:cs typeface="Times New Roman" panose="02020603050405020304" pitchFamily="18" charset="0"/>
+              </a:rPr>
+              <a:t>, </a:t>
+            </a:r>
+            <a:endParaRPr lang="ru-RU" altLang="ru-RU" dirty="0">
+              <a:latin typeface="Times New Roman" panose="02020603050405020304" pitchFamily="18" charset="0"/>
+              <a:cs typeface="Times New Roman" panose="02020603050405020304" pitchFamily="18" charset="0"/>
+            </a:endParaRPr>
+          </a:p>
+          <a:p>
+            <a:pPr indent="485775" eaLnBrk="1" hangingPunct="1">
+              <a:lnSpc>
+                <a:spcPct val="120000"/>
+              </a:lnSpc>
+              <a:spcBef>
+                <a:spcPts val="1200"/>
+              </a:spcBef>
+              <a:defRPr/>
+            </a:pPr>
+            <a:r>
+              <a:rPr lang="en-US" altLang="ru-RU" dirty="0" err="1">
+                <a:latin typeface="Times New Roman" panose="02020603050405020304" pitchFamily="18" charset="0"/>
+                <a:cs typeface="Times New Roman" panose="02020603050405020304" pitchFamily="18" charset="0"/>
+              </a:rPr>
+              <a:t>gradio</a:t>
+            </a:r>
+            <a:r>
+              <a:rPr lang="en-US" altLang="ru-RU" dirty="0">
+                <a:latin typeface="Times New Roman" panose="02020603050405020304" pitchFamily="18" charset="0"/>
+                <a:cs typeface="Times New Roman" panose="02020603050405020304" pitchFamily="18" charset="0"/>
+              </a:rPr>
+              <a:t>, </a:t>
+            </a:r>
+            <a:endParaRPr lang="ru-RU" altLang="ru-RU" dirty="0">
+              <a:latin typeface="Times New Roman" panose="02020603050405020304" pitchFamily="18" charset="0"/>
+              <a:cs typeface="Times New Roman" panose="02020603050405020304" pitchFamily="18" charset="0"/>
+            </a:endParaRPr>
+          </a:p>
+          <a:p>
+            <a:pPr indent="485775" eaLnBrk="1" hangingPunct="1">
+              <a:lnSpc>
+                <a:spcPct val="120000"/>
+              </a:lnSpc>
+              <a:spcBef>
+                <a:spcPts val="1200"/>
+              </a:spcBef>
+              <a:defRPr/>
+            </a:pPr>
+            <a:r>
+              <a:rPr lang="en-US" altLang="ru-RU" dirty="0" err="1">
+                <a:latin typeface="Times New Roman" panose="02020603050405020304" pitchFamily="18" charset="0"/>
+                <a:cs typeface="Times New Roman" panose="02020603050405020304" pitchFamily="18" charset="0"/>
+              </a:rPr>
+              <a:t>opencv</a:t>
+            </a:r>
+            <a:r>
+              <a:rPr lang="en-US" altLang="ru-RU" dirty="0">
+                <a:latin typeface="Times New Roman" panose="02020603050405020304" pitchFamily="18" charset="0"/>
+                <a:cs typeface="Times New Roman" panose="02020603050405020304" pitchFamily="18" charset="0"/>
+              </a:rPr>
+              <a:t>.</a:t>
+            </a:r>
+          </a:p>
+        </p:txBody>
+      </p:sp>
+    </p:spTree>
+    <p:extLst>
+      <p:ext uri="{BB962C8B-B14F-4D97-AF65-F5344CB8AC3E}">
+        <p14:creationId xmlns:p14="http://schemas.microsoft.com/office/powerpoint/2010/main" val="4074368438"/>
+      </p:ext>
+    </p:extLst>
+  </p:cSld>
+  <p:clrMapOvr>
+    <a:masterClrMapping/>
+  </p:clrMapOvr>
+</p:sld>
+</file>
+
+<file path=ppt/slides/slide15.xml><?xml version="1.0" encoding="utf-8"?>
+<p:sld xmlns:a="http://schemas.openxmlformats.org/drawingml/2006/main" xmlns:r="http://schemas.openxmlformats.org/officeDocument/2006/relationships" xmlns:p="http://schemas.openxmlformats.org/presentationml/2006/main">
+  <p:cSld>
+    <p:spTree>
+      <p:nvGrpSpPr>
+        <p:cNvPr id="1" name=""/>
+        <p:cNvGrpSpPr/>
+        <p:nvPr/>
+      </p:nvGrpSpPr>
+      <p:grpSpPr>
+        <a:xfrm>
+          <a:off x="0" y="0"/>
+          <a:ext cx="0" cy="0"/>
+          <a:chOff x="0" y="0"/>
+          <a:chExt cx="0" cy="0"/>
+        </a:xfrm>
+      </p:grpSpPr>
+      <p:sp>
+        <p:nvSpPr>
+          <p:cNvPr id="4" name="Заголовок 1">
+            <a:extLst>
+              <a:ext uri="{FF2B5EF4-FFF2-40B4-BE49-F238E27FC236}">
+                <a16:creationId xmlns:a16="http://schemas.microsoft.com/office/drawing/2014/main" id="{BAADC3CD-C73B-4F09-9A29-317A6DA0C7E5}"/>
+              </a:ext>
+            </a:extLst>
+          </p:cNvPr>
+          <p:cNvSpPr>
+            <a:spLocks noGrp="1"/>
+          </p:cNvSpPr>
+          <p:nvPr>
+            <p:ph type="title"/>
+          </p:nvPr>
+        </p:nvSpPr>
+        <p:spPr>
+          <a:xfrm>
+            <a:off x="2102462" y="692782"/>
+            <a:ext cx="8229600" cy="1143000"/>
+          </a:xfrm>
+        </p:spPr>
+        <p:txBody>
+          <a:bodyPr>
+            <a:normAutofit/>
+          </a:bodyPr>
+          <a:lstStyle/>
+          <a:p>
+            <a:pPr algn="ctr"/>
+            <a:r>
+              <a:rPr lang="ru-RU" dirty="0">
+                <a:latin typeface="Times New Roman" pitchFamily="18" charset="0"/>
+                <a:cs typeface="Times New Roman" pitchFamily="18" charset="0"/>
+              </a:rPr>
+              <a:t>Тестирование</a:t>
+            </a:r>
+          </a:p>
+        </p:txBody>
+      </p:sp>
+      <p:sp>
+        <p:nvSpPr>
+          <p:cNvPr id="5" name="TextBox 4">
+            <a:extLst>
+              <a:ext uri="{FF2B5EF4-FFF2-40B4-BE49-F238E27FC236}">
+                <a16:creationId xmlns:a16="http://schemas.microsoft.com/office/drawing/2014/main" id="{959DDE73-FC19-4850-A3D6-70FEF85A9B27}"/>
+              </a:ext>
+            </a:extLst>
+          </p:cNvPr>
+          <p:cNvSpPr txBox="1"/>
+          <p:nvPr/>
+        </p:nvSpPr>
+        <p:spPr>
+          <a:xfrm>
+            <a:off x="1733464" y="2179103"/>
+            <a:ext cx="10096107" cy="2246769"/>
+          </a:xfrm>
+          <a:prstGeom prst="rect">
+            <a:avLst/>
+          </a:prstGeom>
+          <a:noFill/>
+        </p:spPr>
+        <p:txBody>
+          <a:bodyPr wrap="square" rtlCol="0">
+            <a:spAutoFit/>
+          </a:bodyPr>
+          <a:lstStyle/>
+          <a:p>
+            <a:pPr marL="514350" indent="-514350">
+              <a:buFont typeface="+mj-lt"/>
+              <a:buAutoNum type="arabicPeriod"/>
+            </a:pPr>
+            <a:r>
+              <a:rPr lang="ru-RU" sz="2800" dirty="0">
+                <a:latin typeface="Times New Roman" pitchFamily="18" charset="0"/>
+                <a:cs typeface="Times New Roman" pitchFamily="18" charset="0"/>
+              </a:rPr>
+              <a:t>Проверка загрузки модели</a:t>
+            </a:r>
+          </a:p>
+          <a:p>
+            <a:pPr marL="514350" indent="-514350">
+              <a:buFont typeface="+mj-lt"/>
+              <a:buAutoNum type="arabicPeriod"/>
+            </a:pPr>
+            <a:r>
+              <a:rPr lang="ru-RU" sz="2800" dirty="0">
+                <a:latin typeface="Times New Roman" pitchFamily="18" charset="0"/>
+                <a:cs typeface="Times New Roman" pitchFamily="18" charset="0"/>
+              </a:rPr>
+              <a:t>Проверка выпадающего меню</a:t>
+            </a:r>
+          </a:p>
+          <a:p>
+            <a:pPr marL="514350" indent="-514350">
+              <a:buFont typeface="+mj-lt"/>
+              <a:buAutoNum type="arabicPeriod"/>
+            </a:pPr>
+            <a:r>
+              <a:rPr lang="ru-RU" sz="2800" dirty="0">
+                <a:latin typeface="Times New Roman" pitchFamily="18" charset="0"/>
+                <a:cs typeface="Times New Roman" pitchFamily="18" charset="0"/>
+              </a:rPr>
+              <a:t>Проверка загрузки и обработки изображений</a:t>
+            </a:r>
+          </a:p>
+          <a:p>
+            <a:pPr marL="514350" indent="-514350">
+              <a:buFont typeface="+mj-lt"/>
+              <a:buAutoNum type="arabicPeriod"/>
+            </a:pPr>
+            <a:r>
+              <a:rPr lang="ru-RU" sz="2800" dirty="0">
+                <a:latin typeface="Times New Roman" pitchFamily="18" charset="0"/>
+                <a:cs typeface="Times New Roman" pitchFamily="18" charset="0"/>
+              </a:rPr>
+              <a:t>Проверка загрузки и обработки видео</a:t>
+            </a:r>
+          </a:p>
+          <a:p>
+            <a:pPr marL="457200" indent="-457200">
+              <a:buFont typeface="Arial" panose="020B0604020202020204" pitchFamily="34" charset="0"/>
+              <a:buChar char="•"/>
+            </a:pPr>
+            <a:endParaRPr lang="ru-RU" sz="2800" dirty="0">
+              <a:latin typeface="Times New Roman" pitchFamily="18" charset="0"/>
+              <a:cs typeface="Times New Roman" pitchFamily="18" charset="0"/>
+            </a:endParaRPr>
+          </a:p>
+        </p:txBody>
+      </p:sp>
+      <p:sp>
+        <p:nvSpPr>
+          <p:cNvPr id="2" name="Номер слайда 1">
+            <a:extLst>
+              <a:ext uri="{FF2B5EF4-FFF2-40B4-BE49-F238E27FC236}">
+                <a16:creationId xmlns:a16="http://schemas.microsoft.com/office/drawing/2014/main" id="{533C03AE-3550-4F10-A341-CFEEC4FBB7F5}"/>
+              </a:ext>
+            </a:extLst>
+          </p:cNvPr>
+          <p:cNvSpPr>
+            <a:spLocks noGrp="1"/>
+          </p:cNvSpPr>
+          <p:nvPr>
+            <p:ph type="sldNum" sz="quarter" idx="12"/>
+          </p:nvPr>
+        </p:nvSpPr>
+        <p:spPr/>
+        <p:txBody>
+          <a:bodyPr/>
+          <a:lstStyle/>
+          <a:p>
+            <a:fld id="{1FB77788-E5A7-4255-94F6-739BDA5FC0D4}" type="slidenum">
+              <a:rPr lang="ru-RU" smtClean="0"/>
+              <a:pPr/>
+              <a:t>15</a:t>
+            </a:fld>
+            <a:r>
+              <a:rPr lang="ru-RU" dirty="0"/>
+              <a:t>/1</a:t>
+            </a:r>
+            <a:r>
+              <a:rPr lang="en-US" dirty="0"/>
+              <a:t>6</a:t>
+            </a:r>
+            <a:endParaRPr lang="ru-RU" dirty="0"/>
+          </a:p>
+        </p:txBody>
+      </p:sp>
+    </p:spTree>
+    <p:extLst>
+      <p:ext uri="{BB962C8B-B14F-4D97-AF65-F5344CB8AC3E}">
+        <p14:creationId xmlns:p14="http://schemas.microsoft.com/office/powerpoint/2010/main" val="2638992184"/>
+      </p:ext>
+    </p:extLst>
+  </p:cSld>
+  <p:clrMapOvr>
+    <a:masterClrMapping/>
+  </p:clrMapOvr>
+</p:sld>
+</file>
+
+<file path=ppt/slides/slide16.xml><?xml version="1.0" encoding="utf-8"?>
+<p:sld xmlns:a="http://schemas.openxmlformats.org/drawingml/2006/main" xmlns:r="http://schemas.openxmlformats.org/officeDocument/2006/relationships" xmlns:p="http://schemas.openxmlformats.org/presentationml/2006/main">
+  <p:cSld>
+    <p:spTree>
+      <p:nvGrpSpPr>
+        <p:cNvPr id="1" name=""/>
+        <p:cNvGrpSpPr/>
+        <p:nvPr/>
+      </p:nvGrpSpPr>
+      <p:grpSpPr>
+        <a:xfrm>
+          <a:off x="0" y="0"/>
+          <a:ext cx="0" cy="0"/>
+          <a:chOff x="0" y="0"/>
+          <a:chExt cx="0" cy="0"/>
+        </a:xfrm>
+      </p:grpSpPr>
+      <p:sp>
+        <p:nvSpPr>
           <p:cNvPr id="8" name="Заголовок 1">
             <a:extLst>
               <a:ext uri="{FF2B5EF4-FFF2-40B4-BE49-F238E27FC236}">
@@ -4865,7 +5832,21 @@
                 <a:latin typeface="Times New Roman" pitchFamily="18" charset="0"/>
                 <a:cs typeface="Times New Roman" pitchFamily="18" charset="0"/>
               </a:rPr>
-              <a:t>В рамках данной работы были обучены нейросетевые модели для детекции дорожных объектов. Также было разработано веб-приложение для работы с обученной моделью. </a:t>
+              <a:t>В рамках данной работы была обучена </a:t>
+            </a:r>
+            <a:r>
+              <a:rPr lang="ru-RU" sz="2800" dirty="0" err="1">
+                <a:latin typeface="Times New Roman" pitchFamily="18" charset="0"/>
+                <a:cs typeface="Times New Roman" pitchFamily="18" charset="0"/>
+              </a:rPr>
+              <a:t>нейросетевая</a:t>
+            </a:r>
+            <a:r>
+              <a:rPr lang="ru-RU" sz="2800" dirty="0">
+                <a:latin typeface="Times New Roman" pitchFamily="18" charset="0"/>
+                <a:cs typeface="Times New Roman" pitchFamily="18" charset="0"/>
+              </a:rPr>
+              <a:t> модель для детекции дорожных объектов. Также было разработано веб-приложение для работы с обученной моделью. </a:t>
             </a:r>
           </a:p>
           <a:p>
@@ -4993,11 +5974,15 @@
             <a:fld id="{1FB77788-E5A7-4255-94F6-739BDA5FC0D4}" type="slidenum">
               <a:rPr lang="ru-RU" smtClean="0"/>
               <a:pPr/>
-              <a:t>13</a:t>
+              <a:t>16</a:t>
             </a:fld>
             <a:r>
-              <a:rPr lang="ru-RU"/>
-              <a:t>/17</a:t>
+              <a:rPr lang="ru-RU" dirty="0"/>
+              <a:t>/1</a:t>
+            </a:r>
+            <a:r>
+              <a:rPr lang="en-US" dirty="0"/>
+              <a:t>6</a:t>
             </a:r>
             <a:endParaRPr lang="ru-RU" dirty="0"/>
           </a:p>
@@ -5051,7 +6036,7 @@
         </p:nvSpPr>
         <p:spPr>
           <a:xfrm>
-            <a:off x="0" y="136524"/>
+            <a:off x="0" y="235914"/>
             <a:ext cx="12192000" cy="1143000"/>
           </a:xfrm>
         </p:spPr>
@@ -5086,8 +6071,8 @@
         </p:nvSpPr>
         <p:spPr>
           <a:xfrm>
-            <a:off x="1055801" y="1772816"/>
-            <a:ext cx="10077255" cy="2219838"/>
+            <a:off x="1276545" y="2565302"/>
+            <a:ext cx="10077255" cy="1569660"/>
           </a:xfrm>
           <a:prstGeom prst="rect">
             <a:avLst/>
@@ -5100,44 +6085,39 @@
           </a:bodyPr>
           <a:lstStyle/>
           <a:p>
-            <a:pPr>
-              <a:lnSpc>
-                <a:spcPct val="150000"/>
-              </a:lnSpc>
+            <a:pPr marL="514350" indent="-514350">
+              <a:buAutoNum type="arabicPeriod"/>
             </a:pPr>
             <a:r>
               <a:rPr lang="ru-RU" sz="3200" dirty="0">
                 <a:latin typeface="Times New Roman" pitchFamily="18" charset="0"/>
                 <a:cs typeface="Times New Roman" pitchFamily="18" charset="0"/>
               </a:rPr>
-              <a:t>1. Машинное обучение и искусственный интеллект</a:t>
-            </a:r>
-            <a:br>
+              <a:t>Машинное обучение и искусственный интеллект</a:t>
+            </a:r>
+          </a:p>
+          <a:p>
+            <a:pPr marL="514350" indent="-514350">
+              <a:buAutoNum type="arabicPeriod"/>
+            </a:pPr>
+            <a:r>
               <a:rPr lang="ru-RU" sz="3200" dirty="0">
                 <a:latin typeface="Times New Roman" pitchFamily="18" charset="0"/>
                 <a:cs typeface="Times New Roman" pitchFamily="18" charset="0"/>
               </a:rPr>
-            </a:br>
+              <a:t>Задачи компьютерного зрения</a:t>
+            </a:r>
+          </a:p>
+          <a:p>
+            <a:pPr marL="514350" indent="-514350">
+              <a:buAutoNum type="arabicPeriod"/>
+            </a:pPr>
             <a:r>
               <a:rPr lang="ru-RU" sz="3200" dirty="0">
                 <a:latin typeface="Times New Roman" pitchFamily="18" charset="0"/>
                 <a:cs typeface="Times New Roman" pitchFamily="18" charset="0"/>
               </a:rPr>
-              <a:t>2. Безопасность дорожного движения</a:t>
-            </a:r>
-          </a:p>
-          <a:p>
-            <a:pPr>
-              <a:lnSpc>
-                <a:spcPct val="150000"/>
-              </a:lnSpc>
-            </a:pPr>
-            <a:r>
-              <a:rPr lang="ru-RU" sz="3200" dirty="0">
-                <a:latin typeface="Times New Roman" pitchFamily="18" charset="0"/>
-                <a:cs typeface="Times New Roman" pitchFamily="18" charset="0"/>
-              </a:rPr>
-              <a:t>3. </a:t>
+              <a:t>Безопасность дорожного движения</a:t>
             </a:r>
           </a:p>
         </p:txBody>
@@ -5169,8 +6149,12 @@
               <a:t>2</a:t>
             </a:fld>
             <a:r>
-              <a:rPr lang="ru-RU"/>
-              <a:t>/17</a:t>
+              <a:rPr lang="ru-RU" dirty="0"/>
+              <a:t>/1</a:t>
+            </a:r>
+            <a:r>
+              <a:rPr lang="en-US" dirty="0"/>
+              <a:t>6</a:t>
             </a:r>
             <a:endParaRPr lang="ru-RU" dirty="0"/>
           </a:p>
@@ -5402,8 +6386,12 @@
               <a:t>3</a:t>
             </a:fld>
             <a:r>
-              <a:rPr lang="ru-RU"/>
-              <a:t>/17</a:t>
+              <a:rPr lang="ru-RU" dirty="0"/>
+              <a:t>/1</a:t>
+            </a:r>
+            <a:r>
+              <a:rPr lang="en-US" dirty="0"/>
+              <a:t>6</a:t>
             </a:r>
             <a:endParaRPr lang="ru-RU" dirty="0"/>
           </a:p>
@@ -5505,8 +6493,12 @@
               <a:t>4</a:t>
             </a:fld>
             <a:r>
-              <a:rPr lang="ru-RU"/>
-              <a:t>/17</a:t>
+              <a:rPr lang="ru-RU" dirty="0"/>
+              <a:t>/1</a:t>
+            </a:r>
+            <a:r>
+              <a:rPr lang="en-US" dirty="0"/>
+              <a:t>6</a:t>
             </a:r>
             <a:endParaRPr lang="ru-RU" dirty="0"/>
           </a:p>
@@ -5643,8 +6635,12 @@
               <a:t>5</a:t>
             </a:fld>
             <a:r>
-              <a:rPr lang="ru-RU"/>
-              <a:t>/17</a:t>
+              <a:rPr lang="ru-RU" dirty="0"/>
+              <a:t>/1</a:t>
+            </a:r>
+            <a:r>
+              <a:rPr lang="en-US" dirty="0"/>
+              <a:t>6</a:t>
             </a:r>
             <a:endParaRPr lang="ru-RU" dirty="0"/>
           </a:p>
@@ -5728,7 +6724,7 @@
         </p:nvSpPr>
         <p:spPr>
           <a:xfrm>
-            <a:off x="1981200" y="0"/>
+            <a:off x="1981200" y="178907"/>
             <a:ext cx="8229600" cy="1143000"/>
           </a:xfrm>
         </p:spPr>
@@ -5763,8 +6759,8 @@
         </p:nvSpPr>
         <p:spPr>
           <a:xfrm>
-            <a:off x="1065229" y="1143000"/>
-            <a:ext cx="10086680" cy="4832092"/>
+            <a:off x="1052660" y="1874728"/>
+            <a:ext cx="10086680" cy="3170099"/>
           </a:xfrm>
           <a:prstGeom prst="rect">
             <a:avLst/>
@@ -5792,39 +6788,42 @@
             </a:endParaRPr>
           </a:p>
           <a:p>
+            <a:pPr marL="457200" indent="-457200">
+              <a:buFont typeface="Arial" panose="020B0604020202020204" pitchFamily="34" charset="0"/>
+              <a:buChar char="•"/>
+            </a:pPr>
             <a:r>
               <a:rPr lang="ru-RU" sz="2800" dirty="0">
                 <a:latin typeface="Times New Roman" pitchFamily="18" charset="0"/>
                 <a:cs typeface="Times New Roman" pitchFamily="18" charset="0"/>
               </a:rPr>
-              <a:t>•	Предоставлять возможность авторизации на сервисе</a:t>
-            </a:r>
-          </a:p>
-          <a:p>
+              <a:t>Распознание, локализация и классификация основных дорожных объектов</a:t>
+            </a:r>
+          </a:p>
+          <a:p>
+            <a:pPr marL="457200" indent="-457200">
+              <a:buFont typeface="Arial" panose="020B0604020202020204" pitchFamily="34" charset="0"/>
+              <a:buChar char="•"/>
+            </a:pPr>
             <a:r>
               <a:rPr lang="ru-RU" sz="2800" dirty="0">
                 <a:latin typeface="Times New Roman" pitchFamily="18" charset="0"/>
                 <a:cs typeface="Times New Roman" pitchFamily="18" charset="0"/>
               </a:rPr>
-              <a:t>•	Предоставлять возможность проведения прямых трансляций на сервисе</a:t>
-            </a:r>
-          </a:p>
-          <a:p>
+              <a:t>Обработка изображений</a:t>
+            </a:r>
+          </a:p>
+          <a:p>
+            <a:pPr marL="457200" indent="-457200">
+              <a:buFont typeface="Arial" panose="020B0604020202020204" pitchFamily="34" charset="0"/>
+              <a:buChar char="•"/>
+            </a:pPr>
             <a:r>
               <a:rPr lang="ru-RU" sz="2800" dirty="0">
                 <a:latin typeface="Times New Roman" pitchFamily="18" charset="0"/>
                 <a:cs typeface="Times New Roman" pitchFamily="18" charset="0"/>
               </a:rPr>
-              <a:t>•	Предоставлять возможность поиска пользователей и трансляций</a:t>
-            </a:r>
-          </a:p>
-          <a:p>
-            <a:r>
-              <a:rPr lang="ru-RU" sz="2800" dirty="0">
-                <a:latin typeface="Times New Roman" pitchFamily="18" charset="0"/>
-                <a:cs typeface="Times New Roman" pitchFamily="18" charset="0"/>
-              </a:rPr>
-              <a:t>•	Предоставлять возможность переписки в общем чате трансляции</a:t>
+              <a:t>Обработка видео</a:t>
             </a:r>
           </a:p>
           <a:p>
@@ -5832,13 +6831,10 @@
               <a:buFont typeface="Arial" panose="020B0604020202020204" pitchFamily="34" charset="0"/>
               <a:buChar char="•"/>
             </a:pPr>
-            <a:r>
-              <a:rPr lang="ru-RU" sz="2800" dirty="0">
-                <a:latin typeface="Times New Roman" pitchFamily="18" charset="0"/>
-                <a:cs typeface="Times New Roman" pitchFamily="18" charset="0"/>
-              </a:rPr>
-              <a:t>Предоставлять возможность отслеживать интересуемые каналы</a:t>
-            </a:r>
+            <a:endParaRPr lang="ru-RU" sz="2800" dirty="0">
+              <a:latin typeface="Times New Roman" pitchFamily="18" charset="0"/>
+              <a:cs typeface="Times New Roman" pitchFamily="18" charset="0"/>
+            </a:endParaRPr>
           </a:p>
         </p:txBody>
       </p:sp>
@@ -5869,8 +6865,12 @@
               <a:t>6</a:t>
             </a:fld>
             <a:r>
-              <a:rPr lang="ru-RU"/>
-              <a:t>/17</a:t>
+              <a:rPr lang="ru-RU" dirty="0"/>
+              <a:t>/1</a:t>
+            </a:r>
+            <a:r>
+              <a:rPr lang="en-US" dirty="0"/>
+              <a:t>6</a:t>
             </a:r>
             <a:endParaRPr lang="ru-RU" dirty="0"/>
           </a:p>
@@ -5906,12 +6906,57 @@
           <a:chExt cx="0" cy="0"/>
         </a:xfrm>
       </p:grpSpPr>
+      <p:pic>
+        <p:nvPicPr>
+          <p:cNvPr id="3074" name="Picture 2">
+            <a:extLst>
+              <a:ext uri="{FF2B5EF4-FFF2-40B4-BE49-F238E27FC236}">
+                <a16:creationId xmlns:a16="http://schemas.microsoft.com/office/drawing/2014/main" id="{BCCF69F7-4AAE-4017-8EDD-7675F1FAD0D3}"/>
+              </a:ext>
+            </a:extLst>
+          </p:cNvPr>
+          <p:cNvPicPr>
+            <a:picLocks noChangeAspect="1" noChangeArrowheads="1"/>
+          </p:cNvPicPr>
+          <p:nvPr/>
+        </p:nvPicPr>
+        <p:blipFill rotWithShape="1">
+          <a:blip r:embed="rId3">
+            <a:extLst>
+              <a:ext uri="{28A0092B-C50C-407E-A947-70E740481C1C}">
+                <a14:useLocalDpi xmlns:a14="http://schemas.microsoft.com/office/drawing/2010/main" val="0"/>
+              </a:ext>
+            </a:extLst>
+          </a:blip>
+          <a:srcRect t="4306"/>
+          <a:stretch/>
+        </p:blipFill>
+        <p:spPr bwMode="auto">
+          <a:xfrm>
+            <a:off x="1825486" y="2604052"/>
+            <a:ext cx="8206965" cy="4075041"/>
+          </a:xfrm>
+          <a:prstGeom prst="rect">
+            <a:avLst/>
+          </a:prstGeom>
+          <a:noFill/>
+          <a:extLst>
+            <a:ext uri="{909E8E84-426E-40DD-AFC4-6F175D3DCCD1}">
+              <a14:hiddenFill xmlns:a14="http://schemas.microsoft.com/office/drawing/2010/main">
+                <a:solidFill>
+                  <a:srgbClr val="FFFFFF"/>
+                </a:solidFill>
+              </a14:hiddenFill>
+            </a:ext>
+          </a:extLst>
+        </p:spPr>
+      </p:pic>
       <p:sp>
         <p:nvSpPr>
           <p:cNvPr id="4" name="Заголовок 1">
             <a:extLst>
               <a:ext uri="{FF2B5EF4-FFF2-40B4-BE49-F238E27FC236}">
-                <a16:creationId xmlns:a16="http://schemas.microsoft.com/office/drawing/2014/main" id="{0D7D0BE2-2D2C-4923-8220-23B01E71F7BA}"/>
+                <a16:creationId xmlns:a16="http://schemas.microsoft.com/office/drawing/2014/main" id="{992DA992-E9BF-44DD-ADFE-6494425A5C7F}"/>
               </a:ext>
             </a:extLst>
           </p:cNvPr>
@@ -5924,7 +6969,7 @@
         </p:nvSpPr>
         <p:spPr>
           <a:xfrm>
-            <a:off x="1981200" y="217978"/>
+            <a:off x="1981200" y="178907"/>
             <a:ext cx="8229600" cy="1143000"/>
           </a:xfrm>
         </p:spPr>
@@ -5940,7 +6985,7 @@
                 <a:latin typeface="Times New Roman" pitchFamily="18" charset="0"/>
                 <a:cs typeface="Times New Roman" pitchFamily="18" charset="0"/>
               </a:rPr>
-              <a:t>Средства реализации</a:t>
+              <a:t>Формирование набора данных</a:t>
             </a:r>
           </a:p>
         </p:txBody>
@@ -5950,7 +6995,7 @@
           <p:cNvPr id="5" name="TextBox 4">
             <a:extLst>
               <a:ext uri="{FF2B5EF4-FFF2-40B4-BE49-F238E27FC236}">
-                <a16:creationId xmlns:a16="http://schemas.microsoft.com/office/drawing/2014/main" id="{C5EBCF29-450A-4288-AA41-620B0209AB78}"/>
+                <a16:creationId xmlns:a16="http://schemas.microsoft.com/office/drawing/2014/main" id="{5CBC2BCD-3952-440C-A474-C348A7A66774}"/>
               </a:ext>
             </a:extLst>
           </p:cNvPr>
@@ -5959,8 +7004,8 @@
         </p:nvSpPr>
         <p:spPr>
           <a:xfrm>
-            <a:off x="1065229" y="1772816"/>
-            <a:ext cx="10077253" cy="2219838"/>
+            <a:off x="1430347" y="1321907"/>
+            <a:ext cx="10086680" cy="1600438"/>
           </a:xfrm>
           <a:prstGeom prst="rect">
             <a:avLst/>
@@ -5981,63 +7026,57 @@
               <a:buChar char="•"/>
             </a:pPr>
             <a:r>
-              <a:rPr lang="en-US" sz="3200" dirty="0" err="1">
+              <a:rPr lang="en-US" sz="2800" dirty="0">
                 <a:latin typeface="Times New Roman" pitchFamily="18" charset="0"/>
                 <a:cs typeface="Times New Roman" pitchFamily="18" charset="0"/>
               </a:rPr>
-              <a:t>Ultralytics</a:t>
-            </a:r>
-            <a:r>
-              <a:rPr lang="en-US" sz="3200" dirty="0">
-                <a:latin typeface="Times New Roman" pitchFamily="18" charset="0"/>
-                <a:cs typeface="Times New Roman" pitchFamily="18" charset="0"/>
-              </a:rPr>
-              <a:t> YOLO</a:t>
-            </a:r>
-            <a:endParaRPr lang="ru-RU" sz="3200" dirty="0">
+              <a:t>Road DETECTION - IMGs &amp; Labels</a:t>
+            </a:r>
+            <a:endParaRPr lang="ru-RU" sz="2800" dirty="0">
               <a:latin typeface="Times New Roman" pitchFamily="18" charset="0"/>
               <a:cs typeface="Times New Roman" pitchFamily="18" charset="0"/>
             </a:endParaRPr>
           </a:p>
           <a:p>
             <a:pPr marL="457200" indent="-457200">
-              <a:lnSpc>
-                <a:spcPct val="150000"/>
-              </a:lnSpc>
               <a:buFont typeface="Arial" panose="020B0604020202020204" pitchFamily="34" charset="0"/>
               <a:buChar char="•"/>
             </a:pPr>
             <a:r>
-              <a:rPr lang="ru-RU" sz="3200" dirty="0">
-                <a:latin typeface="Times New Roman" pitchFamily="18" charset="0"/>
-                <a:cs typeface="Times New Roman" pitchFamily="18" charset="0"/>
+              <a:rPr lang="ru-RU" sz="2800" dirty="0">
+                <a:effectLst/>
+                <a:latin typeface="Times New Roman" panose="02020603050405020304" pitchFamily="18" charset="0"/>
+                <a:ea typeface="Times New Roman" panose="02020603050405020304" pitchFamily="18" charset="0"/>
               </a:rPr>
-              <a:t>Серверная часть: </a:t>
-            </a:r>
-            <a:r>
-              <a:rPr lang="en-US" sz="3200" dirty="0">
-                <a:latin typeface="Times New Roman" pitchFamily="18" charset="0"/>
-                <a:cs typeface="Times New Roman" pitchFamily="18" charset="0"/>
+              <a:t>Computer Vision </a:t>
+            </a:r>
+            <a:r>
+              <a:rPr lang="ru-RU" sz="2800" dirty="0" err="1">
+                <a:effectLst/>
+                <a:latin typeface="Times New Roman" panose="02020603050405020304" pitchFamily="18" charset="0"/>
+                <a:ea typeface="Times New Roman" panose="02020603050405020304" pitchFamily="18" charset="0"/>
               </a:rPr>
-              <a:t>Python</a:t>
-            </a:r>
+              <a:t>Annotation</a:t>
+            </a:r>
+            <a:r>
+              <a:rPr lang="ru-RU" sz="2800" dirty="0">
+                <a:effectLst/>
+                <a:latin typeface="Times New Roman" panose="02020603050405020304" pitchFamily="18" charset="0"/>
+                <a:ea typeface="Times New Roman" panose="02020603050405020304" pitchFamily="18" charset="0"/>
+              </a:rPr>
+              <a:t> Tool (CVAT)</a:t>
+            </a:r>
+            <a:endParaRPr lang="ru-RU" sz="2800" dirty="0">
+              <a:latin typeface="Times New Roman" pitchFamily="18" charset="0"/>
+              <a:cs typeface="Times New Roman" pitchFamily="18" charset="0"/>
+            </a:endParaRPr>
           </a:p>
           <a:p>
             <a:pPr marL="457200" indent="-457200">
-              <a:lnSpc>
-                <a:spcPct val="150000"/>
-              </a:lnSpc>
               <a:buFont typeface="Arial" panose="020B0604020202020204" pitchFamily="34" charset="0"/>
               <a:buChar char="•"/>
             </a:pPr>
-            <a:r>
-              <a:rPr lang="ru-RU" sz="3200" dirty="0">
-                <a:latin typeface="Times New Roman" pitchFamily="18" charset="0"/>
-                <a:cs typeface="Times New Roman" pitchFamily="18" charset="0"/>
-              </a:rPr>
-              <a:t>Клиентская часть:</a:t>
-            </a:r>
-            <a:endParaRPr lang="en-US" sz="3200" dirty="0">
+            <a:endParaRPr lang="ru-RU" sz="2800" dirty="0">
               <a:latin typeface="Times New Roman" pitchFamily="18" charset="0"/>
               <a:cs typeface="Times New Roman" pitchFamily="18" charset="0"/>
             </a:endParaRPr>
@@ -6049,7 +7088,7 @@
           <p:cNvPr id="2" name="Номер слайда 1">
             <a:extLst>
               <a:ext uri="{FF2B5EF4-FFF2-40B4-BE49-F238E27FC236}">
-                <a16:creationId xmlns:a16="http://schemas.microsoft.com/office/drawing/2014/main" id="{32D3499C-CA4B-4025-B4B2-EE8C8AC492DF}"/>
+                <a16:creationId xmlns:a16="http://schemas.microsoft.com/office/drawing/2014/main" id="{97DEE970-2311-405D-98A4-6A36A13BC27D}"/>
               </a:ext>
             </a:extLst>
           </p:cNvPr>
@@ -6071,8 +7110,12 @@
               <a:t>7</a:t>
             </a:fld>
             <a:r>
-              <a:rPr lang="ru-RU"/>
-              <a:t>/17</a:t>
+              <a:rPr lang="ru-RU" dirty="0"/>
+              <a:t>/1</a:t>
+            </a:r>
+            <a:r>
+              <a:rPr lang="en-US" dirty="0"/>
+              <a:t>6</a:t>
             </a:r>
             <a:endParaRPr lang="ru-RU" dirty="0"/>
           </a:p>
@@ -6081,7 +7124,7 @@
     </p:spTree>
     <p:extLst>
       <p:ext uri="{BB962C8B-B14F-4D97-AF65-F5344CB8AC3E}">
-        <p14:creationId xmlns:p14="http://schemas.microsoft.com/office/powerpoint/2010/main" val="2149375643"/>
+        <p14:creationId xmlns:p14="http://schemas.microsoft.com/office/powerpoint/2010/main" val="3809063854"/>
       </p:ext>
     </p:extLst>
   </p:cSld>
@@ -6132,7 +7175,7 @@
         </p:nvSpPr>
         <p:spPr>
           <a:xfrm>
-            <a:off x="1981200" y="-19455"/>
+            <a:off x="1981200" y="238960"/>
             <a:ext cx="8229600" cy="1143000"/>
           </a:xfrm>
         </p:spPr>
@@ -6148,7 +7191,21 @@
                 <a:latin typeface="Times New Roman" pitchFamily="18" charset="0"/>
                 <a:cs typeface="Times New Roman" pitchFamily="18" charset="0"/>
               </a:rPr>
-              <a:t>Обучение нейросетевой модели</a:t>
+              <a:t>Обучение </a:t>
+            </a:r>
+            <a:r>
+              <a:rPr lang="ru-RU" dirty="0" err="1">
+                <a:latin typeface="Times New Roman" pitchFamily="18" charset="0"/>
+                <a:cs typeface="Times New Roman" pitchFamily="18" charset="0"/>
+              </a:rPr>
+              <a:t>нейросетевой</a:t>
+            </a:r>
+            <a:r>
+              <a:rPr lang="ru-RU" dirty="0">
+                <a:latin typeface="Times New Roman" pitchFamily="18" charset="0"/>
+                <a:cs typeface="Times New Roman" pitchFamily="18" charset="0"/>
+              </a:rPr>
+              <a:t> модели</a:t>
             </a:r>
           </a:p>
         </p:txBody>
@@ -6180,17 +7237,526 @@
               <a:t>8</a:t>
             </a:fld>
             <a:r>
-              <a:rPr lang="ru-RU"/>
-              <a:t>/17</a:t>
+              <a:rPr lang="ru-RU" dirty="0"/>
+              <a:t>/1</a:t>
+            </a:r>
+            <a:r>
+              <a:rPr lang="en-US" dirty="0"/>
+              <a:t>6</a:t>
             </a:r>
             <a:endParaRPr lang="ru-RU" dirty="0"/>
           </a:p>
         </p:txBody>
       </p:sp>
+      <p:graphicFrame>
+        <p:nvGraphicFramePr>
+          <p:cNvPr id="3" name="Таблица 2">
+            <a:extLst>
+              <a:ext uri="{FF2B5EF4-FFF2-40B4-BE49-F238E27FC236}">
+                <a16:creationId xmlns:a16="http://schemas.microsoft.com/office/drawing/2014/main" id="{249CA920-ED08-42C3-AF94-63B34EA11C25}"/>
+              </a:ext>
+            </a:extLst>
+          </p:cNvPr>
+          <p:cNvGraphicFramePr>
+            <a:graphicFrameLocks noGrp="1"/>
+          </p:cNvGraphicFramePr>
+          <p:nvPr>
+            <p:extLst>
+              <p:ext uri="{D42A27DB-BD31-4B8C-83A1-F6EECF244321}">
+                <p14:modId xmlns:p14="http://schemas.microsoft.com/office/powerpoint/2010/main" val="3773361663"/>
+              </p:ext>
+            </p:extLst>
+          </p:nvPr>
+        </p:nvGraphicFramePr>
+        <p:xfrm>
+          <a:off x="1461052" y="2355575"/>
+          <a:ext cx="8749748" cy="3319672"/>
+        </p:xfrm>
+        <a:graphic>
+          <a:graphicData uri="http://schemas.openxmlformats.org/drawingml/2006/table">
+            <a:tbl>
+              <a:tblPr firstRow="1" firstCol="1" bandRow="1">
+                <a:tableStyleId>{5940675A-B579-460E-94D1-54222C63F5DA}</a:tableStyleId>
+              </a:tblPr>
+              <a:tblGrid>
+                <a:gridCol w="3886200">
+                  <a:extLst>
+                    <a:ext uri="{9D8B030D-6E8A-4147-A177-3AD203B41FA5}">
+                      <a16:colId xmlns:a16="http://schemas.microsoft.com/office/drawing/2014/main" val="2371387229"/>
+                    </a:ext>
+                  </a:extLst>
+                </a:gridCol>
+                <a:gridCol w="2464905">
+                  <a:extLst>
+                    <a:ext uri="{9D8B030D-6E8A-4147-A177-3AD203B41FA5}">
+                      <a16:colId xmlns:a16="http://schemas.microsoft.com/office/drawing/2014/main" val="3347896417"/>
+                    </a:ext>
+                  </a:extLst>
+                </a:gridCol>
+                <a:gridCol w="2398643">
+                  <a:extLst>
+                    <a:ext uri="{9D8B030D-6E8A-4147-A177-3AD203B41FA5}">
+                      <a16:colId xmlns:a16="http://schemas.microsoft.com/office/drawing/2014/main" val="1878050654"/>
+                    </a:ext>
+                  </a:extLst>
+                </a:gridCol>
+              </a:tblGrid>
+              <a:tr h="1124017">
+                <a:tc>
+                  <a:txBody>
+                    <a:bodyPr/>
+                    <a:lstStyle/>
+                    <a:p>
+                      <a:pPr marL="0" indent="0" algn="ctr">
+                        <a:lnSpc>
+                          <a:spcPct val="150000"/>
+                        </a:lnSpc>
+                      </a:pPr>
+                      <a:r>
+                        <a:rPr lang="ru-RU" sz="2800" b="1" dirty="0">
+                          <a:effectLst/>
+                        </a:rPr>
+                        <a:t>Модель</a:t>
+                      </a:r>
+                      <a:endParaRPr lang="ru-RU" sz="2800" b="1" dirty="0">
+                        <a:effectLst/>
+                        <a:latin typeface="Times New Roman" panose="02020603050405020304" pitchFamily="18" charset="0"/>
+                        <a:ea typeface="Times New Roman" panose="02020603050405020304" pitchFamily="18" charset="0"/>
+                        <a:cs typeface="Times New Roman" panose="02020603050405020304" pitchFamily="18" charset="0"/>
+                      </a:endParaRPr>
+                    </a:p>
+                  </a:txBody>
+                  <a:tcPr marL="68580" marR="68580" marT="0" marB="0" anchor="ctr"/>
+                </a:tc>
+                <a:tc>
+                  <a:txBody>
+                    <a:bodyPr/>
+                    <a:lstStyle/>
+                    <a:p>
+                      <a:pPr marL="0" indent="0" algn="ctr">
+                        <a:lnSpc>
+                          <a:spcPct val="150000"/>
+                        </a:lnSpc>
+                      </a:pPr>
+                      <a:r>
+                        <a:rPr lang="en-US" sz="2800" b="1" dirty="0">
+                          <a:effectLst/>
+                        </a:rPr>
+                        <a:t>mAP50</a:t>
+                      </a:r>
+                      <a:endParaRPr lang="ru-RU" sz="2800" b="1" dirty="0">
+                        <a:effectLst/>
+                        <a:latin typeface="Times New Roman" panose="02020603050405020304" pitchFamily="18" charset="0"/>
+                        <a:ea typeface="Times New Roman" panose="02020603050405020304" pitchFamily="18" charset="0"/>
+                        <a:cs typeface="Times New Roman" panose="02020603050405020304" pitchFamily="18" charset="0"/>
+                      </a:endParaRPr>
+                    </a:p>
+                  </a:txBody>
+                  <a:tcPr marL="68580" marR="68580" marT="0" marB="0" anchor="ctr"/>
+                </a:tc>
+                <a:tc>
+                  <a:txBody>
+                    <a:bodyPr/>
+                    <a:lstStyle/>
+                    <a:p>
+                      <a:pPr marL="0" indent="0" algn="ctr">
+                        <a:lnSpc>
+                          <a:spcPct val="150000"/>
+                        </a:lnSpc>
+                      </a:pPr>
+                      <a:r>
+                        <a:rPr lang="en-US" sz="2800" b="1" dirty="0">
+                          <a:effectLst/>
+                        </a:rPr>
+                        <a:t>mAP50-95</a:t>
+                      </a:r>
+                      <a:endParaRPr lang="ru-RU" sz="2800" b="1" dirty="0">
+                        <a:effectLst/>
+                        <a:latin typeface="Times New Roman" panose="02020603050405020304" pitchFamily="18" charset="0"/>
+                        <a:ea typeface="Times New Roman" panose="02020603050405020304" pitchFamily="18" charset="0"/>
+                        <a:cs typeface="Times New Roman" panose="02020603050405020304" pitchFamily="18" charset="0"/>
+                      </a:endParaRPr>
+                    </a:p>
+                  </a:txBody>
+                  <a:tcPr marL="68580" marR="68580" marT="0" marB="0" anchor="ctr"/>
+                </a:tc>
+                <a:extLst>
+                  <a:ext uri="{0D108BD9-81ED-4DB2-BD59-A6C34878D82A}">
+                    <a16:rowId xmlns:a16="http://schemas.microsoft.com/office/drawing/2014/main" val="1667047436"/>
+                  </a:ext>
+                </a:extLst>
+              </a:tr>
+              <a:tr h="731885">
+                <a:tc>
+                  <a:txBody>
+                    <a:bodyPr/>
+                    <a:lstStyle/>
+                    <a:p>
+                      <a:pPr marL="0" indent="0" algn="ctr">
+                        <a:lnSpc>
+                          <a:spcPct val="150000"/>
+                        </a:lnSpc>
+                      </a:pPr>
+                      <a:r>
+                        <a:rPr lang="ru-RU" sz="2800" b="0" kern="1200" dirty="0" err="1">
+                          <a:solidFill>
+                            <a:schemeClr val="tx1"/>
+                          </a:solidFill>
+                          <a:effectLst/>
+                        </a:rPr>
+                        <a:t>Ultralytics</a:t>
+                      </a:r>
+                      <a:r>
+                        <a:rPr lang="ru-RU" sz="2800" b="0" kern="1200" dirty="0">
+                          <a:solidFill>
+                            <a:schemeClr val="tx1"/>
+                          </a:solidFill>
+                          <a:effectLst/>
+                        </a:rPr>
+                        <a:t>  </a:t>
+                      </a:r>
+                      <a:r>
+                        <a:rPr lang="en-US" sz="2800" b="0" dirty="0">
+                          <a:solidFill>
+                            <a:schemeClr val="tx1"/>
+                          </a:solidFill>
+                          <a:effectLst/>
+                        </a:rPr>
+                        <a:t>YOLOv5</a:t>
+                      </a:r>
+                      <a:endParaRPr lang="ru-RU" sz="2800" b="0" dirty="0">
+                        <a:solidFill>
+                          <a:schemeClr val="tx1"/>
+                        </a:solidFill>
+                        <a:effectLst/>
+                        <a:latin typeface="Times New Roman" panose="02020603050405020304" pitchFamily="18" charset="0"/>
+                        <a:ea typeface="Times New Roman" panose="02020603050405020304" pitchFamily="18" charset="0"/>
+                        <a:cs typeface="Times New Roman" panose="02020603050405020304" pitchFamily="18" charset="0"/>
+                      </a:endParaRPr>
+                    </a:p>
+                  </a:txBody>
+                  <a:tcPr marL="68580" marR="68580" marT="0" marB="0" anchor="ctr"/>
+                </a:tc>
+                <a:tc>
+                  <a:txBody>
+                    <a:bodyPr/>
+                    <a:lstStyle/>
+                    <a:p>
+                      <a:pPr marL="0" indent="0" algn="ctr">
+                        <a:lnSpc>
+                          <a:spcPct val="150000"/>
+                        </a:lnSpc>
+                      </a:pPr>
+                      <a:r>
+                        <a:rPr lang="en-US" sz="2800" b="0" dirty="0">
+                          <a:effectLst/>
+                        </a:rPr>
+                        <a:t>0,8</a:t>
+                      </a:r>
+                      <a:r>
+                        <a:rPr lang="ru-RU" sz="2800" b="0" dirty="0">
+                          <a:effectLst/>
+                        </a:rPr>
+                        <a:t>29</a:t>
+                      </a:r>
+                      <a:endParaRPr lang="ru-RU" sz="2800" b="0" dirty="0">
+                        <a:effectLst/>
+                        <a:latin typeface="Times New Roman" panose="02020603050405020304" pitchFamily="18" charset="0"/>
+                        <a:ea typeface="Times New Roman" panose="02020603050405020304" pitchFamily="18" charset="0"/>
+                        <a:cs typeface="Times New Roman" panose="02020603050405020304" pitchFamily="18" charset="0"/>
+                      </a:endParaRPr>
+                    </a:p>
+                  </a:txBody>
+                  <a:tcPr marL="68580" marR="68580" marT="0" marB="0" anchor="ctr"/>
+                </a:tc>
+                <a:tc>
+                  <a:txBody>
+                    <a:bodyPr/>
+                    <a:lstStyle/>
+                    <a:p>
+                      <a:pPr marL="0" indent="0" algn="ctr">
+                        <a:lnSpc>
+                          <a:spcPct val="150000"/>
+                        </a:lnSpc>
+                      </a:pPr>
+                      <a:r>
+                        <a:rPr lang="en-US" sz="2800" b="0" dirty="0">
+                          <a:effectLst/>
+                        </a:rPr>
+                        <a:t>0,</a:t>
+                      </a:r>
+                      <a:r>
+                        <a:rPr lang="ru-RU" sz="2800" b="0" dirty="0">
+                          <a:effectLst/>
+                        </a:rPr>
+                        <a:t>615</a:t>
+                      </a:r>
+                      <a:endParaRPr lang="ru-RU" sz="2800" b="0" dirty="0">
+                        <a:effectLst/>
+                        <a:latin typeface="Times New Roman" panose="02020603050405020304" pitchFamily="18" charset="0"/>
+                        <a:ea typeface="Times New Roman" panose="02020603050405020304" pitchFamily="18" charset="0"/>
+                        <a:cs typeface="Times New Roman" panose="02020603050405020304" pitchFamily="18" charset="0"/>
+                      </a:endParaRPr>
+                    </a:p>
+                  </a:txBody>
+                  <a:tcPr marL="68580" marR="68580" marT="0" marB="0" anchor="ctr"/>
+                </a:tc>
+                <a:extLst>
+                  <a:ext uri="{0D108BD9-81ED-4DB2-BD59-A6C34878D82A}">
+                    <a16:rowId xmlns:a16="http://schemas.microsoft.com/office/drawing/2014/main" val="3350181908"/>
+                  </a:ext>
+                </a:extLst>
+              </a:tr>
+              <a:tr h="731885">
+                <a:tc>
+                  <a:txBody>
+                    <a:bodyPr/>
+                    <a:lstStyle/>
+                    <a:p>
+                      <a:pPr marL="0" indent="0" algn="ctr">
+                        <a:lnSpc>
+                          <a:spcPct val="150000"/>
+                        </a:lnSpc>
+                      </a:pPr>
+                      <a:r>
+                        <a:rPr lang="ru-RU" sz="2800" b="0" kern="1200" dirty="0" err="1">
+                          <a:solidFill>
+                            <a:schemeClr val="tx1"/>
+                          </a:solidFill>
+                          <a:effectLst/>
+                        </a:rPr>
+                        <a:t>Ultralytics</a:t>
+                      </a:r>
+                      <a:r>
+                        <a:rPr lang="ru-RU" sz="2800" b="0" dirty="0">
+                          <a:solidFill>
+                            <a:schemeClr val="tx1"/>
+                          </a:solidFill>
+                          <a:effectLst/>
+                        </a:rPr>
+                        <a:t> </a:t>
+                      </a:r>
+                      <a:r>
+                        <a:rPr lang="en-US" sz="2800" b="0" dirty="0">
+                          <a:solidFill>
+                            <a:schemeClr val="tx1"/>
+                          </a:solidFill>
+                          <a:effectLst/>
+                        </a:rPr>
+                        <a:t>YOLOv8</a:t>
+                      </a:r>
+                      <a:endParaRPr lang="ru-RU" sz="2800" b="0" dirty="0">
+                        <a:solidFill>
+                          <a:schemeClr val="tx1"/>
+                        </a:solidFill>
+                        <a:effectLst/>
+                        <a:latin typeface="Times New Roman" panose="02020603050405020304" pitchFamily="18" charset="0"/>
+                        <a:ea typeface="Times New Roman" panose="02020603050405020304" pitchFamily="18" charset="0"/>
+                        <a:cs typeface="Times New Roman" panose="02020603050405020304" pitchFamily="18" charset="0"/>
+                      </a:endParaRPr>
+                    </a:p>
+                  </a:txBody>
+                  <a:tcPr marL="68580" marR="68580" marT="0" marB="0" anchor="ctr"/>
+                </a:tc>
+                <a:tc>
+                  <a:txBody>
+                    <a:bodyPr/>
+                    <a:lstStyle/>
+                    <a:p>
+                      <a:pPr marL="0" indent="0" algn="ctr">
+                        <a:lnSpc>
+                          <a:spcPct val="150000"/>
+                        </a:lnSpc>
+                      </a:pPr>
+                      <a:r>
+                        <a:rPr lang="en-US" sz="2800" b="0" dirty="0">
+                          <a:effectLst/>
+                        </a:rPr>
+                        <a:t>0,</a:t>
+                      </a:r>
+                      <a:r>
+                        <a:rPr lang="ru-RU" sz="2800" b="0" dirty="0">
+                          <a:effectLst/>
+                        </a:rPr>
+                        <a:t>834</a:t>
+                      </a:r>
+                      <a:endParaRPr lang="ru-RU" sz="2800" b="0" dirty="0">
+                        <a:effectLst/>
+                        <a:latin typeface="Times New Roman" panose="02020603050405020304" pitchFamily="18" charset="0"/>
+                        <a:ea typeface="Times New Roman" panose="02020603050405020304" pitchFamily="18" charset="0"/>
+                        <a:cs typeface="Times New Roman" panose="02020603050405020304" pitchFamily="18" charset="0"/>
+                      </a:endParaRPr>
+                    </a:p>
+                  </a:txBody>
+                  <a:tcPr marL="68580" marR="68580" marT="0" marB="0" anchor="ctr"/>
+                </a:tc>
+                <a:tc>
+                  <a:txBody>
+                    <a:bodyPr/>
+                    <a:lstStyle/>
+                    <a:p>
+                      <a:pPr marL="0" indent="0" algn="ctr">
+                        <a:lnSpc>
+                          <a:spcPct val="150000"/>
+                        </a:lnSpc>
+                      </a:pPr>
+                      <a:r>
+                        <a:rPr lang="en-US" sz="2800" b="0" dirty="0">
+                          <a:effectLst/>
+                        </a:rPr>
+                        <a:t>0,</a:t>
+                      </a:r>
+                      <a:r>
+                        <a:rPr lang="ru-RU" sz="2800" b="0" dirty="0">
+                          <a:effectLst/>
+                        </a:rPr>
+                        <a:t>626</a:t>
+                      </a:r>
+                      <a:endParaRPr lang="ru-RU" sz="2800" b="0" dirty="0">
+                        <a:effectLst/>
+                        <a:latin typeface="Times New Roman" panose="02020603050405020304" pitchFamily="18" charset="0"/>
+                        <a:ea typeface="Times New Roman" panose="02020603050405020304" pitchFamily="18" charset="0"/>
+                        <a:cs typeface="Times New Roman" panose="02020603050405020304" pitchFamily="18" charset="0"/>
+                      </a:endParaRPr>
+                    </a:p>
+                  </a:txBody>
+                  <a:tcPr marL="68580" marR="68580" marT="0" marB="0" anchor="ctr"/>
+                </a:tc>
+                <a:extLst>
+                  <a:ext uri="{0D108BD9-81ED-4DB2-BD59-A6C34878D82A}">
+                    <a16:rowId xmlns:a16="http://schemas.microsoft.com/office/drawing/2014/main" val="4195279167"/>
+                  </a:ext>
+                </a:extLst>
+              </a:tr>
+              <a:tr h="731885">
+                <a:tc>
+                  <a:txBody>
+                    <a:bodyPr/>
+                    <a:lstStyle/>
+                    <a:p>
+                      <a:pPr marL="0" indent="0" algn="ctr">
+                        <a:lnSpc>
+                          <a:spcPct val="150000"/>
+                        </a:lnSpc>
+                      </a:pPr>
+                      <a:r>
+                        <a:rPr lang="ru-RU" sz="2800" b="0" kern="1200" dirty="0" err="1">
+                          <a:solidFill>
+                            <a:schemeClr val="tx1"/>
+                          </a:solidFill>
+                          <a:effectLst/>
+                        </a:rPr>
+                        <a:t>Ultralytics</a:t>
+                      </a:r>
+                      <a:r>
+                        <a:rPr lang="ru-RU" sz="2800" b="0" dirty="0">
+                          <a:solidFill>
+                            <a:schemeClr val="tx1"/>
+                          </a:solidFill>
+                          <a:effectLst/>
+                        </a:rPr>
+                        <a:t> </a:t>
+                      </a:r>
+                      <a:r>
+                        <a:rPr lang="en-US" sz="2800" b="0" dirty="0">
+                          <a:solidFill>
+                            <a:schemeClr val="tx1"/>
+                          </a:solidFill>
+                          <a:effectLst/>
+                        </a:rPr>
+                        <a:t>YOLO11</a:t>
+                      </a:r>
+                      <a:endParaRPr lang="ru-RU" sz="2800" b="0" dirty="0">
+                        <a:solidFill>
+                          <a:schemeClr val="tx1"/>
+                        </a:solidFill>
+                        <a:effectLst/>
+                        <a:latin typeface="Times New Roman" panose="02020603050405020304" pitchFamily="18" charset="0"/>
+                        <a:ea typeface="Times New Roman" panose="02020603050405020304" pitchFamily="18" charset="0"/>
+                        <a:cs typeface="Times New Roman" panose="02020603050405020304" pitchFamily="18" charset="0"/>
+                      </a:endParaRPr>
+                    </a:p>
+                  </a:txBody>
+                  <a:tcPr marL="68580" marR="68580" marT="0" marB="0" anchor="ctr"/>
+                </a:tc>
+                <a:tc>
+                  <a:txBody>
+                    <a:bodyPr/>
+                    <a:lstStyle/>
+                    <a:p>
+                      <a:pPr marL="0" indent="0" algn="ctr">
+                        <a:lnSpc>
+                          <a:spcPct val="150000"/>
+                        </a:lnSpc>
+                      </a:pPr>
+                      <a:r>
+                        <a:rPr lang="en-US" sz="2800" b="0" dirty="0">
+                          <a:effectLst/>
+                        </a:rPr>
+                        <a:t>0,</a:t>
+                      </a:r>
+                      <a:r>
+                        <a:rPr lang="ru-RU" sz="2800" b="0" dirty="0">
+                          <a:effectLst/>
+                        </a:rPr>
+                        <a:t>831</a:t>
+                      </a:r>
+                      <a:endParaRPr lang="ru-RU" sz="2800" b="0" dirty="0">
+                        <a:effectLst/>
+                        <a:latin typeface="Times New Roman" panose="02020603050405020304" pitchFamily="18" charset="0"/>
+                        <a:ea typeface="Times New Roman" panose="02020603050405020304" pitchFamily="18" charset="0"/>
+                        <a:cs typeface="Times New Roman" panose="02020603050405020304" pitchFamily="18" charset="0"/>
+                      </a:endParaRPr>
+                    </a:p>
+                  </a:txBody>
+                  <a:tcPr marL="68580" marR="68580" marT="0" marB="0" anchor="ctr"/>
+                </a:tc>
+                <a:tc>
+                  <a:txBody>
+                    <a:bodyPr/>
+                    <a:lstStyle/>
+                    <a:p>
+                      <a:pPr marL="0" indent="0" algn="ctr">
+                        <a:lnSpc>
+                          <a:spcPct val="150000"/>
+                        </a:lnSpc>
+                      </a:pPr>
+                      <a:r>
+                        <a:rPr lang="en-US" sz="2800" b="0" dirty="0">
+                          <a:effectLst/>
+                        </a:rPr>
+                        <a:t>0,</a:t>
+                      </a:r>
+                      <a:r>
+                        <a:rPr lang="ru-RU" sz="2800" b="0" dirty="0">
+                          <a:effectLst/>
+                        </a:rPr>
+                        <a:t>611</a:t>
+                      </a:r>
+                      <a:endParaRPr lang="ru-RU" sz="2800" b="0" dirty="0">
+                        <a:effectLst/>
+                        <a:latin typeface="Times New Roman" panose="02020603050405020304" pitchFamily="18" charset="0"/>
+                        <a:ea typeface="Times New Roman" panose="02020603050405020304" pitchFamily="18" charset="0"/>
+                        <a:cs typeface="Times New Roman" panose="02020603050405020304" pitchFamily="18" charset="0"/>
+                      </a:endParaRPr>
+                    </a:p>
+                  </a:txBody>
+                  <a:tcPr marL="68580" marR="68580" marT="0" marB="0" anchor="ctr"/>
+                </a:tc>
+                <a:extLst>
+                  <a:ext uri="{0D108BD9-81ED-4DB2-BD59-A6C34878D82A}">
+                    <a16:rowId xmlns:a16="http://schemas.microsoft.com/office/drawing/2014/main" val="1343042795"/>
+                  </a:ext>
+                </a:extLst>
+              </a:tr>
+            </a:tbl>
+          </a:graphicData>
+        </a:graphic>
+      </p:graphicFrame>
     </p:spTree>
     <p:extLst>
       <p:ext uri="{BB962C8B-B14F-4D97-AF65-F5344CB8AC3E}">
-        <p14:creationId xmlns:p14="http://schemas.microsoft.com/office/powerpoint/2010/main" val="614845612"/>
+        <p14:creationId xmlns:p14="http://schemas.microsoft.com/office/powerpoint/2010/main" val="3480043864"/>
       </p:ext>
     </p:extLst>
   </p:cSld>
@@ -6223,79 +7789,6 @@
           <a:chExt cx="0" cy="0"/>
         </a:xfrm>
       </p:grpSpPr>
-      <p:sp>
-        <p:nvSpPr>
-          <p:cNvPr id="4" name="Заголовок 1">
-            <a:extLst>
-              <a:ext uri="{FF2B5EF4-FFF2-40B4-BE49-F238E27FC236}">
-                <a16:creationId xmlns:a16="http://schemas.microsoft.com/office/drawing/2014/main" id="{A4C698A9-5C36-6C05-97EF-2665C29AE5B8}"/>
-              </a:ext>
-            </a:extLst>
-          </p:cNvPr>
-          <p:cNvSpPr>
-            <a:spLocks noGrp="1"/>
-          </p:cNvSpPr>
-          <p:nvPr>
-            <p:ph type="title"/>
-          </p:nvPr>
-        </p:nvSpPr>
-        <p:spPr>
-          <a:xfrm>
-            <a:off x="1981200" y="-103760"/>
-            <a:ext cx="8229600" cy="1143000"/>
-          </a:xfrm>
-        </p:spPr>
-        <p:txBody>
-          <a:bodyPr>
-            <a:normAutofit/>
-          </a:bodyPr>
-          <a:lstStyle/>
-          <a:p>
-            <a:pPr algn="ctr"/>
-            <a:r>
-              <a:rPr lang="ru-RU" dirty="0">
-                <a:latin typeface="Times New Roman" pitchFamily="18" charset="0"/>
-                <a:cs typeface="Times New Roman" pitchFamily="18" charset="0"/>
-              </a:rPr>
-              <a:t>Эксперименты</a:t>
-            </a:r>
-          </a:p>
-        </p:txBody>
-      </p:sp>
-      <p:sp>
-        <p:nvSpPr>
-          <p:cNvPr id="2" name="Номер слайда 1">
-            <a:extLst>
-              <a:ext uri="{FF2B5EF4-FFF2-40B4-BE49-F238E27FC236}">
-                <a16:creationId xmlns:a16="http://schemas.microsoft.com/office/drawing/2014/main" id="{D1783245-5BA7-AC7E-9457-397128EC1F44}"/>
-              </a:ext>
-            </a:extLst>
-          </p:cNvPr>
-          <p:cNvSpPr>
-            <a:spLocks noGrp="1"/>
-          </p:cNvSpPr>
-          <p:nvPr>
-            <p:ph type="sldNum" sz="quarter" idx="12"/>
-          </p:nvPr>
-        </p:nvSpPr>
-        <p:spPr/>
-        <p:txBody>
-          <a:bodyPr/>
-          <a:lstStyle/>
-          <a:p>
-            <a:fld id="{1FB77788-E5A7-4255-94F6-739BDA5FC0D4}" type="slidenum">
-              <a:rPr lang="ru-RU" smtClean="0"/>
-              <a:pPr/>
-              <a:t>9</a:t>
-            </a:fld>
-            <a:r>
-              <a:rPr lang="ru-RU"/>
-              <a:t>/17</a:t>
-            </a:r>
-            <a:endParaRPr lang="ru-RU" dirty="0"/>
-          </a:p>
-        </p:txBody>
-      </p:sp>
       <p:pic>
         <p:nvPicPr>
           <p:cNvPr id="3" name="Рисунок 2">
@@ -6318,19 +7811,96 @@
         </p:blipFill>
         <p:spPr>
           <a:xfrm>
-            <a:off x="2652408" y="791303"/>
-            <a:ext cx="6880698" cy="6066697"/>
+            <a:off x="2584174" y="731141"/>
+            <a:ext cx="6948932" cy="6126859"/>
           </a:xfrm>
           <a:prstGeom prst="rect">
             <a:avLst/>
           </a:prstGeom>
           <a:ln w="12700">
             <a:solidFill>
-              <a:schemeClr val="tx1"/>
+              <a:schemeClr val="bg1"/>
             </a:solidFill>
           </a:ln>
         </p:spPr>
       </p:pic>
+      <p:sp>
+        <p:nvSpPr>
+          <p:cNvPr id="4" name="Заголовок 1">
+            <a:extLst>
+              <a:ext uri="{FF2B5EF4-FFF2-40B4-BE49-F238E27FC236}">
+                <a16:creationId xmlns:a16="http://schemas.microsoft.com/office/drawing/2014/main" id="{A4C698A9-5C36-6C05-97EF-2665C29AE5B8}"/>
+              </a:ext>
+            </a:extLst>
+          </p:cNvPr>
+          <p:cNvSpPr>
+            <a:spLocks noGrp="1"/>
+          </p:cNvSpPr>
+          <p:nvPr>
+            <p:ph type="title"/>
+          </p:nvPr>
+        </p:nvSpPr>
+        <p:spPr>
+          <a:xfrm>
+            <a:off x="1981200" y="-133577"/>
+            <a:ext cx="8229600" cy="1143000"/>
+          </a:xfrm>
+        </p:spPr>
+        <p:txBody>
+          <a:bodyPr>
+            <a:normAutofit/>
+          </a:bodyPr>
+          <a:lstStyle/>
+          <a:p>
+            <a:pPr algn="ctr"/>
+            <a:r>
+              <a:rPr lang="ru-RU" dirty="0">
+                <a:latin typeface="Times New Roman" pitchFamily="18" charset="0"/>
+                <a:cs typeface="Times New Roman" pitchFamily="18" charset="0"/>
+              </a:rPr>
+              <a:t>Тестирование</a:t>
+            </a:r>
+          </a:p>
+        </p:txBody>
+      </p:sp>
+      <p:sp>
+        <p:nvSpPr>
+          <p:cNvPr id="2" name="Номер слайда 1">
+            <a:extLst>
+              <a:ext uri="{FF2B5EF4-FFF2-40B4-BE49-F238E27FC236}">
+                <a16:creationId xmlns:a16="http://schemas.microsoft.com/office/drawing/2014/main" id="{D1783245-5BA7-AC7E-9457-397128EC1F44}"/>
+              </a:ext>
+            </a:extLst>
+          </p:cNvPr>
+          <p:cNvSpPr>
+            <a:spLocks noGrp="1"/>
+          </p:cNvSpPr>
+          <p:nvPr>
+            <p:ph type="sldNum" sz="quarter" idx="12"/>
+          </p:nvPr>
+        </p:nvSpPr>
+        <p:spPr/>
+        <p:txBody>
+          <a:bodyPr/>
+          <a:lstStyle/>
+          <a:p>
+            <a:fld id="{1FB77788-E5A7-4255-94F6-739BDA5FC0D4}" type="slidenum">
+              <a:rPr lang="ru-RU" smtClean="0"/>
+              <a:pPr/>
+              <a:t>9</a:t>
+            </a:fld>
+            <a:r>
+              <a:rPr lang="ru-RU" dirty="0"/>
+              <a:t>/1</a:t>
+            </a:r>
+            <a:r>
+              <a:rPr lang="en-US" dirty="0"/>
+              <a:t>6</a:t>
+            </a:r>
+            <a:endParaRPr lang="ru-RU" dirty="0"/>
+          </a:p>
+        </p:txBody>
+      </p:sp>
     </p:spTree>
     <p:extLst>
       <p:ext uri="{BB962C8B-B14F-4D97-AF65-F5344CB8AC3E}">
